--- a/folletos/2026-04/pptx/FIP_VANTRUST_LIQUIDEZ_RESERVA_DOLAR.pptx
+++ b/folletos/2026-04/pptx/FIP_VANTRUST_LIQUIDEZ_RESERVA_DOLAR.pptx
@@ -3035,7 +3035,7 @@
                 <a:ea typeface="Calibri" pitchFamily="34" charset="-122"/>
                 <a:cs typeface="Calibri" pitchFamily="34" charset="-120"/>
               </a:rPr>
-              <a:t>prueba USD</a:t>
+              <a:t>prueba 13 USD</a:t>
             </a:r>
             <a:endParaRPr lang="en-US" sz="800" dirty="0"/>
           </a:p>

--- a/folletos/2026-04/pptx/FIP_VANTRUST_LIQUIDEZ_RESERVA_DOLAR.pptx
+++ b/folletos/2026-04/pptx/FIP_VANTRUST_LIQUIDEZ_RESERVA_DOLAR.pptx
@@ -127,7 +127,7 @@
               <c:strCache>
                 <c:ptCount val="1"/>
                 <c:pt idx="0">
-                  <c:v>LIQUIDEZ RESERVA DÓLAR</c:v>
+                  <c:v>ICP Nom.</c:v>
                 </c:pt>
               </c:strCache>
             </c:strRef>
@@ -189,9 +189,9 @@
           </c:marker>
           <c:cat>
             <c:multiLvlStrRef>
-              <c:f>Sheet1!$A$2:$A$17</c:f>
+              <c:f>Sheet1!$A$2:$A$16</c:f>
               <c:multiLvlStrCache>
-                <c:ptCount val="16"/>
+                <c:ptCount val="15"/>
                 <c:lvl>
                   <c:pt idx="0">
                     <c:v>Jan 2025</c:v>
@@ -238,66 +238,60 @@
                   <c:pt idx="14">
                     <c:v>Mar 2026</c:v>
                   </c:pt>
-                  <c:pt idx="15">
-                    <c:v>Apr 2026</c:v>
-                  </c:pt>
                 </c:lvl>
               </c:multiLvlStrCache>
             </c:multiLvlStrRef>
           </c:cat>
           <c:val>
             <c:numRef>
-              <c:f>Sheet1!$B$2:$B$17</c:f>
+              <c:f>Sheet1!$B$2:$B$16</c:f>
               <c:numCache>
                 <c:formatCode>General</c:formatCode>
-                <c:ptCount val="16"/>
+                <c:ptCount val="15"/>
                 <c:pt idx="0">
                   <c:v>100</c:v>
                 </c:pt>
                 <c:pt idx="1">
-                  <c:v>102.39</c:v>
+                  <c:v>100.39</c:v>
                 </c:pt>
                 <c:pt idx="2">
-                  <c:v>102.61</c:v>
+                  <c:v>100.82</c:v>
                 </c:pt>
                 <c:pt idx="3">
-                  <c:v>102.9</c:v>
+                  <c:v>101.24</c:v>
                 </c:pt>
                 <c:pt idx="4">
-                  <c:v>103.05</c:v>
+                  <c:v>101.67</c:v>
                 </c:pt>
                 <c:pt idx="5">
-                  <c:v>103.22</c:v>
+                  <c:v>102.1</c:v>
                 </c:pt>
                 <c:pt idx="6">
-                  <c:v>103.74</c:v>
+                  <c:v>102.54</c:v>
                 </c:pt>
                 <c:pt idx="7">
-                  <c:v>104.23</c:v>
+                  <c:v>102.94</c:v>
                 </c:pt>
                 <c:pt idx="8">
-                  <c:v>104.66</c:v>
+                  <c:v>103.49</c:v>
                 </c:pt>
                 <c:pt idx="9">
-                  <c:v>105.16</c:v>
+                  <c:v>103.78</c:v>
                 </c:pt>
                 <c:pt idx="10">
-                  <c:v>105.61</c:v>
+                  <c:v>104.18</c:v>
                 </c:pt>
                 <c:pt idx="11">
-                  <c:v>106.13</c:v>
+                  <c:v>104.61</c:v>
                 </c:pt>
                 <c:pt idx="12">
-                  <c:v>106.63</c:v>
+                  <c:v>105.02</c:v>
                 </c:pt>
                 <c:pt idx="13">
-                  <c:v>106.99</c:v>
+                  <c:v>105.4</c:v>
                 </c:pt>
                 <c:pt idx="14">
-                  <c:v>107.48</c:v>
-                </c:pt>
-                <c:pt idx="15">
-                  <c:v>107.93</c:v>
+                  <c:v>105.81</c:v>
                 </c:pt>
               </c:numCache>
             </c:numRef>
@@ -313,7 +307,7 @@
               <c:strCache>
                 <c:ptCount val="1"/>
                 <c:pt idx="0">
-                  <c:v>Competencia Relevante (*)</c:v>
+                  <c:v>FIP LIQUIDEZ RESERVA DOLAR</c:v>
                 </c:pt>
               </c:strCache>
             </c:strRef>
@@ -375,9 +369,9 @@
           </c:marker>
           <c:cat>
             <c:multiLvlStrRef>
-              <c:f>Sheet1!$A$2:$A$17</c:f>
+              <c:f>Sheet1!$A$2:$A$16</c:f>
               <c:multiLvlStrCache>
-                <c:ptCount val="16"/>
+                <c:ptCount val="15"/>
                 <c:lvl>
                   <c:pt idx="0">
                     <c:v>Jan 2025</c:v>
@@ -424,8 +418,185 @@
                   <c:pt idx="14">
                     <c:v>Mar 2026</c:v>
                   </c:pt>
-                  <c:pt idx="15">
-                    <c:v>Apr 2026</c:v>
+                </c:lvl>
+              </c:multiLvlStrCache>
+            </c:multiLvlStrRef>
+          </c:cat>
+          <c:val>
+            <c:numRef>
+              <c:f>Sheet1!$C$2:$C$16</c:f>
+              <c:numCache>
+                <c:formatCode>General</c:formatCode>
+                <c:ptCount val="15"/>
+                <c:pt idx="0">
+                  <c:v>100</c:v>
+                </c:pt>
+                <c:pt idx="1">
+                  <c:v/>
+                </c:pt>
+                <c:pt idx="2">
+                  <c:v/>
+                </c:pt>
+                <c:pt idx="3">
+                  <c:v/>
+                </c:pt>
+                <c:pt idx="4">
+                  <c:v/>
+                </c:pt>
+                <c:pt idx="5">
+                  <c:v/>
+                </c:pt>
+                <c:pt idx="6">
+                  <c:v/>
+                </c:pt>
+                <c:pt idx="7">
+                  <c:v/>
+                </c:pt>
+                <c:pt idx="8">
+                  <c:v/>
+                </c:pt>
+                <c:pt idx="9">
+                  <c:v/>
+                </c:pt>
+                <c:pt idx="10">
+                  <c:v/>
+                </c:pt>
+                <c:pt idx="11">
+                  <c:v/>
+                </c:pt>
+                <c:pt idx="12">
+                  <c:v/>
+                </c:pt>
+                <c:pt idx="13">
+                  <c:v/>
+                </c:pt>
+                <c:pt idx="14">
+                  <c:v/>
+                </c:pt>
+              </c:numCache>
+            </c:numRef>
+          </c:val>
+          <c:smooth val="0"/>
+        </c:ser>
+        <c:ser>
+          <c:idx val="2"/>
+          <c:order val="2"/>
+          <c:tx>
+            <c:strRef>
+              <c:f>Sheet1!$D$1</c:f>
+              <c:strCache>
+                <c:ptCount val="1"/>
+                <c:pt idx="0">
+                  <c:v>Competencia Relevante (*)</c:v>
+                </c:pt>
+              </c:strCache>
+            </c:strRef>
+          </c:tx>
+          <c:spPr>
+            <a:solidFill>
+              <a:srgbClr val="555555"/>
+            </a:solidFill>
+            <a:ln w="15240" cap="flat">
+              <a:solidFill>
+                <a:srgbClr val="555555"/>
+              </a:solidFill>
+              <a:prstDash val="solid"/>
+              <a:round/>
+            </a:ln>
+            <a:effectLst/>
+          </c:spPr>
+          <c:invertIfNegative val="0"/>
+          <c:dLbls>
+            <c:numFmt formatCode="#,##0" sourceLinked="0"/>
+            <c:txPr>
+              <a:bodyPr/>
+              <a:lstStyle/>
+              <a:p>
+                <a:pPr>
+                  <a:defRPr b="0" i="0" strike="noStrike" sz="1200" u="none">
+                    <a:solidFill>
+                      <a:srgbClr val="000000"/>
+                    </a:solidFill>
+                    <a:latin typeface="Arial"/>
+                  </a:defRPr>
+                </a:pPr>
+              </a:p>
+            </c:txPr>
+            <c:showLegendKey val="0"/>
+            <c:showVal val="0"/>
+            <c:showCatName val="0"/>
+            <c:showSerName val="0"/>
+            <c:showPercent val="0"/>
+            <c:showBubbleSize val="0"/>
+            <c:showLeaderLines val="0"/>
+          </c:dLbls>
+          <c:marker>
+            <c:symbol val="circle"/>
+            <c:size val="6"/>
+            <c:spPr>
+              <a:solidFill>
+                <a:srgbClr val="555555"/>
+              </a:solidFill>
+              <a:ln w="9525" cap="flat">
+                <a:solidFill>
+                  <a:srgbClr val="555555"/>
+                </a:solidFill>
+                <a:prstDash val="solid"/>
+                <a:round/>
+              </a:ln>
+              <a:effectLst/>
+            </c:spPr>
+          </c:marker>
+          <c:cat>
+            <c:multiLvlStrRef>
+              <c:f>Sheet1!$A$2:$A$16</c:f>
+              <c:multiLvlStrCache>
+                <c:ptCount val="15"/>
+                <c:lvl>
+                  <c:pt idx="0">
+                    <c:v>Jan 2025</c:v>
+                  </c:pt>
+                  <c:pt idx="1">
+                    <c:v>Feb 2025</c:v>
+                  </c:pt>
+                  <c:pt idx="2">
+                    <c:v>Mar 2025</c:v>
+                  </c:pt>
+                  <c:pt idx="3">
+                    <c:v>Apr 2025</c:v>
+                  </c:pt>
+                  <c:pt idx="4">
+                    <c:v>May 2025</c:v>
+                  </c:pt>
+                  <c:pt idx="5">
+                    <c:v>Jun 2025</c:v>
+                  </c:pt>
+                  <c:pt idx="6">
+                    <c:v>Jul 2025</c:v>
+                  </c:pt>
+                  <c:pt idx="7">
+                    <c:v>Aug 2025</c:v>
+                  </c:pt>
+                  <c:pt idx="8">
+                    <c:v>Sep 2025</c:v>
+                  </c:pt>
+                  <c:pt idx="9">
+                    <c:v>Oct 2025</c:v>
+                  </c:pt>
+                  <c:pt idx="10">
+                    <c:v>Nov 2025</c:v>
+                  </c:pt>
+                  <c:pt idx="11">
+                    <c:v>Dec 2025</c:v>
+                  </c:pt>
+                  <c:pt idx="12">
+                    <c:v>Jan 2026</c:v>
+                  </c:pt>
+                  <c:pt idx="13">
+                    <c:v>Feb 2026</c:v>
+                  </c:pt>
+                  <c:pt idx="14">
+                    <c:v>Mar 2026</c:v>
                   </c:pt>
                 </c:lvl>
               </c:multiLvlStrCache>
@@ -433,10 +604,10 @@
           </c:cat>
           <c:val>
             <c:numRef>
-              <c:f>Sheet1!$C$2:$C$17</c:f>
+              <c:f>Sheet1!$D$2:$D$16</c:f>
               <c:numCache>
                 <c:formatCode>General</c:formatCode>
-                <c:ptCount val="16"/>
+                <c:ptCount val="15"/>
                 <c:pt idx="0">
                   <c:v>100</c:v>
                 </c:pt>
@@ -481,9 +652,6 @@
                 </c:pt>
                 <c:pt idx="14">
                   <c:v>104.08</c:v>
-                </c:pt>
-                <c:pt idx="15">
-                  <c:v>104.35</c:v>
                 </c:pt>
               </c:numCache>
             </c:numRef>
@@ -3035,7 +3203,7 @@
                 <a:ea typeface="Calibri" pitchFamily="34" charset="-122"/>
                 <a:cs typeface="Calibri" pitchFamily="34" charset="-120"/>
               </a:rPr>
-              <a:t>prueba 13 USD</a:t>
+              <a:t>prueba USD</a:t>
             </a:r>
             <a:endParaRPr lang="en-US" sz="800" dirty="0"/>
           </a:p>
@@ -3616,417 +3784,7 @@
                           <a:ea typeface="Calibri" pitchFamily="34" charset="-122"/>
                           <a:cs typeface="Calibri" pitchFamily="34" charset="-120"/>
                         </a:rPr>
-                        <a:t>Competencia</a:t>
-                      </a:r>
-                      <a:endParaRPr lang="en-US" sz="750" dirty="0">
-                        <a:latin typeface="Calibri" charset="0"/>
-                        <a:ea typeface="Calibri" charset="0"/>
-                        <a:cs typeface="Calibri" charset="0"/>
-                      </a:endParaRPr>
-                    </a:p>
-                  </a:txBody>
-                  <a:tcPr marL="91440" marR="91440" marT="45720" marB="45720">
-                    <a:lnL w="3810" cap="flat" cmpd="sng" algn="ctr">
-                      <a:solidFill>
-                        <a:srgbClr val="DDDDDD"/>
-                      </a:solidFill>
-                      <a:prstDash val="solid"/>
-                      <a:round/>
-                      <a:headEnd type="none" w="med" len="med"/>
-                      <a:tailEnd type="none" w="med" len="med"/>
-                    </a:lnL>
-                    <a:lnR w="3810" cap="flat" cmpd="sng" algn="ctr">
-                      <a:solidFill>
-                        <a:srgbClr val="DDDDDD"/>
-                      </a:solidFill>
-                      <a:prstDash val="solid"/>
-                      <a:round/>
-                      <a:headEnd type="none" w="med" len="med"/>
-                      <a:tailEnd type="none" w="med" len="med"/>
-                    </a:lnR>
-                    <a:lnT w="3810" cap="flat" cmpd="sng" algn="ctr">
-                      <a:solidFill>
-                        <a:srgbClr val="DDDDDD"/>
-                      </a:solidFill>
-                      <a:prstDash val="solid"/>
-                      <a:round/>
-                      <a:headEnd type="none" w="med" len="med"/>
-                      <a:tailEnd type="none" w="med" len="med"/>
-                    </a:lnT>
-                    <a:lnB w="3810" cap="flat" cmpd="sng" algn="ctr">
-                      <a:solidFill>
-                        <a:srgbClr val="DDDDDD"/>
-                      </a:solidFill>
-                      <a:prstDash val="solid"/>
-                      <a:round/>
-                      <a:headEnd type="none" w="med" len="med"/>
-                      <a:tailEnd type="none" w="med" len="med"/>
-                    </a:lnB>
-                    <a:solidFill>
-                      <a:srgbClr val="F9F9F9"/>
-                    </a:solidFill>
-                  </a:tcPr>
-                </a:tc>
-                <a:tc>
-                  <a:txBody>
-                    <a:bodyPr/>
-                    <a:lstStyle/>
-                    <a:p>
-                      <a:pPr algn="ctr" indent="0" marL="0">
-                        <a:buNone/>
-                      </a:pPr>
-                      <a:r>
-                        <a:rPr lang="en-US" sz="750" dirty="0">
-                          <a:solidFill>
-                            <a:srgbClr val="333333"/>
-                          </a:solidFill>
-                          <a:latin typeface="Calibri" pitchFamily="34" charset="0"/>
-                          <a:ea typeface="Calibri" pitchFamily="34" charset="-122"/>
-                          <a:cs typeface="Calibri" pitchFamily="34" charset="-120"/>
-                        </a:rPr>
-                        <a:t>3.16%</a:t>
-                      </a:r>
-                      <a:endParaRPr lang="en-US" sz="750" dirty="0">
-                        <a:latin typeface="Calibri" charset="0"/>
-                        <a:ea typeface="Calibri" charset="0"/>
-                        <a:cs typeface="Calibri" charset="0"/>
-                      </a:endParaRPr>
-                    </a:p>
-                  </a:txBody>
-                  <a:tcPr marL="91440" marR="91440" marT="45720" marB="45720">
-                    <a:lnL w="3810" cap="flat" cmpd="sng" algn="ctr">
-                      <a:solidFill>
-                        <a:srgbClr val="DDDDDD"/>
-                      </a:solidFill>
-                      <a:prstDash val="solid"/>
-                      <a:round/>
-                      <a:headEnd type="none" w="med" len="med"/>
-                      <a:tailEnd type="none" w="med" len="med"/>
-                    </a:lnL>
-                    <a:lnR w="3810" cap="flat" cmpd="sng" algn="ctr">
-                      <a:solidFill>
-                        <a:srgbClr val="DDDDDD"/>
-                      </a:solidFill>
-                      <a:prstDash val="solid"/>
-                      <a:round/>
-                      <a:headEnd type="none" w="med" len="med"/>
-                      <a:tailEnd type="none" w="med" len="med"/>
-                    </a:lnR>
-                    <a:lnT w="3810" cap="flat" cmpd="sng" algn="ctr">
-                      <a:solidFill>
-                        <a:srgbClr val="DDDDDD"/>
-                      </a:solidFill>
-                      <a:prstDash val="solid"/>
-                      <a:round/>
-                      <a:headEnd type="none" w="med" len="med"/>
-                      <a:tailEnd type="none" w="med" len="med"/>
-                    </a:lnT>
-                    <a:lnB w="3810" cap="flat" cmpd="sng" algn="ctr">
-                      <a:solidFill>
-                        <a:srgbClr val="DDDDDD"/>
-                      </a:solidFill>
-                      <a:prstDash val="solid"/>
-                      <a:round/>
-                      <a:headEnd type="none" w="med" len="med"/>
-                      <a:tailEnd type="none" w="med" len="med"/>
-                    </a:lnB>
-                    <a:solidFill>
-                      <a:srgbClr val="F9F9F9"/>
-                    </a:solidFill>
-                  </a:tcPr>
-                </a:tc>
-                <a:tc>
-                  <a:txBody>
-                    <a:bodyPr/>
-                    <a:lstStyle/>
-                    <a:p>
-                      <a:pPr algn="ctr" indent="0" marL="0">
-                        <a:buNone/>
-                      </a:pPr>
-                      <a:r>
-                        <a:rPr lang="en-US" sz="750" dirty="0">
-                          <a:solidFill>
-                            <a:srgbClr val="333333"/>
-                          </a:solidFill>
-                          <a:latin typeface="Calibri" pitchFamily="34" charset="0"/>
-                          <a:ea typeface="Calibri" pitchFamily="34" charset="-122"/>
-                          <a:cs typeface="Calibri" pitchFamily="34" charset="-120"/>
-                        </a:rPr>
-                        <a:t>3.20%</a:t>
-                      </a:r>
-                      <a:endParaRPr lang="en-US" sz="750" dirty="0">
-                        <a:latin typeface="Calibri" charset="0"/>
-                        <a:ea typeface="Calibri" charset="0"/>
-                        <a:cs typeface="Calibri" charset="0"/>
-                      </a:endParaRPr>
-                    </a:p>
-                  </a:txBody>
-                  <a:tcPr marL="91440" marR="91440" marT="45720" marB="45720">
-                    <a:lnL w="3810" cap="flat" cmpd="sng" algn="ctr">
-                      <a:solidFill>
-                        <a:srgbClr val="DDDDDD"/>
-                      </a:solidFill>
-                      <a:prstDash val="solid"/>
-                      <a:round/>
-                      <a:headEnd type="none" w="med" len="med"/>
-                      <a:tailEnd type="none" w="med" len="med"/>
-                    </a:lnL>
-                    <a:lnR w="3810" cap="flat" cmpd="sng" algn="ctr">
-                      <a:solidFill>
-                        <a:srgbClr val="DDDDDD"/>
-                      </a:solidFill>
-                      <a:prstDash val="solid"/>
-                      <a:round/>
-                      <a:headEnd type="none" w="med" len="med"/>
-                      <a:tailEnd type="none" w="med" len="med"/>
-                    </a:lnR>
-                    <a:lnT w="3810" cap="flat" cmpd="sng" algn="ctr">
-                      <a:solidFill>
-                        <a:srgbClr val="DDDDDD"/>
-                      </a:solidFill>
-                      <a:prstDash val="solid"/>
-                      <a:round/>
-                      <a:headEnd type="none" w="med" len="med"/>
-                      <a:tailEnd type="none" w="med" len="med"/>
-                    </a:lnT>
-                    <a:lnB w="3810" cap="flat" cmpd="sng" algn="ctr">
-                      <a:solidFill>
-                        <a:srgbClr val="DDDDDD"/>
-                      </a:solidFill>
-                      <a:prstDash val="solid"/>
-                      <a:round/>
-                      <a:headEnd type="none" w="med" len="med"/>
-                      <a:tailEnd type="none" w="med" len="med"/>
-                    </a:lnB>
-                    <a:solidFill>
-                      <a:srgbClr val="F9F9F9"/>
-                    </a:solidFill>
-                  </a:tcPr>
-                </a:tc>
-                <a:tc>
-                  <a:txBody>
-                    <a:bodyPr/>
-                    <a:lstStyle/>
-                    <a:p>
-                      <a:pPr algn="ctr" indent="0" marL="0">
-                        <a:buNone/>
-                      </a:pPr>
-                      <a:r>
-                        <a:rPr lang="en-US" sz="750" dirty="0">
-                          <a:solidFill>
-                            <a:srgbClr val="333333"/>
-                          </a:solidFill>
-                          <a:latin typeface="Calibri" pitchFamily="34" charset="0"/>
-                          <a:ea typeface="Calibri" pitchFamily="34" charset="-122"/>
-                          <a:cs typeface="Calibri" pitchFamily="34" charset="-120"/>
-                        </a:rPr>
-                        <a:t>3.30%</a:t>
-                      </a:r>
-                      <a:endParaRPr lang="en-US" sz="750" dirty="0">
-                        <a:latin typeface="Calibri" charset="0"/>
-                        <a:ea typeface="Calibri" charset="0"/>
-                        <a:cs typeface="Calibri" charset="0"/>
-                      </a:endParaRPr>
-                    </a:p>
-                  </a:txBody>
-                  <a:tcPr marL="91440" marR="91440" marT="45720" marB="45720">
-                    <a:lnL w="3810" cap="flat" cmpd="sng" algn="ctr">
-                      <a:solidFill>
-                        <a:srgbClr val="DDDDDD"/>
-                      </a:solidFill>
-                      <a:prstDash val="solid"/>
-                      <a:round/>
-                      <a:headEnd type="none" w="med" len="med"/>
-                      <a:tailEnd type="none" w="med" len="med"/>
-                    </a:lnL>
-                    <a:lnR w="3810" cap="flat" cmpd="sng" algn="ctr">
-                      <a:solidFill>
-                        <a:srgbClr val="DDDDDD"/>
-                      </a:solidFill>
-                      <a:prstDash val="solid"/>
-                      <a:round/>
-                      <a:headEnd type="none" w="med" len="med"/>
-                      <a:tailEnd type="none" w="med" len="med"/>
-                    </a:lnR>
-                    <a:lnT w="3810" cap="flat" cmpd="sng" algn="ctr">
-                      <a:solidFill>
-                        <a:srgbClr val="DDDDDD"/>
-                      </a:solidFill>
-                      <a:prstDash val="solid"/>
-                      <a:round/>
-                      <a:headEnd type="none" w="med" len="med"/>
-                      <a:tailEnd type="none" w="med" len="med"/>
-                    </a:lnT>
-                    <a:lnB w="3810" cap="flat" cmpd="sng" algn="ctr">
-                      <a:solidFill>
-                        <a:srgbClr val="DDDDDD"/>
-                      </a:solidFill>
-                      <a:prstDash val="solid"/>
-                      <a:round/>
-                      <a:headEnd type="none" w="med" len="med"/>
-                      <a:tailEnd type="none" w="med" len="med"/>
-                    </a:lnB>
-                    <a:solidFill>
-                      <a:srgbClr val="F9F9F9"/>
-                    </a:solidFill>
-                  </a:tcPr>
-                </a:tc>
-                <a:tc>
-                  <a:txBody>
-                    <a:bodyPr/>
-                    <a:lstStyle/>
-                    <a:p>
-                      <a:pPr algn="ctr" indent="0" marL="0">
-                        <a:buNone/>
-                      </a:pPr>
-                      <a:r>
-                        <a:rPr lang="en-US" sz="750" dirty="0">
-                          <a:solidFill>
-                            <a:srgbClr val="333333"/>
-                          </a:solidFill>
-                          <a:latin typeface="Calibri" pitchFamily="34" charset="0"/>
-                          <a:ea typeface="Calibri" pitchFamily="34" charset="-122"/>
-                          <a:cs typeface="Calibri" pitchFamily="34" charset="-120"/>
-                        </a:rPr>
-                        <a:t>3.42%</a:t>
-                      </a:r>
-                      <a:endParaRPr lang="en-US" sz="750" dirty="0">
-                        <a:latin typeface="Calibri" charset="0"/>
-                        <a:ea typeface="Calibri" charset="0"/>
-                        <a:cs typeface="Calibri" charset="0"/>
-                      </a:endParaRPr>
-                    </a:p>
-                  </a:txBody>
-                  <a:tcPr marL="91440" marR="91440" marT="45720" marB="45720">
-                    <a:lnL w="3810" cap="flat" cmpd="sng" algn="ctr">
-                      <a:solidFill>
-                        <a:srgbClr val="DDDDDD"/>
-                      </a:solidFill>
-                      <a:prstDash val="solid"/>
-                      <a:round/>
-                      <a:headEnd type="none" w="med" len="med"/>
-                      <a:tailEnd type="none" w="med" len="med"/>
-                    </a:lnL>
-                    <a:lnR w="3810" cap="flat" cmpd="sng" algn="ctr">
-                      <a:solidFill>
-                        <a:srgbClr val="DDDDDD"/>
-                      </a:solidFill>
-                      <a:prstDash val="solid"/>
-                      <a:round/>
-                      <a:headEnd type="none" w="med" len="med"/>
-                      <a:tailEnd type="none" w="med" len="med"/>
-                    </a:lnR>
-                    <a:lnT w="3810" cap="flat" cmpd="sng" algn="ctr">
-                      <a:solidFill>
-                        <a:srgbClr val="DDDDDD"/>
-                      </a:solidFill>
-                      <a:prstDash val="solid"/>
-                      <a:round/>
-                      <a:headEnd type="none" w="med" len="med"/>
-                      <a:tailEnd type="none" w="med" len="med"/>
-                    </a:lnT>
-                    <a:lnB w="3810" cap="flat" cmpd="sng" algn="ctr">
-                      <a:solidFill>
-                        <a:srgbClr val="DDDDDD"/>
-                      </a:solidFill>
-                      <a:prstDash val="solid"/>
-                      <a:round/>
-                      <a:headEnd type="none" w="med" len="med"/>
-                      <a:tailEnd type="none" w="med" len="med"/>
-                    </a:lnB>
-                    <a:solidFill>
-                      <a:srgbClr val="F9F9F9"/>
-                    </a:solidFill>
-                  </a:tcPr>
-                </a:tc>
-                <a:tc>
-                  <a:txBody>
-                    <a:bodyPr/>
-                    <a:lstStyle/>
-                    <a:p>
-                      <a:pPr algn="ctr" indent="0" marL="0">
-                        <a:buNone/>
-                      </a:pPr>
-                      <a:r>
-                        <a:rPr lang="en-US" sz="750" dirty="0">
-                          <a:solidFill>
-                            <a:srgbClr val="333333"/>
-                          </a:solidFill>
-                          <a:latin typeface="Calibri" pitchFamily="34" charset="0"/>
-                          <a:ea typeface="Calibri" pitchFamily="34" charset="-122"/>
-                          <a:cs typeface="Calibri" pitchFamily="34" charset="-120"/>
-                        </a:rPr>
-                        <a:t>2.37%</a:t>
-                      </a:r>
-                      <a:endParaRPr lang="en-US" sz="750" dirty="0">
-                        <a:latin typeface="Calibri" charset="0"/>
-                        <a:ea typeface="Calibri" charset="0"/>
-                        <a:cs typeface="Calibri" charset="0"/>
-                      </a:endParaRPr>
-                    </a:p>
-                  </a:txBody>
-                  <a:tcPr marL="91440" marR="91440" marT="45720" marB="45720">
-                    <a:lnL w="3810" cap="flat" cmpd="sng" algn="ctr">
-                      <a:solidFill>
-                        <a:srgbClr val="DDDDDD"/>
-                      </a:solidFill>
-                      <a:prstDash val="solid"/>
-                      <a:round/>
-                      <a:headEnd type="none" w="med" len="med"/>
-                      <a:tailEnd type="none" w="med" len="med"/>
-                    </a:lnL>
-                    <a:lnR w="3810" cap="flat" cmpd="sng" algn="ctr">
-                      <a:solidFill>
-                        <a:srgbClr val="DDDDDD"/>
-                      </a:solidFill>
-                      <a:prstDash val="solid"/>
-                      <a:round/>
-                      <a:headEnd type="none" w="med" len="med"/>
-                      <a:tailEnd type="none" w="med" len="med"/>
-                    </a:lnR>
-                    <a:lnT w="3810" cap="flat" cmpd="sng" algn="ctr">
-                      <a:solidFill>
-                        <a:srgbClr val="DDDDDD"/>
-                      </a:solidFill>
-                      <a:prstDash val="solid"/>
-                      <a:round/>
-                      <a:headEnd type="none" w="med" len="med"/>
-                      <a:tailEnd type="none" w="med" len="med"/>
-                    </a:lnT>
-                    <a:lnB w="3810" cap="flat" cmpd="sng" algn="ctr">
-                      <a:solidFill>
-                        <a:srgbClr val="DDDDDD"/>
-                      </a:solidFill>
-                      <a:prstDash val="solid"/>
-                      <a:round/>
-                      <a:headEnd type="none" w="med" len="med"/>
-                      <a:tailEnd type="none" w="med" len="med"/>
-                    </a:lnB>
-                    <a:solidFill>
-                      <a:srgbClr val="F9F9F9"/>
-                    </a:solidFill>
-                  </a:tcPr>
-                </a:tc>
-              </a:tr>
-              <a:tr h="182880">
-                <a:tc>
-                  <a:txBody>
-                    <a:bodyPr/>
-                    <a:lstStyle/>
-                    <a:p>
-                      <a:pPr algn="l" indent="0" marL="0">
-                        <a:buNone/>
-                      </a:pPr>
-                      <a:r>
-                        <a:rPr lang="en-US" sz="750" b="1" dirty="0">
-                          <a:solidFill>
-                            <a:srgbClr val="000000"/>
-                          </a:solidFill>
-                          <a:latin typeface="Calibri" pitchFamily="34" charset="0"/>
-                          <a:ea typeface="Calibri" pitchFamily="34" charset="-122"/>
-                          <a:cs typeface="Calibri" pitchFamily="34" charset="-120"/>
-                        </a:rPr>
-                        <a:t>LIQUIDEZ RESERVA DÓLAR</a:t>
+                        <a:t>—</a:t>
                       </a:r>
                       <a:endParaRPr lang="en-US" sz="750" dirty="0">
                         <a:latin typeface="Calibri" charset="0"/>
@@ -4094,7 +3852,7 @@
                           <a:ea typeface="Calibri" pitchFamily="34" charset="-122"/>
                           <a:cs typeface="Calibri" pitchFamily="34" charset="-120"/>
                         </a:rPr>
-                        <a:t>5.02%</a:t>
+                        <a:t>—</a:t>
                       </a:r>
                       <a:endParaRPr lang="en-US" sz="750" dirty="0">
                         <a:latin typeface="Calibri" charset="0"/>
@@ -4162,7 +3920,7 @@
                           <a:ea typeface="Calibri" pitchFamily="34" charset="-122"/>
                           <a:cs typeface="Calibri" pitchFamily="34" charset="-120"/>
                         </a:rPr>
-                        <a:t>4.93%</a:t>
+                        <a:t>—</a:t>
                       </a:r>
                       <a:endParaRPr lang="en-US" sz="750" dirty="0">
                         <a:latin typeface="Calibri" charset="0"/>
@@ -4230,7 +3988,7 @@
                           <a:ea typeface="Calibri" pitchFamily="34" charset="-122"/>
                           <a:cs typeface="Calibri" pitchFamily="34" charset="-120"/>
                         </a:rPr>
-                        <a:t>5.24%</a:t>
+                        <a:t>—</a:t>
                       </a:r>
                       <a:endParaRPr lang="en-US" sz="750" dirty="0">
                         <a:latin typeface="Calibri" charset="0"/>
@@ -4298,7 +4056,7 @@
                           <a:ea typeface="Calibri" pitchFamily="34" charset="-122"/>
                           <a:cs typeface="Calibri" pitchFamily="34" charset="-120"/>
                         </a:rPr>
-                        <a:t>4.82%</a:t>
+                        <a:t>—</a:t>
                       </a:r>
                       <a:endParaRPr lang="en-US" sz="750" dirty="0">
                         <a:latin typeface="Calibri" charset="0"/>
@@ -4366,7 +4124,7 @@
                           <a:ea typeface="Calibri" pitchFamily="34" charset="-122"/>
                           <a:cs typeface="Calibri" pitchFamily="34" charset="-120"/>
                         </a:rPr>
-                        <a:t>3.66%</a:t>
+                        <a:t>—</a:t>
                       </a:r>
                       <a:endParaRPr lang="en-US" sz="750" dirty="0">
                         <a:latin typeface="Calibri" charset="0"/>
@@ -4828,112 +4586,7 @@
                   </a:tcPr>
                 </a:tc>
               </a:tr>
-            </a:tbl>
-          </a:graphicData>
-        </a:graphic>
-      </p:graphicFrame>
-      <p:sp>
-        <p:nvSpPr>
-          <p:cNvPr id="50" name="Text 46"/>
-          <p:cNvSpPr/>
-          <p:nvPr/>
-        </p:nvSpPr>
-        <p:spPr>
-          <a:xfrm>
-            <a:off x="2606040" y="5349240"/>
-            <a:ext cx="4818888" cy="128016"/>
-          </a:xfrm>
-          <a:prstGeom prst="rect">
-            <a:avLst/>
-          </a:prstGeom>
-          <a:noFill/>
-          <a:ln/>
-        </p:spPr>
-        <p:txBody>
-          <a:bodyPr wrap="square" lIns="0" tIns="0" rIns="0" bIns="0" rtlCol="0" anchor="ctr"/>
-          <a:lstStyle/>
-          <a:p>
-            <a:pPr indent="0" marL="0">
-              <a:buNone/>
-            </a:pPr>
-            <a:r>
-              <a:rPr lang="en-US" sz="600" i="1" dirty="0">
-                <a:solidFill>
-                  <a:srgbClr val="999999"/>
-                </a:solidFill>
-                <a:latin typeface="Calibri" pitchFamily="34" charset="0"/>
-                <a:ea typeface="Calibri" pitchFamily="34" charset="-122"/>
-                <a:cs typeface="Calibri" pitchFamily="34" charset="-120"/>
-              </a:rPr>
-              <a:t>*Valores correspondientes a la rentabilidad anualizada, no acumulada</a:t>
-            </a:r>
-            <a:endParaRPr lang="en-US" sz="600" dirty="0"/>
-          </a:p>
-        </p:txBody>
-      </p:sp>
-      <p:sp>
-        <p:nvSpPr>
-          <p:cNvPr id="51" name="Shape 47"/>
-          <p:cNvSpPr/>
-          <p:nvPr/>
-        </p:nvSpPr>
-        <p:spPr>
-          <a:xfrm>
-            <a:off x="2606040" y="5513832"/>
-            <a:ext cx="4818888" cy="0"/>
-          </a:xfrm>
-          <a:prstGeom prst="line">
-            <a:avLst/>
-          </a:prstGeom>
-          <a:noFill/>
-          <a:ln w="6350">
-            <a:solidFill>
-              <a:srgbClr val="DDDDDD"/>
-            </a:solidFill>
-            <a:prstDash val="solid"/>
-          </a:ln>
-        </p:spPr>
-      </p:sp>
-      <p:graphicFrame>
-        <p:nvGraphicFramePr>
-          <p:cNvPr id="3" name="Table 1"/>
-          <p:cNvGraphicFramePr>
-            <a:graphicFrameLocks noGrp="1"/>
-          </p:cNvGraphicFramePr>
-          <p:nvPr>
-            <p:extLst>
-              <p:ext uri="{D42A27DB-BD31-4B8C-83A1-F6EECF244321}">
-                <p14:modId xmlns:p14="http://schemas.microsoft.com/office/powerpoint/2010/main" val="1579011935"/>
-              </p:ext>
-            </p:extLst>
-          </p:nvPr>
-        </p:nvGraphicFramePr>
-        <p:xfrm>
-          <a:off x="2606040" y="5577840"/>
-          <a:ext cx="4818888" cy="914400"/>
-        </p:xfrm>
-        <a:graphic>
-          <a:graphicData uri="http://schemas.openxmlformats.org/drawingml/2006/table">
-            <a:tbl>
-              <a:tblPr/>
-              <a:tblGrid>
-                <a:gridCol w="201168"/>
-                <a:gridCol w="804672"/>
-                <a:gridCol w="292608"/>
-                <a:gridCol w="292608"/>
-                <a:gridCol w="292608"/>
-                <a:gridCol w="292608"/>
-                <a:gridCol w="292608"/>
-                <a:gridCol w="292608"/>
-                <a:gridCol w="292608"/>
-                <a:gridCol w="292608"/>
-                <a:gridCol w="292608"/>
-                <a:gridCol w="292608"/>
-                <a:gridCol w="292608"/>
-                <a:gridCol w="292608"/>
-                <a:gridCol w="301752"/>
-              </a:tblGrid>
-              <a:tr h="123444">
+              <a:tr h="182880">
                 <a:tc>
                   <a:txBody>
                     <a:bodyPr/>
@@ -4943,7 +4596,7 @@
                         <a:buNone/>
                       </a:pPr>
                       <a:r>
-                        <a:rPr lang="en-US" sz="550" b="1" dirty="0">
+                        <a:rPr lang="en-US" sz="750" b="1" dirty="0">
                           <a:solidFill>
                             <a:srgbClr val="000000"/>
                           </a:solidFill>
@@ -4951,9 +4604,9 @@
                           <a:ea typeface="Calibri" pitchFamily="34" charset="-122"/>
                           <a:cs typeface="Calibri" pitchFamily="34" charset="-120"/>
                         </a:rPr>
-                        <a:t>Año</a:t>
+                        <a:t>—</a:t>
                       </a:r>
-                      <a:endParaRPr lang="en-US" sz="550" dirty="0">
+                      <a:endParaRPr lang="en-US" sz="750" dirty="0">
                         <a:latin typeface="Calibri" charset="0"/>
                         <a:ea typeface="Calibri" charset="0"/>
                         <a:cs typeface="Calibri" charset="0"/>
@@ -4961,107 +4614,45 @@
                     </a:p>
                   </a:txBody>
                   <a:tcPr marL="91440" marR="91440" marT="45720" marB="45720">
-                    <a:lnL w="2540" cap="flat" cmpd="sng" algn="ctr">
-                      <a:solidFill>
-                        <a:srgbClr val="EEEEEE"/>
+                    <a:lnL w="3810" cap="flat" cmpd="sng" algn="ctr">
+                      <a:solidFill>
+                        <a:srgbClr val="DDDDDD"/>
                       </a:solidFill>
                       <a:prstDash val="solid"/>
                       <a:round/>
                       <a:headEnd type="none" w="med" len="med"/>
                       <a:tailEnd type="none" w="med" len="med"/>
                     </a:lnL>
-                    <a:lnR w="2540" cap="flat" cmpd="sng" algn="ctr">
-                      <a:solidFill>
-                        <a:srgbClr val="EEEEEE"/>
+                    <a:lnR w="3810" cap="flat" cmpd="sng" algn="ctr">
+                      <a:solidFill>
+                        <a:srgbClr val="DDDDDD"/>
                       </a:solidFill>
                       <a:prstDash val="solid"/>
                       <a:round/>
                       <a:headEnd type="none" w="med" len="med"/>
                       <a:tailEnd type="none" w="med" len="med"/>
                     </a:lnR>
-                    <a:lnT w="19050" cap="flat" cmpd="sng" algn="ctr">
-                      <a:solidFill>
-                        <a:srgbClr val="000000"/>
+                    <a:lnT w="3810" cap="flat" cmpd="sng" algn="ctr">
+                      <a:solidFill>
+                        <a:srgbClr val="DDDDDD"/>
                       </a:solidFill>
                       <a:prstDash val="solid"/>
                       <a:round/>
                       <a:headEnd type="none" w="med" len="med"/>
                       <a:tailEnd type="none" w="med" len="med"/>
                     </a:lnT>
-                    <a:lnB w="19050" cap="flat" cmpd="sng" algn="ctr">
-                      <a:solidFill>
-                        <a:srgbClr val="000000"/>
+                    <a:lnB w="3810" cap="flat" cmpd="sng" algn="ctr">
+                      <a:solidFill>
+                        <a:srgbClr val="DDDDDD"/>
                       </a:solidFill>
                       <a:prstDash val="solid"/>
                       <a:round/>
                       <a:headEnd type="none" w="med" len="med"/>
                       <a:tailEnd type="none" w="med" len="med"/>
                     </a:lnB>
-                  </a:tcPr>
-                </a:tc>
-                <a:tc>
-                  <a:txBody>
-                    <a:bodyPr/>
-                    <a:lstStyle/>
-                    <a:p>
-                      <a:pPr algn="l" indent="0" marL="0">
-                        <a:buNone/>
-                      </a:pPr>
-                      <a:r>
-                        <a:rPr lang="en-US" sz="550" b="1" dirty="0">
-                          <a:solidFill>
-                            <a:srgbClr val="000000"/>
-                          </a:solidFill>
-                          <a:latin typeface="Calibri" pitchFamily="34" charset="0"/>
-                          <a:ea typeface="Calibri" pitchFamily="34" charset="-122"/>
-                          <a:cs typeface="Calibri" pitchFamily="34" charset="-120"/>
-                        </a:rPr>
-                        <a:t>Fondo</a:t>
-                      </a:r>
-                      <a:endParaRPr lang="en-US" sz="550" dirty="0">
-                        <a:latin typeface="Calibri" charset="0"/>
-                        <a:ea typeface="Calibri" charset="0"/>
-                        <a:cs typeface="Calibri" charset="0"/>
-                      </a:endParaRPr>
-                    </a:p>
-                  </a:txBody>
-                  <a:tcPr marL="91440" marR="91440" marT="45720" marB="45720">
-                    <a:lnL w="2540" cap="flat" cmpd="sng" algn="ctr">
-                      <a:solidFill>
-                        <a:srgbClr val="EEEEEE"/>
-                      </a:solidFill>
-                      <a:prstDash val="solid"/>
-                      <a:round/>
-                      <a:headEnd type="none" w="med" len="med"/>
-                      <a:tailEnd type="none" w="med" len="med"/>
-                    </a:lnL>
-                    <a:lnR w="2540" cap="flat" cmpd="sng" algn="ctr">
-                      <a:solidFill>
-                        <a:srgbClr val="EEEEEE"/>
-                      </a:solidFill>
-                      <a:prstDash val="solid"/>
-                      <a:round/>
-                      <a:headEnd type="none" w="med" len="med"/>
-                      <a:tailEnd type="none" w="med" len="med"/>
-                    </a:lnR>
-                    <a:lnT w="19050" cap="flat" cmpd="sng" algn="ctr">
-                      <a:solidFill>
-                        <a:srgbClr val="000000"/>
-                      </a:solidFill>
-                      <a:prstDash val="solid"/>
-                      <a:round/>
-                      <a:headEnd type="none" w="med" len="med"/>
-                      <a:tailEnd type="none" w="med" len="med"/>
-                    </a:lnT>
-                    <a:lnB w="19050" cap="flat" cmpd="sng" algn="ctr">
-                      <a:solidFill>
-                        <a:srgbClr val="000000"/>
-                      </a:solidFill>
-                      <a:prstDash val="solid"/>
-                      <a:round/>
-                      <a:headEnd type="none" w="med" len="med"/>
-                      <a:tailEnd type="none" w="med" len="med"/>
-                    </a:lnB>
+                    <a:solidFill>
+                      <a:srgbClr val="FFFFFF"/>
+                    </a:solidFill>
                   </a:tcPr>
                 </a:tc>
                 <a:tc>
@@ -5073,17 +4664,17 @@
                         <a:buNone/>
                       </a:pPr>
                       <a:r>
-                        <a:rPr lang="en-US" sz="550" b="1" dirty="0">
+                        <a:rPr lang="en-US" sz="750" dirty="0">
                           <a:solidFill>
-                            <a:srgbClr val="000000"/>
+                            <a:srgbClr val="333333"/>
                           </a:solidFill>
                           <a:latin typeface="Calibri" pitchFamily="34" charset="0"/>
                           <a:ea typeface="Calibri" pitchFamily="34" charset="-122"/>
                           <a:cs typeface="Calibri" pitchFamily="34" charset="-120"/>
                         </a:rPr>
-                        <a:t>Ene</a:t>
+                        <a:t>—</a:t>
                       </a:r>
-                      <a:endParaRPr lang="en-US" sz="550" dirty="0">
+                      <a:endParaRPr lang="en-US" sz="750" dirty="0">
                         <a:latin typeface="Calibri" charset="0"/>
                         <a:ea typeface="Calibri" charset="0"/>
                         <a:cs typeface="Calibri" charset="0"/>
@@ -5091,42 +4682,45 @@
                     </a:p>
                   </a:txBody>
                   <a:tcPr marL="91440" marR="91440" marT="45720" marB="45720">
-                    <a:lnL w="2540" cap="flat" cmpd="sng" algn="ctr">
-                      <a:solidFill>
-                        <a:srgbClr val="EEEEEE"/>
+                    <a:lnL w="3810" cap="flat" cmpd="sng" algn="ctr">
+                      <a:solidFill>
+                        <a:srgbClr val="DDDDDD"/>
                       </a:solidFill>
                       <a:prstDash val="solid"/>
                       <a:round/>
                       <a:headEnd type="none" w="med" len="med"/>
                       <a:tailEnd type="none" w="med" len="med"/>
                     </a:lnL>
-                    <a:lnR w="2540" cap="flat" cmpd="sng" algn="ctr">
-                      <a:solidFill>
-                        <a:srgbClr val="EEEEEE"/>
+                    <a:lnR w="3810" cap="flat" cmpd="sng" algn="ctr">
+                      <a:solidFill>
+                        <a:srgbClr val="DDDDDD"/>
                       </a:solidFill>
                       <a:prstDash val="solid"/>
                       <a:round/>
                       <a:headEnd type="none" w="med" len="med"/>
                       <a:tailEnd type="none" w="med" len="med"/>
                     </a:lnR>
-                    <a:lnT w="19050" cap="flat" cmpd="sng" algn="ctr">
-                      <a:solidFill>
-                        <a:srgbClr val="000000"/>
+                    <a:lnT w="3810" cap="flat" cmpd="sng" algn="ctr">
+                      <a:solidFill>
+                        <a:srgbClr val="DDDDDD"/>
                       </a:solidFill>
                       <a:prstDash val="solid"/>
                       <a:round/>
                       <a:headEnd type="none" w="med" len="med"/>
                       <a:tailEnd type="none" w="med" len="med"/>
                     </a:lnT>
-                    <a:lnB w="19050" cap="flat" cmpd="sng" algn="ctr">
-                      <a:solidFill>
-                        <a:srgbClr val="000000"/>
+                    <a:lnB w="3810" cap="flat" cmpd="sng" algn="ctr">
+                      <a:solidFill>
+                        <a:srgbClr val="DDDDDD"/>
                       </a:solidFill>
                       <a:prstDash val="solid"/>
                       <a:round/>
                       <a:headEnd type="none" w="med" len="med"/>
                       <a:tailEnd type="none" w="med" len="med"/>
                     </a:lnB>
+                    <a:solidFill>
+                      <a:srgbClr val="FFFFFF"/>
+                    </a:solidFill>
                   </a:tcPr>
                 </a:tc>
                 <a:tc>
@@ -5138,17 +4732,17 @@
                         <a:buNone/>
                       </a:pPr>
                       <a:r>
-                        <a:rPr lang="en-US" sz="550" b="1" dirty="0">
+                        <a:rPr lang="en-US" sz="750" dirty="0">
                           <a:solidFill>
-                            <a:srgbClr val="000000"/>
+                            <a:srgbClr val="333333"/>
                           </a:solidFill>
                           <a:latin typeface="Calibri" pitchFamily="34" charset="0"/>
                           <a:ea typeface="Calibri" pitchFamily="34" charset="-122"/>
                           <a:cs typeface="Calibri" pitchFamily="34" charset="-120"/>
                         </a:rPr>
-                        <a:t>Feb</a:t>
+                        <a:t>—</a:t>
                       </a:r>
-                      <a:endParaRPr lang="en-US" sz="550" dirty="0">
+                      <a:endParaRPr lang="en-US" sz="750" dirty="0">
                         <a:latin typeface="Calibri" charset="0"/>
                         <a:ea typeface="Calibri" charset="0"/>
                         <a:cs typeface="Calibri" charset="0"/>
@@ -5156,42 +4750,45 @@
                     </a:p>
                   </a:txBody>
                   <a:tcPr marL="91440" marR="91440" marT="45720" marB="45720">
-                    <a:lnL w="2540" cap="flat" cmpd="sng" algn="ctr">
-                      <a:solidFill>
-                        <a:srgbClr val="EEEEEE"/>
+                    <a:lnL w="3810" cap="flat" cmpd="sng" algn="ctr">
+                      <a:solidFill>
+                        <a:srgbClr val="DDDDDD"/>
                       </a:solidFill>
                       <a:prstDash val="solid"/>
                       <a:round/>
                       <a:headEnd type="none" w="med" len="med"/>
                       <a:tailEnd type="none" w="med" len="med"/>
                     </a:lnL>
-                    <a:lnR w="2540" cap="flat" cmpd="sng" algn="ctr">
-                      <a:solidFill>
-                        <a:srgbClr val="EEEEEE"/>
+                    <a:lnR w="3810" cap="flat" cmpd="sng" algn="ctr">
+                      <a:solidFill>
+                        <a:srgbClr val="DDDDDD"/>
                       </a:solidFill>
                       <a:prstDash val="solid"/>
                       <a:round/>
                       <a:headEnd type="none" w="med" len="med"/>
                       <a:tailEnd type="none" w="med" len="med"/>
                     </a:lnR>
-                    <a:lnT w="19050" cap="flat" cmpd="sng" algn="ctr">
-                      <a:solidFill>
-                        <a:srgbClr val="000000"/>
+                    <a:lnT w="3810" cap="flat" cmpd="sng" algn="ctr">
+                      <a:solidFill>
+                        <a:srgbClr val="DDDDDD"/>
                       </a:solidFill>
                       <a:prstDash val="solid"/>
                       <a:round/>
                       <a:headEnd type="none" w="med" len="med"/>
                       <a:tailEnd type="none" w="med" len="med"/>
                     </a:lnT>
-                    <a:lnB w="19050" cap="flat" cmpd="sng" algn="ctr">
-                      <a:solidFill>
-                        <a:srgbClr val="000000"/>
+                    <a:lnB w="3810" cap="flat" cmpd="sng" algn="ctr">
+                      <a:solidFill>
+                        <a:srgbClr val="DDDDDD"/>
                       </a:solidFill>
                       <a:prstDash val="solid"/>
                       <a:round/>
                       <a:headEnd type="none" w="med" len="med"/>
                       <a:tailEnd type="none" w="med" len="med"/>
                     </a:lnB>
+                    <a:solidFill>
+                      <a:srgbClr val="FFFFFF"/>
+                    </a:solidFill>
                   </a:tcPr>
                 </a:tc>
                 <a:tc>
@@ -5203,17 +4800,17 @@
                         <a:buNone/>
                       </a:pPr>
                       <a:r>
-                        <a:rPr lang="en-US" sz="550" b="1" dirty="0">
+                        <a:rPr lang="en-US" sz="750" dirty="0">
                           <a:solidFill>
-                            <a:srgbClr val="000000"/>
+                            <a:srgbClr val="333333"/>
                           </a:solidFill>
                           <a:latin typeface="Calibri" pitchFamily="34" charset="0"/>
                           <a:ea typeface="Calibri" pitchFamily="34" charset="-122"/>
                           <a:cs typeface="Calibri" pitchFamily="34" charset="-120"/>
                         </a:rPr>
-                        <a:t>Mar</a:t>
+                        <a:t>—</a:t>
                       </a:r>
-                      <a:endParaRPr lang="en-US" sz="550" dirty="0">
+                      <a:endParaRPr lang="en-US" sz="750" dirty="0">
                         <a:latin typeface="Calibri" charset="0"/>
                         <a:ea typeface="Calibri" charset="0"/>
                         <a:cs typeface="Calibri" charset="0"/>
@@ -5221,42 +4818,45 @@
                     </a:p>
                   </a:txBody>
                   <a:tcPr marL="91440" marR="91440" marT="45720" marB="45720">
-                    <a:lnL w="2540" cap="flat" cmpd="sng" algn="ctr">
-                      <a:solidFill>
-                        <a:srgbClr val="EEEEEE"/>
+                    <a:lnL w="3810" cap="flat" cmpd="sng" algn="ctr">
+                      <a:solidFill>
+                        <a:srgbClr val="DDDDDD"/>
                       </a:solidFill>
                       <a:prstDash val="solid"/>
                       <a:round/>
                       <a:headEnd type="none" w="med" len="med"/>
                       <a:tailEnd type="none" w="med" len="med"/>
                     </a:lnL>
-                    <a:lnR w="2540" cap="flat" cmpd="sng" algn="ctr">
-                      <a:solidFill>
-                        <a:srgbClr val="EEEEEE"/>
+                    <a:lnR w="3810" cap="flat" cmpd="sng" algn="ctr">
+                      <a:solidFill>
+                        <a:srgbClr val="DDDDDD"/>
                       </a:solidFill>
                       <a:prstDash val="solid"/>
                       <a:round/>
                       <a:headEnd type="none" w="med" len="med"/>
                       <a:tailEnd type="none" w="med" len="med"/>
                     </a:lnR>
-                    <a:lnT w="19050" cap="flat" cmpd="sng" algn="ctr">
-                      <a:solidFill>
-                        <a:srgbClr val="000000"/>
+                    <a:lnT w="3810" cap="flat" cmpd="sng" algn="ctr">
+                      <a:solidFill>
+                        <a:srgbClr val="DDDDDD"/>
                       </a:solidFill>
                       <a:prstDash val="solid"/>
                       <a:round/>
                       <a:headEnd type="none" w="med" len="med"/>
                       <a:tailEnd type="none" w="med" len="med"/>
                     </a:lnT>
-                    <a:lnB w="19050" cap="flat" cmpd="sng" algn="ctr">
-                      <a:solidFill>
-                        <a:srgbClr val="000000"/>
+                    <a:lnB w="3810" cap="flat" cmpd="sng" algn="ctr">
+                      <a:solidFill>
+                        <a:srgbClr val="DDDDDD"/>
                       </a:solidFill>
                       <a:prstDash val="solid"/>
                       <a:round/>
                       <a:headEnd type="none" w="med" len="med"/>
                       <a:tailEnd type="none" w="med" len="med"/>
                     </a:lnB>
+                    <a:solidFill>
+                      <a:srgbClr val="FFFFFF"/>
+                    </a:solidFill>
                   </a:tcPr>
                 </a:tc>
                 <a:tc>
@@ -5268,17 +4868,17 @@
                         <a:buNone/>
                       </a:pPr>
                       <a:r>
-                        <a:rPr lang="en-US" sz="550" b="1" dirty="0">
+                        <a:rPr lang="en-US" sz="750" dirty="0">
                           <a:solidFill>
-                            <a:srgbClr val="000000"/>
+                            <a:srgbClr val="333333"/>
                           </a:solidFill>
                           <a:latin typeface="Calibri" pitchFamily="34" charset="0"/>
                           <a:ea typeface="Calibri" pitchFamily="34" charset="-122"/>
                           <a:cs typeface="Calibri" pitchFamily="34" charset="-120"/>
                         </a:rPr>
-                        <a:t>Abr</a:t>
+                        <a:t>—</a:t>
                       </a:r>
-                      <a:endParaRPr lang="en-US" sz="550" dirty="0">
+                      <a:endParaRPr lang="en-US" sz="750" dirty="0">
                         <a:latin typeface="Calibri" charset="0"/>
                         <a:ea typeface="Calibri" charset="0"/>
                         <a:cs typeface="Calibri" charset="0"/>
@@ -5286,42 +4886,45 @@
                     </a:p>
                   </a:txBody>
                   <a:tcPr marL="91440" marR="91440" marT="45720" marB="45720">
-                    <a:lnL w="2540" cap="flat" cmpd="sng" algn="ctr">
-                      <a:solidFill>
-                        <a:srgbClr val="EEEEEE"/>
+                    <a:lnL w="3810" cap="flat" cmpd="sng" algn="ctr">
+                      <a:solidFill>
+                        <a:srgbClr val="DDDDDD"/>
                       </a:solidFill>
                       <a:prstDash val="solid"/>
                       <a:round/>
                       <a:headEnd type="none" w="med" len="med"/>
                       <a:tailEnd type="none" w="med" len="med"/>
                     </a:lnL>
-                    <a:lnR w="2540" cap="flat" cmpd="sng" algn="ctr">
-                      <a:solidFill>
-                        <a:srgbClr val="EEEEEE"/>
+                    <a:lnR w="3810" cap="flat" cmpd="sng" algn="ctr">
+                      <a:solidFill>
+                        <a:srgbClr val="DDDDDD"/>
                       </a:solidFill>
                       <a:prstDash val="solid"/>
                       <a:round/>
                       <a:headEnd type="none" w="med" len="med"/>
                       <a:tailEnd type="none" w="med" len="med"/>
                     </a:lnR>
-                    <a:lnT w="19050" cap="flat" cmpd="sng" algn="ctr">
-                      <a:solidFill>
-                        <a:srgbClr val="000000"/>
+                    <a:lnT w="3810" cap="flat" cmpd="sng" algn="ctr">
+                      <a:solidFill>
+                        <a:srgbClr val="DDDDDD"/>
                       </a:solidFill>
                       <a:prstDash val="solid"/>
                       <a:round/>
                       <a:headEnd type="none" w="med" len="med"/>
                       <a:tailEnd type="none" w="med" len="med"/>
                     </a:lnT>
-                    <a:lnB w="19050" cap="flat" cmpd="sng" algn="ctr">
-                      <a:solidFill>
-                        <a:srgbClr val="000000"/>
+                    <a:lnB w="3810" cap="flat" cmpd="sng" algn="ctr">
+                      <a:solidFill>
+                        <a:srgbClr val="DDDDDD"/>
                       </a:solidFill>
                       <a:prstDash val="solid"/>
                       <a:round/>
                       <a:headEnd type="none" w="med" len="med"/>
                       <a:tailEnd type="none" w="med" len="med"/>
                     </a:lnB>
+                    <a:solidFill>
+                      <a:srgbClr val="FFFFFF"/>
+                    </a:solidFill>
                   </a:tcPr>
                 </a:tc>
                 <a:tc>
@@ -5333,17 +4936,17 @@
                         <a:buNone/>
                       </a:pPr>
                       <a:r>
-                        <a:rPr lang="en-US" sz="550" b="1" dirty="0">
+                        <a:rPr lang="en-US" sz="750" dirty="0">
                           <a:solidFill>
-                            <a:srgbClr val="000000"/>
+                            <a:srgbClr val="333333"/>
                           </a:solidFill>
                           <a:latin typeface="Calibri" pitchFamily="34" charset="0"/>
                           <a:ea typeface="Calibri" pitchFamily="34" charset="-122"/>
                           <a:cs typeface="Calibri" pitchFamily="34" charset="-120"/>
                         </a:rPr>
-                        <a:t>May</a:t>
+                        <a:t>—</a:t>
                       </a:r>
-                      <a:endParaRPr lang="en-US" sz="550" dirty="0">
+                      <a:endParaRPr lang="en-US" sz="750" dirty="0">
                         <a:latin typeface="Calibri" charset="0"/>
                         <a:ea typeface="Calibri" charset="0"/>
                         <a:cs typeface="Calibri" charset="0"/>
@@ -5351,4249 +4954,45 @@
                     </a:p>
                   </a:txBody>
                   <a:tcPr marL="91440" marR="91440" marT="45720" marB="45720">
-                    <a:lnL w="2540" cap="flat" cmpd="sng" algn="ctr">
-                      <a:solidFill>
-                        <a:srgbClr val="EEEEEE"/>
+                    <a:lnL w="3810" cap="flat" cmpd="sng" algn="ctr">
+                      <a:solidFill>
+                        <a:srgbClr val="DDDDDD"/>
                       </a:solidFill>
                       <a:prstDash val="solid"/>
                       <a:round/>
                       <a:headEnd type="none" w="med" len="med"/>
                       <a:tailEnd type="none" w="med" len="med"/>
                     </a:lnL>
-                    <a:lnR w="2540" cap="flat" cmpd="sng" algn="ctr">
-                      <a:solidFill>
-                        <a:srgbClr val="EEEEEE"/>
+                    <a:lnR w="3810" cap="flat" cmpd="sng" algn="ctr">
+                      <a:solidFill>
+                        <a:srgbClr val="DDDDDD"/>
                       </a:solidFill>
                       <a:prstDash val="solid"/>
                       <a:round/>
                       <a:headEnd type="none" w="med" len="med"/>
                       <a:tailEnd type="none" w="med" len="med"/>
                     </a:lnR>
-                    <a:lnT w="19050" cap="flat" cmpd="sng" algn="ctr">
-                      <a:solidFill>
-                        <a:srgbClr val="000000"/>
+                    <a:lnT w="3810" cap="flat" cmpd="sng" algn="ctr">
+                      <a:solidFill>
+                        <a:srgbClr val="DDDDDD"/>
                       </a:solidFill>
                       <a:prstDash val="solid"/>
                       <a:round/>
                       <a:headEnd type="none" w="med" len="med"/>
                       <a:tailEnd type="none" w="med" len="med"/>
                     </a:lnT>
-                    <a:lnB w="19050" cap="flat" cmpd="sng" algn="ctr">
-                      <a:solidFill>
-                        <a:srgbClr val="000000"/>
+                    <a:lnB w="3810" cap="flat" cmpd="sng" algn="ctr">
+                      <a:solidFill>
+                        <a:srgbClr val="DDDDDD"/>
                       </a:solidFill>
                       <a:prstDash val="solid"/>
                       <a:round/>
                       <a:headEnd type="none" w="med" len="med"/>
                       <a:tailEnd type="none" w="med" len="med"/>
                     </a:lnB>
-                  </a:tcPr>
-                </a:tc>
-                <a:tc>
-                  <a:txBody>
-                    <a:bodyPr/>
-                    <a:lstStyle/>
-                    <a:p>
-                      <a:pPr algn="ctr" indent="0" marL="0">
-                        <a:buNone/>
-                      </a:pPr>
-                      <a:r>
-                        <a:rPr lang="en-US" sz="550" b="1" dirty="0">
-                          <a:solidFill>
-                            <a:srgbClr val="000000"/>
-                          </a:solidFill>
-                          <a:latin typeface="Calibri" pitchFamily="34" charset="0"/>
-                          <a:ea typeface="Calibri" pitchFamily="34" charset="-122"/>
-                          <a:cs typeface="Calibri" pitchFamily="34" charset="-120"/>
-                        </a:rPr>
-                        <a:t>Jun</a:t>
-                      </a:r>
-                      <a:endParaRPr lang="en-US" sz="550" dirty="0">
-                        <a:latin typeface="Calibri" charset="0"/>
-                        <a:ea typeface="Calibri" charset="0"/>
-                        <a:cs typeface="Calibri" charset="0"/>
-                      </a:endParaRPr>
-                    </a:p>
-                  </a:txBody>
-                  <a:tcPr marL="91440" marR="91440" marT="45720" marB="45720">
-                    <a:lnL w="2540" cap="flat" cmpd="sng" algn="ctr">
-                      <a:solidFill>
-                        <a:srgbClr val="EEEEEE"/>
-                      </a:solidFill>
-                      <a:prstDash val="solid"/>
-                      <a:round/>
-                      <a:headEnd type="none" w="med" len="med"/>
-                      <a:tailEnd type="none" w="med" len="med"/>
-                    </a:lnL>
-                    <a:lnR w="2540" cap="flat" cmpd="sng" algn="ctr">
-                      <a:solidFill>
-                        <a:srgbClr val="EEEEEE"/>
-                      </a:solidFill>
-                      <a:prstDash val="solid"/>
-                      <a:round/>
-                      <a:headEnd type="none" w="med" len="med"/>
-                      <a:tailEnd type="none" w="med" len="med"/>
-                    </a:lnR>
-                    <a:lnT w="19050" cap="flat" cmpd="sng" algn="ctr">
-                      <a:solidFill>
-                        <a:srgbClr val="000000"/>
-                      </a:solidFill>
-                      <a:prstDash val="solid"/>
-                      <a:round/>
-                      <a:headEnd type="none" w="med" len="med"/>
-                      <a:tailEnd type="none" w="med" len="med"/>
-                    </a:lnT>
-                    <a:lnB w="19050" cap="flat" cmpd="sng" algn="ctr">
-                      <a:solidFill>
-                        <a:srgbClr val="000000"/>
-                      </a:solidFill>
-                      <a:prstDash val="solid"/>
-                      <a:round/>
-                      <a:headEnd type="none" w="med" len="med"/>
-                      <a:tailEnd type="none" w="med" len="med"/>
-                    </a:lnB>
-                  </a:tcPr>
-                </a:tc>
-                <a:tc>
-                  <a:txBody>
-                    <a:bodyPr/>
-                    <a:lstStyle/>
-                    <a:p>
-                      <a:pPr algn="ctr" indent="0" marL="0">
-                        <a:buNone/>
-                      </a:pPr>
-                      <a:r>
-                        <a:rPr lang="en-US" sz="550" b="1" dirty="0">
-                          <a:solidFill>
-                            <a:srgbClr val="000000"/>
-                          </a:solidFill>
-                          <a:latin typeface="Calibri" pitchFamily="34" charset="0"/>
-                          <a:ea typeface="Calibri" pitchFamily="34" charset="-122"/>
-                          <a:cs typeface="Calibri" pitchFamily="34" charset="-120"/>
-                        </a:rPr>
-                        <a:t>Jul</a:t>
-                      </a:r>
-                      <a:endParaRPr lang="en-US" sz="550" dirty="0">
-                        <a:latin typeface="Calibri" charset="0"/>
-                        <a:ea typeface="Calibri" charset="0"/>
-                        <a:cs typeface="Calibri" charset="0"/>
-                      </a:endParaRPr>
-                    </a:p>
-                  </a:txBody>
-                  <a:tcPr marL="91440" marR="91440" marT="45720" marB="45720">
-                    <a:lnL w="2540" cap="flat" cmpd="sng" algn="ctr">
-                      <a:solidFill>
-                        <a:srgbClr val="EEEEEE"/>
-                      </a:solidFill>
-                      <a:prstDash val="solid"/>
-                      <a:round/>
-                      <a:headEnd type="none" w="med" len="med"/>
-                      <a:tailEnd type="none" w="med" len="med"/>
-                    </a:lnL>
-                    <a:lnR w="2540" cap="flat" cmpd="sng" algn="ctr">
-                      <a:solidFill>
-                        <a:srgbClr val="EEEEEE"/>
-                      </a:solidFill>
-                      <a:prstDash val="solid"/>
-                      <a:round/>
-                      <a:headEnd type="none" w="med" len="med"/>
-                      <a:tailEnd type="none" w="med" len="med"/>
-                    </a:lnR>
-                    <a:lnT w="19050" cap="flat" cmpd="sng" algn="ctr">
-                      <a:solidFill>
-                        <a:srgbClr val="000000"/>
-                      </a:solidFill>
-                      <a:prstDash val="solid"/>
-                      <a:round/>
-                      <a:headEnd type="none" w="med" len="med"/>
-                      <a:tailEnd type="none" w="med" len="med"/>
-                    </a:lnT>
-                    <a:lnB w="19050" cap="flat" cmpd="sng" algn="ctr">
-                      <a:solidFill>
-                        <a:srgbClr val="000000"/>
-                      </a:solidFill>
-                      <a:prstDash val="solid"/>
-                      <a:round/>
-                      <a:headEnd type="none" w="med" len="med"/>
-                      <a:tailEnd type="none" w="med" len="med"/>
-                    </a:lnB>
-                  </a:tcPr>
-                </a:tc>
-                <a:tc>
-                  <a:txBody>
-                    <a:bodyPr/>
-                    <a:lstStyle/>
-                    <a:p>
-                      <a:pPr algn="ctr" indent="0" marL="0">
-                        <a:buNone/>
-                      </a:pPr>
-                      <a:r>
-                        <a:rPr lang="en-US" sz="550" b="1" dirty="0">
-                          <a:solidFill>
-                            <a:srgbClr val="000000"/>
-                          </a:solidFill>
-                          <a:latin typeface="Calibri" pitchFamily="34" charset="0"/>
-                          <a:ea typeface="Calibri" pitchFamily="34" charset="-122"/>
-                          <a:cs typeface="Calibri" pitchFamily="34" charset="-120"/>
-                        </a:rPr>
-                        <a:t>Ago</a:t>
-                      </a:r>
-                      <a:endParaRPr lang="en-US" sz="550" dirty="0">
-                        <a:latin typeface="Calibri" charset="0"/>
-                        <a:ea typeface="Calibri" charset="0"/>
-                        <a:cs typeface="Calibri" charset="0"/>
-                      </a:endParaRPr>
-                    </a:p>
-                  </a:txBody>
-                  <a:tcPr marL="91440" marR="91440" marT="45720" marB="45720">
-                    <a:lnL w="2540" cap="flat" cmpd="sng" algn="ctr">
-                      <a:solidFill>
-                        <a:srgbClr val="EEEEEE"/>
-                      </a:solidFill>
-                      <a:prstDash val="solid"/>
-                      <a:round/>
-                      <a:headEnd type="none" w="med" len="med"/>
-                      <a:tailEnd type="none" w="med" len="med"/>
-                    </a:lnL>
-                    <a:lnR w="2540" cap="flat" cmpd="sng" algn="ctr">
-                      <a:solidFill>
-                        <a:srgbClr val="EEEEEE"/>
-                      </a:solidFill>
-                      <a:prstDash val="solid"/>
-                      <a:round/>
-                      <a:headEnd type="none" w="med" len="med"/>
-                      <a:tailEnd type="none" w="med" len="med"/>
-                    </a:lnR>
-                    <a:lnT w="19050" cap="flat" cmpd="sng" algn="ctr">
-                      <a:solidFill>
-                        <a:srgbClr val="000000"/>
-                      </a:solidFill>
-                      <a:prstDash val="solid"/>
-                      <a:round/>
-                      <a:headEnd type="none" w="med" len="med"/>
-                      <a:tailEnd type="none" w="med" len="med"/>
-                    </a:lnT>
-                    <a:lnB w="19050" cap="flat" cmpd="sng" algn="ctr">
-                      <a:solidFill>
-                        <a:srgbClr val="000000"/>
-                      </a:solidFill>
-                      <a:prstDash val="solid"/>
-                      <a:round/>
-                      <a:headEnd type="none" w="med" len="med"/>
-                      <a:tailEnd type="none" w="med" len="med"/>
-                    </a:lnB>
-                  </a:tcPr>
-                </a:tc>
-                <a:tc>
-                  <a:txBody>
-                    <a:bodyPr/>
-                    <a:lstStyle/>
-                    <a:p>
-                      <a:pPr algn="ctr" indent="0" marL="0">
-                        <a:buNone/>
-                      </a:pPr>
-                      <a:r>
-                        <a:rPr lang="en-US" sz="550" b="1" dirty="0">
-                          <a:solidFill>
-                            <a:srgbClr val="000000"/>
-                          </a:solidFill>
-                          <a:latin typeface="Calibri" pitchFamily="34" charset="0"/>
-                          <a:ea typeface="Calibri" pitchFamily="34" charset="-122"/>
-                          <a:cs typeface="Calibri" pitchFamily="34" charset="-120"/>
-                        </a:rPr>
-                        <a:t>Sep</a:t>
-                      </a:r>
-                      <a:endParaRPr lang="en-US" sz="550" dirty="0">
-                        <a:latin typeface="Calibri" charset="0"/>
-                        <a:ea typeface="Calibri" charset="0"/>
-                        <a:cs typeface="Calibri" charset="0"/>
-                      </a:endParaRPr>
-                    </a:p>
-                  </a:txBody>
-                  <a:tcPr marL="91440" marR="91440" marT="45720" marB="45720">
-                    <a:lnL w="2540" cap="flat" cmpd="sng" algn="ctr">
-                      <a:solidFill>
-                        <a:srgbClr val="EEEEEE"/>
-                      </a:solidFill>
-                      <a:prstDash val="solid"/>
-                      <a:round/>
-                      <a:headEnd type="none" w="med" len="med"/>
-                      <a:tailEnd type="none" w="med" len="med"/>
-                    </a:lnL>
-                    <a:lnR w="2540" cap="flat" cmpd="sng" algn="ctr">
-                      <a:solidFill>
-                        <a:srgbClr val="EEEEEE"/>
-                      </a:solidFill>
-                      <a:prstDash val="solid"/>
-                      <a:round/>
-                      <a:headEnd type="none" w="med" len="med"/>
-                      <a:tailEnd type="none" w="med" len="med"/>
-                    </a:lnR>
-                    <a:lnT w="19050" cap="flat" cmpd="sng" algn="ctr">
-                      <a:solidFill>
-                        <a:srgbClr val="000000"/>
-                      </a:solidFill>
-                      <a:prstDash val="solid"/>
-                      <a:round/>
-                      <a:headEnd type="none" w="med" len="med"/>
-                      <a:tailEnd type="none" w="med" len="med"/>
-                    </a:lnT>
-                    <a:lnB w="19050" cap="flat" cmpd="sng" algn="ctr">
-                      <a:solidFill>
-                        <a:srgbClr val="000000"/>
-                      </a:solidFill>
-                      <a:prstDash val="solid"/>
-                      <a:round/>
-                      <a:headEnd type="none" w="med" len="med"/>
-                      <a:tailEnd type="none" w="med" len="med"/>
-                    </a:lnB>
-                  </a:tcPr>
-                </a:tc>
-                <a:tc>
-                  <a:txBody>
-                    <a:bodyPr/>
-                    <a:lstStyle/>
-                    <a:p>
-                      <a:pPr algn="ctr" indent="0" marL="0">
-                        <a:buNone/>
-                      </a:pPr>
-                      <a:r>
-                        <a:rPr lang="en-US" sz="550" b="1" dirty="0">
-                          <a:solidFill>
-                            <a:srgbClr val="000000"/>
-                          </a:solidFill>
-                          <a:latin typeface="Calibri" pitchFamily="34" charset="0"/>
-                          <a:ea typeface="Calibri" pitchFamily="34" charset="-122"/>
-                          <a:cs typeface="Calibri" pitchFamily="34" charset="-120"/>
-                        </a:rPr>
-                        <a:t>Oct</a:t>
-                      </a:r>
-                      <a:endParaRPr lang="en-US" sz="550" dirty="0">
-                        <a:latin typeface="Calibri" charset="0"/>
-                        <a:ea typeface="Calibri" charset="0"/>
-                        <a:cs typeface="Calibri" charset="0"/>
-                      </a:endParaRPr>
-                    </a:p>
-                  </a:txBody>
-                  <a:tcPr marL="91440" marR="91440" marT="45720" marB="45720">
-                    <a:lnL w="2540" cap="flat" cmpd="sng" algn="ctr">
-                      <a:solidFill>
-                        <a:srgbClr val="EEEEEE"/>
-                      </a:solidFill>
-                      <a:prstDash val="solid"/>
-                      <a:round/>
-                      <a:headEnd type="none" w="med" len="med"/>
-                      <a:tailEnd type="none" w="med" len="med"/>
-                    </a:lnL>
-                    <a:lnR w="2540" cap="flat" cmpd="sng" algn="ctr">
-                      <a:solidFill>
-                        <a:srgbClr val="EEEEEE"/>
-                      </a:solidFill>
-                      <a:prstDash val="solid"/>
-                      <a:round/>
-                      <a:headEnd type="none" w="med" len="med"/>
-                      <a:tailEnd type="none" w="med" len="med"/>
-                    </a:lnR>
-                    <a:lnT w="19050" cap="flat" cmpd="sng" algn="ctr">
-                      <a:solidFill>
-                        <a:srgbClr val="000000"/>
-                      </a:solidFill>
-                      <a:prstDash val="solid"/>
-                      <a:round/>
-                      <a:headEnd type="none" w="med" len="med"/>
-                      <a:tailEnd type="none" w="med" len="med"/>
-                    </a:lnT>
-                    <a:lnB w="19050" cap="flat" cmpd="sng" algn="ctr">
-                      <a:solidFill>
-                        <a:srgbClr val="000000"/>
-                      </a:solidFill>
-                      <a:prstDash val="solid"/>
-                      <a:round/>
-                      <a:headEnd type="none" w="med" len="med"/>
-                      <a:tailEnd type="none" w="med" len="med"/>
-                    </a:lnB>
-                  </a:tcPr>
-                </a:tc>
-                <a:tc>
-                  <a:txBody>
-                    <a:bodyPr/>
-                    <a:lstStyle/>
-                    <a:p>
-                      <a:pPr algn="ctr" indent="0" marL="0">
-                        <a:buNone/>
-                      </a:pPr>
-                      <a:r>
-                        <a:rPr lang="en-US" sz="550" b="1" dirty="0">
-                          <a:solidFill>
-                            <a:srgbClr val="000000"/>
-                          </a:solidFill>
-                          <a:latin typeface="Calibri" pitchFamily="34" charset="0"/>
-                          <a:ea typeface="Calibri" pitchFamily="34" charset="-122"/>
-                          <a:cs typeface="Calibri" pitchFamily="34" charset="-120"/>
-                        </a:rPr>
-                        <a:t>Nov</a:t>
-                      </a:r>
-                      <a:endParaRPr lang="en-US" sz="550" dirty="0">
-                        <a:latin typeface="Calibri" charset="0"/>
-                        <a:ea typeface="Calibri" charset="0"/>
-                        <a:cs typeface="Calibri" charset="0"/>
-                      </a:endParaRPr>
-                    </a:p>
-                  </a:txBody>
-                  <a:tcPr marL="91440" marR="91440" marT="45720" marB="45720">
-                    <a:lnL w="2540" cap="flat" cmpd="sng" algn="ctr">
-                      <a:solidFill>
-                        <a:srgbClr val="EEEEEE"/>
-                      </a:solidFill>
-                      <a:prstDash val="solid"/>
-                      <a:round/>
-                      <a:headEnd type="none" w="med" len="med"/>
-                      <a:tailEnd type="none" w="med" len="med"/>
-                    </a:lnL>
-                    <a:lnR w="2540" cap="flat" cmpd="sng" algn="ctr">
-                      <a:solidFill>
-                        <a:srgbClr val="EEEEEE"/>
-                      </a:solidFill>
-                      <a:prstDash val="solid"/>
-                      <a:round/>
-                      <a:headEnd type="none" w="med" len="med"/>
-                      <a:tailEnd type="none" w="med" len="med"/>
-                    </a:lnR>
-                    <a:lnT w="19050" cap="flat" cmpd="sng" algn="ctr">
-                      <a:solidFill>
-                        <a:srgbClr val="000000"/>
-                      </a:solidFill>
-                      <a:prstDash val="solid"/>
-                      <a:round/>
-                      <a:headEnd type="none" w="med" len="med"/>
-                      <a:tailEnd type="none" w="med" len="med"/>
-                    </a:lnT>
-                    <a:lnB w="19050" cap="flat" cmpd="sng" algn="ctr">
-                      <a:solidFill>
-                        <a:srgbClr val="000000"/>
-                      </a:solidFill>
-                      <a:prstDash val="solid"/>
-                      <a:round/>
-                      <a:headEnd type="none" w="med" len="med"/>
-                      <a:tailEnd type="none" w="med" len="med"/>
-                    </a:lnB>
-                  </a:tcPr>
-                </a:tc>
-                <a:tc>
-                  <a:txBody>
-                    <a:bodyPr/>
-                    <a:lstStyle/>
-                    <a:p>
-                      <a:pPr algn="ctr" indent="0" marL="0">
-                        <a:buNone/>
-                      </a:pPr>
-                      <a:r>
-                        <a:rPr lang="en-US" sz="550" b="1" dirty="0">
-                          <a:solidFill>
-                            <a:srgbClr val="000000"/>
-                          </a:solidFill>
-                          <a:latin typeface="Calibri" pitchFamily="34" charset="0"/>
-                          <a:ea typeface="Calibri" pitchFamily="34" charset="-122"/>
-                          <a:cs typeface="Calibri" pitchFamily="34" charset="-120"/>
-                        </a:rPr>
-                        <a:t>Dic</a:t>
-                      </a:r>
-                      <a:endParaRPr lang="en-US" sz="550" dirty="0">
-                        <a:latin typeface="Calibri" charset="0"/>
-                        <a:ea typeface="Calibri" charset="0"/>
-                        <a:cs typeface="Calibri" charset="0"/>
-                      </a:endParaRPr>
-                    </a:p>
-                  </a:txBody>
-                  <a:tcPr marL="91440" marR="91440" marT="45720" marB="45720">
-                    <a:lnL w="2540" cap="flat" cmpd="sng" algn="ctr">
-                      <a:solidFill>
-                        <a:srgbClr val="EEEEEE"/>
-                      </a:solidFill>
-                      <a:prstDash val="solid"/>
-                      <a:round/>
-                      <a:headEnd type="none" w="med" len="med"/>
-                      <a:tailEnd type="none" w="med" len="med"/>
-                    </a:lnL>
-                    <a:lnR w="2540" cap="flat" cmpd="sng" algn="ctr">
-                      <a:solidFill>
-                        <a:srgbClr val="EEEEEE"/>
-                      </a:solidFill>
-                      <a:prstDash val="solid"/>
-                      <a:round/>
-                      <a:headEnd type="none" w="med" len="med"/>
-                      <a:tailEnd type="none" w="med" len="med"/>
-                    </a:lnR>
-                    <a:lnT w="19050" cap="flat" cmpd="sng" algn="ctr">
-                      <a:solidFill>
-                        <a:srgbClr val="000000"/>
-                      </a:solidFill>
-                      <a:prstDash val="solid"/>
-                      <a:round/>
-                      <a:headEnd type="none" w="med" len="med"/>
-                      <a:tailEnd type="none" w="med" len="med"/>
-                    </a:lnT>
-                    <a:lnB w="19050" cap="flat" cmpd="sng" algn="ctr">
-                      <a:solidFill>
-                        <a:srgbClr val="000000"/>
-                      </a:solidFill>
-                      <a:prstDash val="solid"/>
-                      <a:round/>
-                      <a:headEnd type="none" w="med" len="med"/>
-                      <a:tailEnd type="none" w="med" len="med"/>
-                    </a:lnB>
-                  </a:tcPr>
-                </a:tc>
-                <a:tc>
-                  <a:txBody>
-                    <a:bodyPr/>
-                    <a:lstStyle/>
-                    <a:p>
-                      <a:pPr algn="ctr" indent="0" marL="0">
-                        <a:buNone/>
-                      </a:pPr>
-                      <a:r>
-                        <a:rPr lang="en-US" sz="550" b="1" dirty="0">
-                          <a:solidFill>
-                            <a:srgbClr val="000000"/>
-                          </a:solidFill>
-                          <a:latin typeface="Calibri" pitchFamily="34" charset="0"/>
-                          <a:ea typeface="Calibri" pitchFamily="34" charset="-122"/>
-                          <a:cs typeface="Calibri" pitchFamily="34" charset="-120"/>
-                        </a:rPr>
-                        <a:t>Total</a:t>
-                      </a:r>
-                      <a:endParaRPr lang="en-US" sz="550" dirty="0">
-                        <a:latin typeface="Calibri" charset="0"/>
-                        <a:ea typeface="Calibri" charset="0"/>
-                        <a:cs typeface="Calibri" charset="0"/>
-                      </a:endParaRPr>
-                    </a:p>
-                    <a:p>
-                      <a:pPr algn="ctr" indent="0" marL="0">
-                        <a:buNone/>
-                      </a:pPr>
-                      <a:r>
-                        <a:rPr lang="en-US" sz="550" b="1" dirty="0">
-                          <a:solidFill>
-                            <a:srgbClr val="000000"/>
-                          </a:solidFill>
-                          <a:latin typeface="Calibri" pitchFamily="34" charset="0"/>
-                          <a:ea typeface="Calibri" pitchFamily="34" charset="-122"/>
-                          <a:cs typeface="Calibri" pitchFamily="34" charset="-120"/>
-                        </a:rPr>
-                        <a:t>Año</a:t>
-                      </a:r>
-                      <a:endParaRPr lang="en-US" sz="550" dirty="0">
-                        <a:latin typeface="Calibri" charset="0"/>
-                        <a:ea typeface="Calibri" charset="0"/>
-                        <a:cs typeface="Calibri" charset="0"/>
-                      </a:endParaRPr>
-                    </a:p>
-                  </a:txBody>
-                  <a:tcPr marL="91440" marR="91440" marT="45720" marB="45720">
-                    <a:lnL w="2540" cap="flat" cmpd="sng" algn="ctr">
-                      <a:solidFill>
-                        <a:srgbClr val="EEEEEE"/>
-                      </a:solidFill>
-                      <a:prstDash val="solid"/>
-                      <a:round/>
-                      <a:headEnd type="none" w="med" len="med"/>
-                      <a:tailEnd type="none" w="med" len="med"/>
-                    </a:lnL>
-                    <a:lnR w="2540" cap="flat" cmpd="sng" algn="ctr">
-                      <a:solidFill>
-                        <a:srgbClr val="EEEEEE"/>
-                      </a:solidFill>
-                      <a:prstDash val="solid"/>
-                      <a:round/>
-                      <a:headEnd type="none" w="med" len="med"/>
-                      <a:tailEnd type="none" w="med" len="med"/>
-                    </a:lnR>
-                    <a:lnT w="19050" cap="flat" cmpd="sng" algn="ctr">
-                      <a:solidFill>
-                        <a:srgbClr val="000000"/>
-                      </a:solidFill>
-                      <a:prstDash val="solid"/>
-                      <a:round/>
-                      <a:headEnd type="none" w="med" len="med"/>
-                      <a:tailEnd type="none" w="med" len="med"/>
-                    </a:lnT>
-                    <a:lnB w="19050" cap="flat" cmpd="sng" algn="ctr">
-                      <a:solidFill>
-                        <a:srgbClr val="000000"/>
-                      </a:solidFill>
-                      <a:prstDash val="solid"/>
-                      <a:round/>
-                      <a:headEnd type="none" w="med" len="med"/>
-                      <a:tailEnd type="none" w="med" len="med"/>
-                    </a:lnB>
-                  </a:tcPr>
-                </a:tc>
-              </a:tr>
-              <a:tr h="123444">
-                <a:tc>
-                  <a:txBody>
-                    <a:bodyPr/>
-                    <a:lstStyle/>
-                    <a:p>
-                      <a:pPr algn="l" indent="0" marL="0">
-                        <a:buNone/>
-                      </a:pPr>
-                      <a:r>
-                        <a:rPr lang="en-US" sz="500" b="1" dirty="0">
-                          <a:solidFill>
-                            <a:srgbClr val="000000"/>
-                          </a:solidFill>
-                          <a:latin typeface="Calibri" pitchFamily="34" charset="0"/>
-                          <a:ea typeface="Calibri" pitchFamily="34" charset="-122"/>
-                          <a:cs typeface="Calibri" pitchFamily="34" charset="-120"/>
-                        </a:rPr>
-                        <a:t>2025</a:t>
-                      </a:r>
-                      <a:endParaRPr lang="en-US" sz="500" dirty="0">
-                        <a:latin typeface="Calibri" charset="0"/>
-                        <a:ea typeface="Calibri" charset="0"/>
-                        <a:cs typeface="Calibri" charset="0"/>
-                      </a:endParaRPr>
-                    </a:p>
-                  </a:txBody>
-                  <a:tcPr marL="91440" marR="91440" marT="45720" marB="45720">
-                    <a:lnL w="2540" cap="flat" cmpd="sng" algn="ctr">
-                      <a:solidFill>
-                        <a:srgbClr val="EEEEEE"/>
-                      </a:solidFill>
-                      <a:prstDash val="solid"/>
-                      <a:round/>
-                      <a:headEnd type="none" w="med" len="med"/>
-                      <a:tailEnd type="none" w="med" len="med"/>
-                    </a:lnL>
-                    <a:lnR w="2540" cap="flat" cmpd="sng" algn="ctr">
-                      <a:solidFill>
-                        <a:srgbClr val="EEEEEE"/>
-                      </a:solidFill>
-                      <a:prstDash val="solid"/>
-                      <a:round/>
-                      <a:headEnd type="none" w="med" len="med"/>
-                      <a:tailEnd type="none" w="med" len="med"/>
-                    </a:lnR>
-                    <a:lnT w="2540" cap="flat" cmpd="sng" algn="ctr">
-                      <a:solidFill>
-                        <a:srgbClr val="EEEEEE"/>
-                      </a:solidFill>
-                      <a:prstDash val="solid"/>
-                      <a:round/>
-                      <a:headEnd type="none" w="med" len="med"/>
-                      <a:tailEnd type="none" w="med" len="med"/>
-                    </a:lnT>
-                    <a:lnB w="2540" cap="flat" cmpd="sng" algn="ctr">
-                      <a:solidFill>
-                        <a:srgbClr val="EEEEEE"/>
-                      </a:solidFill>
-                      <a:prstDash val="solid"/>
-                      <a:round/>
-                      <a:headEnd type="none" w="med" len="med"/>
-                      <a:tailEnd type="none" w="med" len="med"/>
-                    </a:lnB>
-                  </a:tcPr>
-                </a:tc>
-                <a:tc>
-                  <a:txBody>
-                    <a:bodyPr/>
-                    <a:lstStyle/>
-                    <a:p>
-                      <a:pPr algn="l" indent="0" marL="0">
-                        <a:buNone/>
-                      </a:pPr>
-                      <a:r>
-                        <a:rPr lang="en-US" sz="500" dirty="0">
-                          <a:solidFill>
-                            <a:srgbClr val="999999"/>
-                          </a:solidFill>
-                          <a:latin typeface="Calibri" pitchFamily="34" charset="0"/>
-                          <a:ea typeface="Calibri" pitchFamily="34" charset="-122"/>
-                          <a:cs typeface="Calibri" pitchFamily="34" charset="-120"/>
-                        </a:rPr>
-                        <a:t>Competencia</a:t>
-                      </a:r>
-                      <a:endParaRPr lang="en-US" sz="500" dirty="0">
-                        <a:latin typeface="Calibri" charset="0"/>
-                        <a:ea typeface="Calibri" charset="0"/>
-                        <a:cs typeface="Calibri" charset="0"/>
-                      </a:endParaRPr>
-                    </a:p>
-                  </a:txBody>
-                  <a:tcPr marL="91440" marR="91440" marT="45720" marB="45720">
-                    <a:lnL w="2540" cap="flat" cmpd="sng" algn="ctr">
-                      <a:solidFill>
-                        <a:srgbClr val="EEEEEE"/>
-                      </a:solidFill>
-                      <a:prstDash val="solid"/>
-                      <a:round/>
-                      <a:headEnd type="none" w="med" len="med"/>
-                      <a:tailEnd type="none" w="med" len="med"/>
-                    </a:lnL>
-                    <a:lnR w="2540" cap="flat" cmpd="sng" algn="ctr">
-                      <a:solidFill>
-                        <a:srgbClr val="EEEEEE"/>
-                      </a:solidFill>
-                      <a:prstDash val="solid"/>
-                      <a:round/>
-                      <a:headEnd type="none" w="med" len="med"/>
-                      <a:tailEnd type="none" w="med" len="med"/>
-                    </a:lnR>
-                    <a:lnT w="2540" cap="flat" cmpd="sng" algn="ctr">
-                      <a:solidFill>
-                        <a:srgbClr val="EEEEEE"/>
-                      </a:solidFill>
-                      <a:prstDash val="solid"/>
-                      <a:round/>
-                      <a:headEnd type="none" w="med" len="med"/>
-                      <a:tailEnd type="none" w="med" len="med"/>
-                    </a:lnT>
-                    <a:lnB w="2540" cap="flat" cmpd="sng" algn="ctr">
-                      <a:solidFill>
-                        <a:srgbClr val="EEEEEE"/>
-                      </a:solidFill>
-                      <a:prstDash val="solid"/>
-                      <a:round/>
-                      <a:headEnd type="none" w="med" len="med"/>
-                      <a:tailEnd type="none" w="med" len="med"/>
-                    </a:lnB>
-                  </a:tcPr>
-                </a:tc>
-                <a:tc>
-                  <a:txBody>
-                    <a:bodyPr/>
-                    <a:lstStyle/>
-                    <a:p>
-                      <a:pPr algn="ctr" indent="0" marL="0">
-                        <a:buNone/>
-                      </a:pPr>
-                      <a:endParaRPr lang="en-US" sz="500" dirty="0">
-                        <a:latin typeface="Calibri" charset="0"/>
-                        <a:ea typeface="Calibri" charset="0"/>
-                        <a:cs typeface="Calibri" charset="0"/>
-                      </a:endParaRPr>
-                    </a:p>
-                  </a:txBody>
-                  <a:tcPr marL="91440" marR="91440" marT="45720" marB="45720">
-                    <a:lnL w="2540" cap="flat" cmpd="sng" algn="ctr">
-                      <a:solidFill>
-                        <a:srgbClr val="EEEEEE"/>
-                      </a:solidFill>
-                      <a:prstDash val="solid"/>
-                      <a:round/>
-                      <a:headEnd type="none" w="med" len="med"/>
-                      <a:tailEnd type="none" w="med" len="med"/>
-                    </a:lnL>
-                    <a:lnR w="2540" cap="flat" cmpd="sng" algn="ctr">
-                      <a:solidFill>
-                        <a:srgbClr val="EEEEEE"/>
-                      </a:solidFill>
-                      <a:prstDash val="solid"/>
-                      <a:round/>
-                      <a:headEnd type="none" w="med" len="med"/>
-                      <a:tailEnd type="none" w="med" len="med"/>
-                    </a:lnR>
-                    <a:lnT w="2540" cap="flat" cmpd="sng" algn="ctr">
-                      <a:solidFill>
-                        <a:srgbClr val="EEEEEE"/>
-                      </a:solidFill>
-                      <a:prstDash val="solid"/>
-                      <a:round/>
-                      <a:headEnd type="none" w="med" len="med"/>
-                      <a:tailEnd type="none" w="med" len="med"/>
-                    </a:lnT>
-                    <a:lnB w="2540" cap="flat" cmpd="sng" algn="ctr">
-                      <a:solidFill>
-                        <a:srgbClr val="EEEEEE"/>
-                      </a:solidFill>
-                      <a:prstDash val="solid"/>
-                      <a:round/>
-                      <a:headEnd type="none" w="med" len="med"/>
-                      <a:tailEnd type="none" w="med" len="med"/>
-                    </a:lnB>
-                  </a:tcPr>
-                </a:tc>
-                <a:tc>
-                  <a:txBody>
-                    <a:bodyPr/>
-                    <a:lstStyle/>
-                    <a:p>
-                      <a:pPr algn="ctr" indent="0" marL="0">
-                        <a:buNone/>
-                      </a:pPr>
-                      <a:endParaRPr lang="en-US" sz="500" dirty="0">
-                        <a:latin typeface="Calibri" charset="0"/>
-                        <a:ea typeface="Calibri" charset="0"/>
-                        <a:cs typeface="Calibri" charset="0"/>
-                      </a:endParaRPr>
-                    </a:p>
-                  </a:txBody>
-                  <a:tcPr marL="91440" marR="91440" marT="45720" marB="45720">
-                    <a:lnL w="2540" cap="flat" cmpd="sng" algn="ctr">
-                      <a:solidFill>
-                        <a:srgbClr val="EEEEEE"/>
-                      </a:solidFill>
-                      <a:prstDash val="solid"/>
-                      <a:round/>
-                      <a:headEnd type="none" w="med" len="med"/>
-                      <a:tailEnd type="none" w="med" len="med"/>
-                    </a:lnL>
-                    <a:lnR w="2540" cap="flat" cmpd="sng" algn="ctr">
-                      <a:solidFill>
-                        <a:srgbClr val="EEEEEE"/>
-                      </a:solidFill>
-                      <a:prstDash val="solid"/>
-                      <a:round/>
-                      <a:headEnd type="none" w="med" len="med"/>
-                      <a:tailEnd type="none" w="med" len="med"/>
-                    </a:lnR>
-                    <a:lnT w="2540" cap="flat" cmpd="sng" algn="ctr">
-                      <a:solidFill>
-                        <a:srgbClr val="EEEEEE"/>
-                      </a:solidFill>
-                      <a:prstDash val="solid"/>
-                      <a:round/>
-                      <a:headEnd type="none" w="med" len="med"/>
-                      <a:tailEnd type="none" w="med" len="med"/>
-                    </a:lnT>
-                    <a:lnB w="2540" cap="flat" cmpd="sng" algn="ctr">
-                      <a:solidFill>
-                        <a:srgbClr val="EEEEEE"/>
-                      </a:solidFill>
-                      <a:prstDash val="solid"/>
-                      <a:round/>
-                      <a:headEnd type="none" w="med" len="med"/>
-                      <a:tailEnd type="none" w="med" len="med"/>
-                    </a:lnB>
-                  </a:tcPr>
-                </a:tc>
-                <a:tc>
-                  <a:txBody>
-                    <a:bodyPr/>
-                    <a:lstStyle/>
-                    <a:p>
-                      <a:pPr algn="ctr" indent="0" marL="0">
-                        <a:buNone/>
-                      </a:pPr>
-                      <a:r>
-                        <a:rPr lang="en-US" sz="500" dirty="0">
-                          <a:solidFill>
-                            <a:srgbClr val="999999"/>
-                          </a:solidFill>
-                          <a:latin typeface="Calibri" pitchFamily="34" charset="0"/>
-                          <a:ea typeface="Calibri" pitchFamily="34" charset="-122"/>
-                          <a:cs typeface="Calibri" pitchFamily="34" charset="-120"/>
-                        </a:rPr>
-                        <a:t>7.62%</a:t>
-                      </a:r>
-                      <a:endParaRPr lang="en-US" sz="500" dirty="0">
-                        <a:latin typeface="Calibri" charset="0"/>
-                        <a:ea typeface="Calibri" charset="0"/>
-                        <a:cs typeface="Calibri" charset="0"/>
-                      </a:endParaRPr>
-                    </a:p>
-                  </a:txBody>
-                  <a:tcPr marL="91440" marR="91440" marT="45720" marB="45720">
-                    <a:lnL w="2540" cap="flat" cmpd="sng" algn="ctr">
-                      <a:solidFill>
-                        <a:srgbClr val="EEEEEE"/>
-                      </a:solidFill>
-                      <a:prstDash val="solid"/>
-                      <a:round/>
-                      <a:headEnd type="none" w="med" len="med"/>
-                      <a:tailEnd type="none" w="med" len="med"/>
-                    </a:lnL>
-                    <a:lnR w="2540" cap="flat" cmpd="sng" algn="ctr">
-                      <a:solidFill>
-                        <a:srgbClr val="EEEEEE"/>
-                      </a:solidFill>
-                      <a:prstDash val="solid"/>
-                      <a:round/>
-                      <a:headEnd type="none" w="med" len="med"/>
-                      <a:tailEnd type="none" w="med" len="med"/>
-                    </a:lnR>
-                    <a:lnT w="2540" cap="flat" cmpd="sng" algn="ctr">
-                      <a:solidFill>
-                        <a:srgbClr val="EEEEEE"/>
-                      </a:solidFill>
-                      <a:prstDash val="solid"/>
-                      <a:round/>
-                      <a:headEnd type="none" w="med" len="med"/>
-                      <a:tailEnd type="none" w="med" len="med"/>
-                    </a:lnT>
-                    <a:lnB w="2540" cap="flat" cmpd="sng" algn="ctr">
-                      <a:solidFill>
-                        <a:srgbClr val="EEEEEE"/>
-                      </a:solidFill>
-                      <a:prstDash val="solid"/>
-                      <a:round/>
-                      <a:headEnd type="none" w="med" len="med"/>
-                      <a:tailEnd type="none" w="med" len="med"/>
-                    </a:lnB>
-                  </a:tcPr>
-                </a:tc>
-                <a:tc>
-                  <a:txBody>
-                    <a:bodyPr/>
-                    <a:lstStyle/>
-                    <a:p>
-                      <a:pPr algn="ctr" indent="0" marL="0">
-                        <a:buNone/>
-                      </a:pPr>
-                      <a:r>
-                        <a:rPr lang="en-US" sz="500" dirty="0">
-                          <a:solidFill>
-                            <a:srgbClr val="999999"/>
-                          </a:solidFill>
-                          <a:latin typeface="Calibri" pitchFamily="34" charset="0"/>
-                          <a:ea typeface="Calibri" pitchFamily="34" charset="-122"/>
-                          <a:cs typeface="Calibri" pitchFamily="34" charset="-120"/>
-                        </a:rPr>
-                        <a:t>3.43%</a:t>
-                      </a:r>
-                      <a:endParaRPr lang="en-US" sz="500" dirty="0">
-                        <a:latin typeface="Calibri" charset="0"/>
-                        <a:ea typeface="Calibri" charset="0"/>
-                        <a:cs typeface="Calibri" charset="0"/>
-                      </a:endParaRPr>
-                    </a:p>
-                  </a:txBody>
-                  <a:tcPr marL="91440" marR="91440" marT="45720" marB="45720">
-                    <a:lnL w="2540" cap="flat" cmpd="sng" algn="ctr">
-                      <a:solidFill>
-                        <a:srgbClr val="EEEEEE"/>
-                      </a:solidFill>
-                      <a:prstDash val="solid"/>
-                      <a:round/>
-                      <a:headEnd type="none" w="med" len="med"/>
-                      <a:tailEnd type="none" w="med" len="med"/>
-                    </a:lnL>
-                    <a:lnR w="2540" cap="flat" cmpd="sng" algn="ctr">
-                      <a:solidFill>
-                        <a:srgbClr val="EEEEEE"/>
-                      </a:solidFill>
-                      <a:prstDash val="solid"/>
-                      <a:round/>
-                      <a:headEnd type="none" w="med" len="med"/>
-                      <a:tailEnd type="none" w="med" len="med"/>
-                    </a:lnR>
-                    <a:lnT w="2540" cap="flat" cmpd="sng" algn="ctr">
-                      <a:solidFill>
-                        <a:srgbClr val="EEEEEE"/>
-                      </a:solidFill>
-                      <a:prstDash val="solid"/>
-                      <a:round/>
-                      <a:headEnd type="none" w="med" len="med"/>
-                      <a:tailEnd type="none" w="med" len="med"/>
-                    </a:lnT>
-                    <a:lnB w="2540" cap="flat" cmpd="sng" algn="ctr">
-                      <a:solidFill>
-                        <a:srgbClr val="EEEEEE"/>
-                      </a:solidFill>
-                      <a:prstDash val="solid"/>
-                      <a:round/>
-                      <a:headEnd type="none" w="med" len="med"/>
-                      <a:tailEnd type="none" w="med" len="med"/>
-                    </a:lnB>
-                  </a:tcPr>
-                </a:tc>
-                <a:tc>
-                  <a:txBody>
-                    <a:bodyPr/>
-                    <a:lstStyle/>
-                    <a:p>
-                      <a:pPr algn="ctr" indent="0" marL="0">
-                        <a:buNone/>
-                      </a:pPr>
-                      <a:r>
-                        <a:rPr lang="en-US" sz="500" dirty="0">
-                          <a:solidFill>
-                            <a:srgbClr val="999999"/>
-                          </a:solidFill>
-                          <a:latin typeface="Calibri" pitchFamily="34" charset="0"/>
-                          <a:ea typeface="Calibri" pitchFamily="34" charset="-122"/>
-                          <a:cs typeface="Calibri" pitchFamily="34" charset="-120"/>
-                        </a:rPr>
-                        <a:t>3.40%</a:t>
-                      </a:r>
-                      <a:endParaRPr lang="en-US" sz="500" dirty="0">
-                        <a:latin typeface="Calibri" charset="0"/>
-                        <a:ea typeface="Calibri" charset="0"/>
-                        <a:cs typeface="Calibri" charset="0"/>
-                      </a:endParaRPr>
-                    </a:p>
-                  </a:txBody>
-                  <a:tcPr marL="91440" marR="91440" marT="45720" marB="45720">
-                    <a:lnL w="2540" cap="flat" cmpd="sng" algn="ctr">
-                      <a:solidFill>
-                        <a:srgbClr val="EEEEEE"/>
-                      </a:solidFill>
-                      <a:prstDash val="solid"/>
-                      <a:round/>
-                      <a:headEnd type="none" w="med" len="med"/>
-                      <a:tailEnd type="none" w="med" len="med"/>
-                    </a:lnL>
-                    <a:lnR w="2540" cap="flat" cmpd="sng" algn="ctr">
-                      <a:solidFill>
-                        <a:srgbClr val="EEEEEE"/>
-                      </a:solidFill>
-                      <a:prstDash val="solid"/>
-                      <a:round/>
-                      <a:headEnd type="none" w="med" len="med"/>
-                      <a:tailEnd type="none" w="med" len="med"/>
-                    </a:lnR>
-                    <a:lnT w="2540" cap="flat" cmpd="sng" algn="ctr">
-                      <a:solidFill>
-                        <a:srgbClr val="EEEEEE"/>
-                      </a:solidFill>
-                      <a:prstDash val="solid"/>
-                      <a:round/>
-                      <a:headEnd type="none" w="med" len="med"/>
-                      <a:tailEnd type="none" w="med" len="med"/>
-                    </a:lnT>
-                    <a:lnB w="2540" cap="flat" cmpd="sng" algn="ctr">
-                      <a:solidFill>
-                        <a:srgbClr val="EEEEEE"/>
-                      </a:solidFill>
-                      <a:prstDash val="solid"/>
-                      <a:round/>
-                      <a:headEnd type="none" w="med" len="med"/>
-                      <a:tailEnd type="none" w="med" len="med"/>
-                    </a:lnB>
-                  </a:tcPr>
-                </a:tc>
-                <a:tc>
-                  <a:txBody>
-                    <a:bodyPr/>
-                    <a:lstStyle/>
-                    <a:p>
-                      <a:pPr algn="ctr" indent="0" marL="0">
-                        <a:buNone/>
-                      </a:pPr>
-                      <a:r>
-                        <a:rPr lang="en-US" sz="500" dirty="0">
-                          <a:solidFill>
-                            <a:srgbClr val="999999"/>
-                          </a:solidFill>
-                          <a:latin typeface="Calibri" pitchFamily="34" charset="0"/>
-                          <a:ea typeface="Calibri" pitchFamily="34" charset="-122"/>
-                          <a:cs typeface="Calibri" pitchFamily="34" charset="-120"/>
-                        </a:rPr>
-                        <a:t>3.42%</a:t>
-                      </a:r>
-                      <a:endParaRPr lang="en-US" sz="500" dirty="0">
-                        <a:latin typeface="Calibri" charset="0"/>
-                        <a:ea typeface="Calibri" charset="0"/>
-                        <a:cs typeface="Calibri" charset="0"/>
-                      </a:endParaRPr>
-                    </a:p>
-                  </a:txBody>
-                  <a:tcPr marL="91440" marR="91440" marT="45720" marB="45720">
-                    <a:lnL w="2540" cap="flat" cmpd="sng" algn="ctr">
-                      <a:solidFill>
-                        <a:srgbClr val="EEEEEE"/>
-                      </a:solidFill>
-                      <a:prstDash val="solid"/>
-                      <a:round/>
-                      <a:headEnd type="none" w="med" len="med"/>
-                      <a:tailEnd type="none" w="med" len="med"/>
-                    </a:lnL>
-                    <a:lnR w="2540" cap="flat" cmpd="sng" algn="ctr">
-                      <a:solidFill>
-                        <a:srgbClr val="EEEEEE"/>
-                      </a:solidFill>
-                      <a:prstDash val="solid"/>
-                      <a:round/>
-                      <a:headEnd type="none" w="med" len="med"/>
-                      <a:tailEnd type="none" w="med" len="med"/>
-                    </a:lnR>
-                    <a:lnT w="2540" cap="flat" cmpd="sng" algn="ctr">
-                      <a:solidFill>
-                        <a:srgbClr val="EEEEEE"/>
-                      </a:solidFill>
-                      <a:prstDash val="solid"/>
-                      <a:round/>
-                      <a:headEnd type="none" w="med" len="med"/>
-                      <a:tailEnd type="none" w="med" len="med"/>
-                    </a:lnT>
-                    <a:lnB w="2540" cap="flat" cmpd="sng" algn="ctr">
-                      <a:solidFill>
-                        <a:srgbClr val="EEEEEE"/>
-                      </a:solidFill>
-                      <a:prstDash val="solid"/>
-                      <a:round/>
-                      <a:headEnd type="none" w="med" len="med"/>
-                      <a:tailEnd type="none" w="med" len="med"/>
-                    </a:lnB>
-                  </a:tcPr>
-                </a:tc>
-                <a:tc>
-                  <a:txBody>
-                    <a:bodyPr/>
-                    <a:lstStyle/>
-                    <a:p>
-                      <a:pPr algn="ctr" indent="0" marL="0">
-                        <a:buNone/>
-                      </a:pPr>
-                      <a:r>
-                        <a:rPr lang="en-US" sz="500" dirty="0">
-                          <a:solidFill>
-                            <a:srgbClr val="999999"/>
-                          </a:solidFill>
-                          <a:latin typeface="Calibri" pitchFamily="34" charset="0"/>
-                          <a:ea typeface="Calibri" pitchFamily="34" charset="-122"/>
-                          <a:cs typeface="Calibri" pitchFamily="34" charset="-120"/>
-                        </a:rPr>
-                        <a:t>3.46%</a:t>
-                      </a:r>
-                      <a:endParaRPr lang="en-US" sz="500" dirty="0">
-                        <a:latin typeface="Calibri" charset="0"/>
-                        <a:ea typeface="Calibri" charset="0"/>
-                        <a:cs typeface="Calibri" charset="0"/>
-                      </a:endParaRPr>
-                    </a:p>
-                  </a:txBody>
-                  <a:tcPr marL="91440" marR="91440" marT="45720" marB="45720">
-                    <a:lnL w="2540" cap="flat" cmpd="sng" algn="ctr">
-                      <a:solidFill>
-                        <a:srgbClr val="EEEEEE"/>
-                      </a:solidFill>
-                      <a:prstDash val="solid"/>
-                      <a:round/>
-                      <a:headEnd type="none" w="med" len="med"/>
-                      <a:tailEnd type="none" w="med" len="med"/>
-                    </a:lnL>
-                    <a:lnR w="2540" cap="flat" cmpd="sng" algn="ctr">
-                      <a:solidFill>
-                        <a:srgbClr val="EEEEEE"/>
-                      </a:solidFill>
-                      <a:prstDash val="solid"/>
-                      <a:round/>
-                      <a:headEnd type="none" w="med" len="med"/>
-                      <a:tailEnd type="none" w="med" len="med"/>
-                    </a:lnR>
-                    <a:lnT w="2540" cap="flat" cmpd="sng" algn="ctr">
-                      <a:solidFill>
-                        <a:srgbClr val="EEEEEE"/>
-                      </a:solidFill>
-                      <a:prstDash val="solid"/>
-                      <a:round/>
-                      <a:headEnd type="none" w="med" len="med"/>
-                      <a:tailEnd type="none" w="med" len="med"/>
-                    </a:lnT>
-                    <a:lnB w="2540" cap="flat" cmpd="sng" algn="ctr">
-                      <a:solidFill>
-                        <a:srgbClr val="EEEEEE"/>
-                      </a:solidFill>
-                      <a:prstDash val="solid"/>
-                      <a:round/>
-                      <a:headEnd type="none" w="med" len="med"/>
-                      <a:tailEnd type="none" w="med" len="med"/>
-                    </a:lnB>
-                  </a:tcPr>
-                </a:tc>
-                <a:tc>
-                  <a:txBody>
-                    <a:bodyPr/>
-                    <a:lstStyle/>
-                    <a:p>
-                      <a:pPr algn="ctr" indent="0" marL="0">
-                        <a:buNone/>
-                      </a:pPr>
-                      <a:r>
-                        <a:rPr lang="en-US" sz="500" dirty="0">
-                          <a:solidFill>
-                            <a:srgbClr val="999999"/>
-                          </a:solidFill>
-                          <a:latin typeface="Calibri" pitchFamily="34" charset="0"/>
-                          <a:ea typeface="Calibri" pitchFamily="34" charset="-122"/>
-                          <a:cs typeface="Calibri" pitchFamily="34" charset="-120"/>
-                        </a:rPr>
-                        <a:t>3.49%</a:t>
-                      </a:r>
-                      <a:endParaRPr lang="en-US" sz="500" dirty="0">
-                        <a:latin typeface="Calibri" charset="0"/>
-                        <a:ea typeface="Calibri" charset="0"/>
-                        <a:cs typeface="Calibri" charset="0"/>
-                      </a:endParaRPr>
-                    </a:p>
-                  </a:txBody>
-                  <a:tcPr marL="91440" marR="91440" marT="45720" marB="45720">
-                    <a:lnL w="2540" cap="flat" cmpd="sng" algn="ctr">
-                      <a:solidFill>
-                        <a:srgbClr val="EEEEEE"/>
-                      </a:solidFill>
-                      <a:prstDash val="solid"/>
-                      <a:round/>
-                      <a:headEnd type="none" w="med" len="med"/>
-                      <a:tailEnd type="none" w="med" len="med"/>
-                    </a:lnL>
-                    <a:lnR w="2540" cap="flat" cmpd="sng" algn="ctr">
-                      <a:solidFill>
-                        <a:srgbClr val="EEEEEE"/>
-                      </a:solidFill>
-                      <a:prstDash val="solid"/>
-                      <a:round/>
-                      <a:headEnd type="none" w="med" len="med"/>
-                      <a:tailEnd type="none" w="med" len="med"/>
-                    </a:lnR>
-                    <a:lnT w="2540" cap="flat" cmpd="sng" algn="ctr">
-                      <a:solidFill>
-                        <a:srgbClr val="EEEEEE"/>
-                      </a:solidFill>
-                      <a:prstDash val="solid"/>
-                      <a:round/>
-                      <a:headEnd type="none" w="med" len="med"/>
-                      <a:tailEnd type="none" w="med" len="med"/>
-                    </a:lnT>
-                    <a:lnB w="2540" cap="flat" cmpd="sng" algn="ctr">
-                      <a:solidFill>
-                        <a:srgbClr val="EEEEEE"/>
-                      </a:solidFill>
-                      <a:prstDash val="solid"/>
-                      <a:round/>
-                      <a:headEnd type="none" w="med" len="med"/>
-                      <a:tailEnd type="none" w="med" len="med"/>
-                    </a:lnB>
-                  </a:tcPr>
-                </a:tc>
-                <a:tc>
-                  <a:txBody>
-                    <a:bodyPr/>
-                    <a:lstStyle/>
-                    <a:p>
-                      <a:pPr algn="ctr" indent="0" marL="0">
-                        <a:buNone/>
-                      </a:pPr>
-                      <a:r>
-                        <a:rPr lang="en-US" sz="500" dirty="0">
-                          <a:solidFill>
-                            <a:srgbClr val="999999"/>
-                          </a:solidFill>
-                          <a:latin typeface="Calibri" pitchFamily="34" charset="0"/>
-                          <a:ea typeface="Calibri" pitchFamily="34" charset="-122"/>
-                          <a:cs typeface="Calibri" pitchFamily="34" charset="-120"/>
-                        </a:rPr>
-                        <a:t>3.49%</a:t>
-                      </a:r>
-                      <a:endParaRPr lang="en-US" sz="500" dirty="0">
-                        <a:latin typeface="Calibri" charset="0"/>
-                        <a:ea typeface="Calibri" charset="0"/>
-                        <a:cs typeface="Calibri" charset="0"/>
-                      </a:endParaRPr>
-                    </a:p>
-                  </a:txBody>
-                  <a:tcPr marL="91440" marR="91440" marT="45720" marB="45720">
-                    <a:lnL w="2540" cap="flat" cmpd="sng" algn="ctr">
-                      <a:solidFill>
-                        <a:srgbClr val="EEEEEE"/>
-                      </a:solidFill>
-                      <a:prstDash val="solid"/>
-                      <a:round/>
-                      <a:headEnd type="none" w="med" len="med"/>
-                      <a:tailEnd type="none" w="med" len="med"/>
-                    </a:lnL>
-                    <a:lnR w="2540" cap="flat" cmpd="sng" algn="ctr">
-                      <a:solidFill>
-                        <a:srgbClr val="EEEEEE"/>
-                      </a:solidFill>
-                      <a:prstDash val="solid"/>
-                      <a:round/>
-                      <a:headEnd type="none" w="med" len="med"/>
-                      <a:tailEnd type="none" w="med" len="med"/>
-                    </a:lnR>
-                    <a:lnT w="2540" cap="flat" cmpd="sng" algn="ctr">
-                      <a:solidFill>
-                        <a:srgbClr val="EEEEEE"/>
-                      </a:solidFill>
-                      <a:prstDash val="solid"/>
-                      <a:round/>
-                      <a:headEnd type="none" w="med" len="med"/>
-                      <a:tailEnd type="none" w="med" len="med"/>
-                    </a:lnT>
-                    <a:lnB w="2540" cap="flat" cmpd="sng" algn="ctr">
-                      <a:solidFill>
-                        <a:srgbClr val="EEEEEE"/>
-                      </a:solidFill>
-                      <a:prstDash val="solid"/>
-                      <a:round/>
-                      <a:headEnd type="none" w="med" len="med"/>
-                      <a:tailEnd type="none" w="med" len="med"/>
-                    </a:lnB>
-                  </a:tcPr>
-                </a:tc>
-                <a:tc>
-                  <a:txBody>
-                    <a:bodyPr/>
-                    <a:lstStyle/>
-                    <a:p>
-                      <a:pPr algn="ctr" indent="0" marL="0">
-                        <a:buNone/>
-                      </a:pPr>
-                      <a:r>
-                        <a:rPr lang="en-US" sz="500" dirty="0">
-                          <a:solidFill>
-                            <a:srgbClr val="999999"/>
-                          </a:solidFill>
-                          <a:latin typeface="Calibri" pitchFamily="34" charset="0"/>
-                          <a:ea typeface="Calibri" pitchFamily="34" charset="-122"/>
-                          <a:cs typeface="Calibri" pitchFamily="34" charset="-120"/>
-                        </a:rPr>
-                        <a:t>3.43%</a:t>
-                      </a:r>
-                      <a:endParaRPr lang="en-US" sz="500" dirty="0">
-                        <a:latin typeface="Calibri" charset="0"/>
-                        <a:ea typeface="Calibri" charset="0"/>
-                        <a:cs typeface="Calibri" charset="0"/>
-                      </a:endParaRPr>
-                    </a:p>
-                  </a:txBody>
-                  <a:tcPr marL="91440" marR="91440" marT="45720" marB="45720">
-                    <a:lnL w="2540" cap="flat" cmpd="sng" algn="ctr">
-                      <a:solidFill>
-                        <a:srgbClr val="EEEEEE"/>
-                      </a:solidFill>
-                      <a:prstDash val="solid"/>
-                      <a:round/>
-                      <a:headEnd type="none" w="med" len="med"/>
-                      <a:tailEnd type="none" w="med" len="med"/>
-                    </a:lnL>
-                    <a:lnR w="2540" cap="flat" cmpd="sng" algn="ctr">
-                      <a:solidFill>
-                        <a:srgbClr val="EEEEEE"/>
-                      </a:solidFill>
-                      <a:prstDash val="solid"/>
-                      <a:round/>
-                      <a:headEnd type="none" w="med" len="med"/>
-                      <a:tailEnd type="none" w="med" len="med"/>
-                    </a:lnR>
-                    <a:lnT w="2540" cap="flat" cmpd="sng" algn="ctr">
-                      <a:solidFill>
-                        <a:srgbClr val="EEEEEE"/>
-                      </a:solidFill>
-                      <a:prstDash val="solid"/>
-                      <a:round/>
-                      <a:headEnd type="none" w="med" len="med"/>
-                      <a:tailEnd type="none" w="med" len="med"/>
-                    </a:lnT>
-                    <a:lnB w="2540" cap="flat" cmpd="sng" algn="ctr">
-                      <a:solidFill>
-                        <a:srgbClr val="EEEEEE"/>
-                      </a:solidFill>
-                      <a:prstDash val="solid"/>
-                      <a:round/>
-                      <a:headEnd type="none" w="med" len="med"/>
-                      <a:tailEnd type="none" w="med" len="med"/>
-                    </a:lnB>
-                  </a:tcPr>
-                </a:tc>
-                <a:tc>
-                  <a:txBody>
-                    <a:bodyPr/>
-                    <a:lstStyle/>
-                    <a:p>
-                      <a:pPr algn="ctr" indent="0" marL="0">
-                        <a:buNone/>
-                      </a:pPr>
-                      <a:r>
-                        <a:rPr lang="en-US" sz="500" dirty="0">
-                          <a:solidFill>
-                            <a:srgbClr val="999999"/>
-                          </a:solidFill>
-                          <a:latin typeface="Calibri" pitchFamily="34" charset="0"/>
-                          <a:ea typeface="Calibri" pitchFamily="34" charset="-122"/>
-                          <a:cs typeface="Calibri" pitchFamily="34" charset="-120"/>
-                        </a:rPr>
-                        <a:t>3.37%</a:t>
-                      </a:r>
-                      <a:endParaRPr lang="en-US" sz="500" dirty="0">
-                        <a:latin typeface="Calibri" charset="0"/>
-                        <a:ea typeface="Calibri" charset="0"/>
-                        <a:cs typeface="Calibri" charset="0"/>
-                      </a:endParaRPr>
-                    </a:p>
-                  </a:txBody>
-                  <a:tcPr marL="91440" marR="91440" marT="45720" marB="45720">
-                    <a:lnL w="2540" cap="flat" cmpd="sng" algn="ctr">
-                      <a:solidFill>
-                        <a:srgbClr val="EEEEEE"/>
-                      </a:solidFill>
-                      <a:prstDash val="solid"/>
-                      <a:round/>
-                      <a:headEnd type="none" w="med" len="med"/>
-                      <a:tailEnd type="none" w="med" len="med"/>
-                    </a:lnL>
-                    <a:lnR w="2540" cap="flat" cmpd="sng" algn="ctr">
-                      <a:solidFill>
-                        <a:srgbClr val="EEEEEE"/>
-                      </a:solidFill>
-                      <a:prstDash val="solid"/>
-                      <a:round/>
-                      <a:headEnd type="none" w="med" len="med"/>
-                      <a:tailEnd type="none" w="med" len="med"/>
-                    </a:lnR>
-                    <a:lnT w="2540" cap="flat" cmpd="sng" algn="ctr">
-                      <a:solidFill>
-                        <a:srgbClr val="EEEEEE"/>
-                      </a:solidFill>
-                      <a:prstDash val="solid"/>
-                      <a:round/>
-                      <a:headEnd type="none" w="med" len="med"/>
-                      <a:tailEnd type="none" w="med" len="med"/>
-                    </a:lnT>
-                    <a:lnB w="2540" cap="flat" cmpd="sng" algn="ctr">
-                      <a:solidFill>
-                        <a:srgbClr val="EEEEEE"/>
-                      </a:solidFill>
-                      <a:prstDash val="solid"/>
-                      <a:round/>
-                      <a:headEnd type="none" w="med" len="med"/>
-                      <a:tailEnd type="none" w="med" len="med"/>
-                    </a:lnB>
-                  </a:tcPr>
-                </a:tc>
-                <a:tc>
-                  <a:txBody>
-                    <a:bodyPr/>
-                    <a:lstStyle/>
-                    <a:p>
-                      <a:pPr algn="ctr" indent="0" marL="0">
-                        <a:buNone/>
-                      </a:pPr>
-                      <a:r>
-                        <a:rPr lang="en-US" sz="500" dirty="0">
-                          <a:solidFill>
-                            <a:srgbClr val="999999"/>
-                          </a:solidFill>
-                          <a:latin typeface="Calibri" pitchFamily="34" charset="0"/>
-                          <a:ea typeface="Calibri" pitchFamily="34" charset="-122"/>
-                          <a:cs typeface="Calibri" pitchFamily="34" charset="-120"/>
-                        </a:rPr>
-                        <a:t>3.36%</a:t>
-                      </a:r>
-                      <a:endParaRPr lang="en-US" sz="500" dirty="0">
-                        <a:latin typeface="Calibri" charset="0"/>
-                        <a:ea typeface="Calibri" charset="0"/>
-                        <a:cs typeface="Calibri" charset="0"/>
-                      </a:endParaRPr>
-                    </a:p>
-                  </a:txBody>
-                  <a:tcPr marL="91440" marR="91440" marT="45720" marB="45720">
-                    <a:lnL w="2540" cap="flat" cmpd="sng" algn="ctr">
-                      <a:solidFill>
-                        <a:srgbClr val="EEEEEE"/>
-                      </a:solidFill>
-                      <a:prstDash val="solid"/>
-                      <a:round/>
-                      <a:headEnd type="none" w="med" len="med"/>
-                      <a:tailEnd type="none" w="med" len="med"/>
-                    </a:lnL>
-                    <a:lnR w="2540" cap="flat" cmpd="sng" algn="ctr">
-                      <a:solidFill>
-                        <a:srgbClr val="EEEEEE"/>
-                      </a:solidFill>
-                      <a:prstDash val="solid"/>
-                      <a:round/>
-                      <a:headEnd type="none" w="med" len="med"/>
-                      <a:tailEnd type="none" w="med" len="med"/>
-                    </a:lnR>
-                    <a:lnT w="2540" cap="flat" cmpd="sng" algn="ctr">
-                      <a:solidFill>
-                        <a:srgbClr val="EEEEEE"/>
-                      </a:solidFill>
-                      <a:prstDash val="solid"/>
-                      <a:round/>
-                      <a:headEnd type="none" w="med" len="med"/>
-                      <a:tailEnd type="none" w="med" len="med"/>
-                    </a:lnT>
-                    <a:lnB w="2540" cap="flat" cmpd="sng" algn="ctr">
-                      <a:solidFill>
-                        <a:srgbClr val="EEEEEE"/>
-                      </a:solidFill>
-                      <a:prstDash val="solid"/>
-                      <a:round/>
-                      <a:headEnd type="none" w="med" len="med"/>
-                      <a:tailEnd type="none" w="med" len="med"/>
-                    </a:lnB>
-                  </a:tcPr>
-                </a:tc>
-                <a:tc>
-                  <a:txBody>
-                    <a:bodyPr/>
-                    <a:lstStyle/>
-                    <a:p>
-                      <a:pPr algn="ctr" indent="0" marL="0">
-                        <a:buNone/>
-                      </a:pPr>
-                      <a:r>
-                        <a:rPr lang="en-US" sz="500" b="1" dirty="0">
-                          <a:solidFill>
-                            <a:srgbClr val="999999"/>
-                          </a:solidFill>
-                          <a:latin typeface="Calibri" pitchFamily="34" charset="0"/>
-                          <a:ea typeface="Calibri" pitchFamily="34" charset="-122"/>
-                          <a:cs typeface="Calibri" pitchFamily="34" charset="-120"/>
-                        </a:rPr>
-                        <a:t>3.24%</a:t>
-                      </a:r>
-                      <a:endParaRPr lang="en-US" sz="500" dirty="0">
-                        <a:latin typeface="Calibri" charset="0"/>
-                        <a:ea typeface="Calibri" charset="0"/>
-                        <a:cs typeface="Calibri" charset="0"/>
-                      </a:endParaRPr>
-                    </a:p>
-                  </a:txBody>
-                  <a:tcPr marL="91440" marR="91440" marT="45720" marB="45720">
-                    <a:lnL w="2540" cap="flat" cmpd="sng" algn="ctr">
-                      <a:solidFill>
-                        <a:srgbClr val="EEEEEE"/>
-                      </a:solidFill>
-                      <a:prstDash val="solid"/>
-                      <a:round/>
-                      <a:headEnd type="none" w="med" len="med"/>
-                      <a:tailEnd type="none" w="med" len="med"/>
-                    </a:lnL>
-                    <a:lnR w="2540" cap="flat" cmpd="sng" algn="ctr">
-                      <a:solidFill>
-                        <a:srgbClr val="EEEEEE"/>
-                      </a:solidFill>
-                      <a:prstDash val="solid"/>
-                      <a:round/>
-                      <a:headEnd type="none" w="med" len="med"/>
-                      <a:tailEnd type="none" w="med" len="med"/>
-                    </a:lnR>
-                    <a:lnT w="2540" cap="flat" cmpd="sng" algn="ctr">
-                      <a:solidFill>
-                        <a:srgbClr val="EEEEEE"/>
-                      </a:solidFill>
-                      <a:prstDash val="solid"/>
-                      <a:round/>
-                      <a:headEnd type="none" w="med" len="med"/>
-                      <a:tailEnd type="none" w="med" len="med"/>
-                    </a:lnT>
-                    <a:lnB w="2540" cap="flat" cmpd="sng" algn="ctr">
-                      <a:solidFill>
-                        <a:srgbClr val="EEEEEE"/>
-                      </a:solidFill>
-                      <a:prstDash val="solid"/>
-                      <a:round/>
-                      <a:headEnd type="none" w="med" len="med"/>
-                      <a:tailEnd type="none" w="med" len="med"/>
-                    </a:lnB>
-                  </a:tcPr>
-                </a:tc>
-              </a:tr>
-              <a:tr h="123444">
-                <a:tc>
-                  <a:txBody>
-                    <a:bodyPr/>
-                    <a:lstStyle/>
-                    <a:p>
-                      <a:pPr algn="l" indent="0" marL="0">
-                        <a:buNone/>
-                      </a:pPr>
-                      <a:endParaRPr lang="en-US" sz="500" dirty="0">
-                        <a:latin typeface="Calibri" charset="0"/>
-                        <a:ea typeface="Calibri" charset="0"/>
-                        <a:cs typeface="Calibri" charset="0"/>
-                      </a:endParaRPr>
-                    </a:p>
-                  </a:txBody>
-                  <a:tcPr marL="91440" marR="91440" marT="45720" marB="45720">
-                    <a:lnL w="2540" cap="flat" cmpd="sng" algn="ctr">
-                      <a:solidFill>
-                        <a:srgbClr val="EEEEEE"/>
-                      </a:solidFill>
-                      <a:prstDash val="solid"/>
-                      <a:round/>
-                      <a:headEnd type="none" w="med" len="med"/>
-                      <a:tailEnd type="none" w="med" len="med"/>
-                    </a:lnL>
-                    <a:lnR w="2540" cap="flat" cmpd="sng" algn="ctr">
-                      <a:solidFill>
-                        <a:srgbClr val="EEEEEE"/>
-                      </a:solidFill>
-                      <a:prstDash val="solid"/>
-                      <a:round/>
-                      <a:headEnd type="none" w="med" len="med"/>
-                      <a:tailEnd type="none" w="med" len="med"/>
-                    </a:lnR>
-                    <a:lnT w="2540" cap="flat" cmpd="sng" algn="ctr">
-                      <a:solidFill>
-                        <a:srgbClr val="EEEEEE"/>
-                      </a:solidFill>
-                      <a:prstDash val="solid"/>
-                      <a:round/>
-                      <a:headEnd type="none" w="med" len="med"/>
-                      <a:tailEnd type="none" w="med" len="med"/>
-                    </a:lnT>
-                    <a:lnB w="2540" cap="flat" cmpd="sng" algn="ctr">
-                      <a:solidFill>
-                        <a:srgbClr val="EEEEEE"/>
-                      </a:solidFill>
-                      <a:prstDash val="solid"/>
-                      <a:round/>
-                      <a:headEnd type="none" w="med" len="med"/>
-                      <a:tailEnd type="none" w="med" len="med"/>
-                    </a:lnB>
-                  </a:tcPr>
-                </a:tc>
-                <a:tc>
-                  <a:txBody>
-                    <a:bodyPr/>
-                    <a:lstStyle/>
-                    <a:p>
-                      <a:pPr algn="l" indent="0" marL="0">
-                        <a:buNone/>
-                      </a:pPr>
-                      <a:r>
-                        <a:rPr lang="en-US" sz="400" dirty="0">
-                          <a:solidFill>
-                            <a:srgbClr val="000000"/>
-                          </a:solidFill>
-                          <a:latin typeface="Calibri" pitchFamily="34" charset="0"/>
-                          <a:ea typeface="Calibri" pitchFamily="34" charset="-122"/>
-                          <a:cs typeface="Calibri" pitchFamily="34" charset="-120"/>
-                        </a:rPr>
-                        <a:t>LIQUIDEZ RESERVA DÓLAR</a:t>
-                      </a:r>
-                      <a:endParaRPr lang="en-US" sz="400" dirty="0">
-                        <a:latin typeface="Calibri" charset="0"/>
-                        <a:ea typeface="Calibri" charset="0"/>
-                        <a:cs typeface="Calibri" charset="0"/>
-                      </a:endParaRPr>
-                    </a:p>
-                  </a:txBody>
-                  <a:tcPr marL="91440" marR="91440" marT="45720" marB="45720">
-                    <a:lnL w="2540" cap="flat" cmpd="sng" algn="ctr">
-                      <a:solidFill>
-                        <a:srgbClr val="EEEEEE"/>
-                      </a:solidFill>
-                      <a:prstDash val="solid"/>
-                      <a:round/>
-                      <a:headEnd type="none" w="med" len="med"/>
-                      <a:tailEnd type="none" w="med" len="med"/>
-                    </a:lnL>
-                    <a:lnR w="2540" cap="flat" cmpd="sng" algn="ctr">
-                      <a:solidFill>
-                        <a:srgbClr val="EEEEEE"/>
-                      </a:solidFill>
-                      <a:prstDash val="solid"/>
-                      <a:round/>
-                      <a:headEnd type="none" w="med" len="med"/>
-                      <a:tailEnd type="none" w="med" len="med"/>
-                    </a:lnR>
-                    <a:lnT w="2540" cap="flat" cmpd="sng" algn="ctr">
-                      <a:solidFill>
-                        <a:srgbClr val="EEEEEE"/>
-                      </a:solidFill>
-                      <a:prstDash val="solid"/>
-                      <a:round/>
-                      <a:headEnd type="none" w="med" len="med"/>
-                      <a:tailEnd type="none" w="med" len="med"/>
-                    </a:lnT>
-                    <a:lnB w="2540" cap="flat" cmpd="sng" algn="ctr">
-                      <a:solidFill>
-                        <a:srgbClr val="EEEEEE"/>
-                      </a:solidFill>
-                      <a:prstDash val="solid"/>
-                      <a:round/>
-                      <a:headEnd type="none" w="med" len="med"/>
-                      <a:tailEnd type="none" w="med" len="med"/>
-                    </a:lnB>
-                  </a:tcPr>
-                </a:tc>
-                <a:tc>
-                  <a:txBody>
-                    <a:bodyPr/>
-                    <a:lstStyle/>
-                    <a:p>
-                      <a:pPr algn="ctr" indent="0" marL="0">
-                        <a:buNone/>
-                      </a:pPr>
-                      <a:endParaRPr lang="en-US" sz="500" dirty="0">
-                        <a:latin typeface="Calibri" charset="0"/>
-                        <a:ea typeface="Calibri" charset="0"/>
-                        <a:cs typeface="Calibri" charset="0"/>
-                      </a:endParaRPr>
-                    </a:p>
-                  </a:txBody>
-                  <a:tcPr marL="91440" marR="91440" marT="45720" marB="45720">
-                    <a:lnL w="2540" cap="flat" cmpd="sng" algn="ctr">
-                      <a:solidFill>
-                        <a:srgbClr val="EEEEEE"/>
-                      </a:solidFill>
-                      <a:prstDash val="solid"/>
-                      <a:round/>
-                      <a:headEnd type="none" w="med" len="med"/>
-                      <a:tailEnd type="none" w="med" len="med"/>
-                    </a:lnL>
-                    <a:lnR w="2540" cap="flat" cmpd="sng" algn="ctr">
-                      <a:solidFill>
-                        <a:srgbClr val="EEEEEE"/>
-                      </a:solidFill>
-                      <a:prstDash val="solid"/>
-                      <a:round/>
-                      <a:headEnd type="none" w="med" len="med"/>
-                      <a:tailEnd type="none" w="med" len="med"/>
-                    </a:lnR>
-                    <a:lnT w="2540" cap="flat" cmpd="sng" algn="ctr">
-                      <a:solidFill>
-                        <a:srgbClr val="EEEEEE"/>
-                      </a:solidFill>
-                      <a:prstDash val="solid"/>
-                      <a:round/>
-                      <a:headEnd type="none" w="med" len="med"/>
-                      <a:tailEnd type="none" w="med" len="med"/>
-                    </a:lnT>
-                    <a:lnB w="2540" cap="flat" cmpd="sng" algn="ctr">
-                      <a:solidFill>
-                        <a:srgbClr val="EEEEEE"/>
-                      </a:solidFill>
-                      <a:prstDash val="solid"/>
-                      <a:round/>
-                      <a:headEnd type="none" w="med" len="med"/>
-                      <a:tailEnd type="none" w="med" len="med"/>
-                    </a:lnB>
-                  </a:tcPr>
-                </a:tc>
-                <a:tc>
-                  <a:txBody>
-                    <a:bodyPr/>
-                    <a:lstStyle/>
-                    <a:p>
-                      <a:pPr algn="ctr" indent="0" marL="0">
-                        <a:buNone/>
-                      </a:pPr>
-                      <a:endParaRPr lang="en-US" sz="500" dirty="0">
-                        <a:latin typeface="Calibri" charset="0"/>
-                        <a:ea typeface="Calibri" charset="0"/>
-                        <a:cs typeface="Calibri" charset="0"/>
-                      </a:endParaRPr>
-                    </a:p>
-                  </a:txBody>
-                  <a:tcPr marL="91440" marR="91440" marT="45720" marB="45720">
-                    <a:lnL w="2540" cap="flat" cmpd="sng" algn="ctr">
-                      <a:solidFill>
-                        <a:srgbClr val="EEEEEE"/>
-                      </a:solidFill>
-                      <a:prstDash val="solid"/>
-                      <a:round/>
-                      <a:headEnd type="none" w="med" len="med"/>
-                      <a:tailEnd type="none" w="med" len="med"/>
-                    </a:lnL>
-                    <a:lnR w="2540" cap="flat" cmpd="sng" algn="ctr">
-                      <a:solidFill>
-                        <a:srgbClr val="EEEEEE"/>
-                      </a:solidFill>
-                      <a:prstDash val="solid"/>
-                      <a:round/>
-                      <a:headEnd type="none" w="med" len="med"/>
-                      <a:tailEnd type="none" w="med" len="med"/>
-                    </a:lnR>
-                    <a:lnT w="2540" cap="flat" cmpd="sng" algn="ctr">
-                      <a:solidFill>
-                        <a:srgbClr val="EEEEEE"/>
-                      </a:solidFill>
-                      <a:prstDash val="solid"/>
-                      <a:round/>
-                      <a:headEnd type="none" w="med" len="med"/>
-                      <a:tailEnd type="none" w="med" len="med"/>
-                    </a:lnT>
-                    <a:lnB w="2540" cap="flat" cmpd="sng" algn="ctr">
-                      <a:solidFill>
-                        <a:srgbClr val="EEEEEE"/>
-                      </a:solidFill>
-                      <a:prstDash val="solid"/>
-                      <a:round/>
-                      <a:headEnd type="none" w="med" len="med"/>
-                      <a:tailEnd type="none" w="med" len="med"/>
-                    </a:lnB>
-                  </a:tcPr>
-                </a:tc>
-                <a:tc>
-                  <a:txBody>
-                    <a:bodyPr/>
-                    <a:lstStyle/>
-                    <a:p>
-                      <a:pPr algn="ctr" indent="0" marL="0">
-                        <a:buNone/>
-                      </a:pPr>
-                      <a:r>
-                        <a:rPr lang="en-US" sz="500" dirty="0">
-                          <a:solidFill>
-                            <a:srgbClr val="000000"/>
-                          </a:solidFill>
-                          <a:latin typeface="Calibri" pitchFamily="34" charset="0"/>
-                          <a:ea typeface="Calibri" pitchFamily="34" charset="-122"/>
-                          <a:cs typeface="Calibri" pitchFamily="34" charset="-120"/>
-                        </a:rPr>
-                        <a:t>5.52%</a:t>
-                      </a:r>
-                      <a:endParaRPr lang="en-US" sz="500" dirty="0">
-                        <a:latin typeface="Calibri" charset="0"/>
-                        <a:ea typeface="Calibri" charset="0"/>
-                        <a:cs typeface="Calibri" charset="0"/>
-                      </a:endParaRPr>
-                    </a:p>
-                  </a:txBody>
-                  <a:tcPr marL="91440" marR="91440" marT="45720" marB="45720">
-                    <a:lnL w="2540" cap="flat" cmpd="sng" algn="ctr">
-                      <a:solidFill>
-                        <a:srgbClr val="EEEEEE"/>
-                      </a:solidFill>
-                      <a:prstDash val="solid"/>
-                      <a:round/>
-                      <a:headEnd type="none" w="med" len="med"/>
-                      <a:tailEnd type="none" w="med" len="med"/>
-                    </a:lnL>
-                    <a:lnR w="2540" cap="flat" cmpd="sng" algn="ctr">
-                      <a:solidFill>
-                        <a:srgbClr val="EEEEEE"/>
-                      </a:solidFill>
-                      <a:prstDash val="solid"/>
-                      <a:round/>
-                      <a:headEnd type="none" w="med" len="med"/>
-                      <a:tailEnd type="none" w="med" len="med"/>
-                    </a:lnR>
-                    <a:lnT w="2540" cap="flat" cmpd="sng" algn="ctr">
-                      <a:solidFill>
-                        <a:srgbClr val="EEEEEE"/>
-                      </a:solidFill>
-                      <a:prstDash val="solid"/>
-                      <a:round/>
-                      <a:headEnd type="none" w="med" len="med"/>
-                      <a:tailEnd type="none" w="med" len="med"/>
-                    </a:lnT>
-                    <a:lnB w="2540" cap="flat" cmpd="sng" algn="ctr">
-                      <a:solidFill>
-                        <a:srgbClr val="EEEEEE"/>
-                      </a:solidFill>
-                      <a:prstDash val="solid"/>
-                      <a:round/>
-                      <a:headEnd type="none" w="med" len="med"/>
-                      <a:tailEnd type="none" w="med" len="med"/>
-                    </a:lnB>
-                  </a:tcPr>
-                </a:tc>
-                <a:tc>
-                  <a:txBody>
-                    <a:bodyPr/>
-                    <a:lstStyle/>
-                    <a:p>
-                      <a:pPr algn="ctr" indent="0" marL="0">
-                        <a:buNone/>
-                      </a:pPr>
-                      <a:r>
-                        <a:rPr lang="en-US" sz="500" dirty="0">
-                          <a:solidFill>
-                            <a:srgbClr val="000000"/>
-                          </a:solidFill>
-                          <a:latin typeface="Calibri" pitchFamily="34" charset="0"/>
-                          <a:ea typeface="Calibri" pitchFamily="34" charset="-122"/>
-                          <a:cs typeface="Calibri" pitchFamily="34" charset="-120"/>
-                        </a:rPr>
-                        <a:t>3.39%</a:t>
-                      </a:r>
-                      <a:endParaRPr lang="en-US" sz="500" dirty="0">
-                        <a:latin typeface="Calibri" charset="0"/>
-                        <a:ea typeface="Calibri" charset="0"/>
-                        <a:cs typeface="Calibri" charset="0"/>
-                      </a:endParaRPr>
-                    </a:p>
-                  </a:txBody>
-                  <a:tcPr marL="91440" marR="91440" marT="45720" marB="45720">
-                    <a:lnL w="2540" cap="flat" cmpd="sng" algn="ctr">
-                      <a:solidFill>
-                        <a:srgbClr val="EEEEEE"/>
-                      </a:solidFill>
-                      <a:prstDash val="solid"/>
-                      <a:round/>
-                      <a:headEnd type="none" w="med" len="med"/>
-                      <a:tailEnd type="none" w="med" len="med"/>
-                    </a:lnL>
-                    <a:lnR w="2540" cap="flat" cmpd="sng" algn="ctr">
-                      <a:solidFill>
-                        <a:srgbClr val="EEEEEE"/>
-                      </a:solidFill>
-                      <a:prstDash val="solid"/>
-                      <a:round/>
-                      <a:headEnd type="none" w="med" len="med"/>
-                      <a:tailEnd type="none" w="med" len="med"/>
-                    </a:lnR>
-                    <a:lnT w="2540" cap="flat" cmpd="sng" algn="ctr">
-                      <a:solidFill>
-                        <a:srgbClr val="EEEEEE"/>
-                      </a:solidFill>
-                      <a:prstDash val="solid"/>
-                      <a:round/>
-                      <a:headEnd type="none" w="med" len="med"/>
-                      <a:tailEnd type="none" w="med" len="med"/>
-                    </a:lnT>
-                    <a:lnB w="2540" cap="flat" cmpd="sng" algn="ctr">
-                      <a:solidFill>
-                        <a:srgbClr val="EEEEEE"/>
-                      </a:solidFill>
-                      <a:prstDash val="solid"/>
-                      <a:round/>
-                      <a:headEnd type="none" w="med" len="med"/>
-                      <a:tailEnd type="none" w="med" len="med"/>
-                    </a:lnB>
-                  </a:tcPr>
-                </a:tc>
-                <a:tc>
-                  <a:txBody>
-                    <a:bodyPr/>
-                    <a:lstStyle/>
-                    <a:p>
-                      <a:pPr algn="ctr" indent="0" marL="0">
-                        <a:buNone/>
-                      </a:pPr>
-                      <a:r>
-                        <a:rPr lang="en-US" sz="500" dirty="0">
-                          <a:solidFill>
-                            <a:srgbClr val="000000"/>
-                          </a:solidFill>
-                          <a:latin typeface="Calibri" pitchFamily="34" charset="0"/>
-                          <a:ea typeface="Calibri" pitchFamily="34" charset="-122"/>
-                          <a:cs typeface="Calibri" pitchFamily="34" charset="-120"/>
-                        </a:rPr>
-                        <a:t>1.69%</a:t>
-                      </a:r>
-                      <a:endParaRPr lang="en-US" sz="500" dirty="0">
-                        <a:latin typeface="Calibri" charset="0"/>
-                        <a:ea typeface="Calibri" charset="0"/>
-                        <a:cs typeface="Calibri" charset="0"/>
-                      </a:endParaRPr>
-                    </a:p>
-                  </a:txBody>
-                  <a:tcPr marL="91440" marR="91440" marT="45720" marB="45720">
-                    <a:lnL w="2540" cap="flat" cmpd="sng" algn="ctr">
-                      <a:solidFill>
-                        <a:srgbClr val="EEEEEE"/>
-                      </a:solidFill>
-                      <a:prstDash val="solid"/>
-                      <a:round/>
-                      <a:headEnd type="none" w="med" len="med"/>
-                      <a:tailEnd type="none" w="med" len="med"/>
-                    </a:lnL>
-                    <a:lnR w="2540" cap="flat" cmpd="sng" algn="ctr">
-                      <a:solidFill>
-                        <a:srgbClr val="EEEEEE"/>
-                      </a:solidFill>
-                      <a:prstDash val="solid"/>
-                      <a:round/>
-                      <a:headEnd type="none" w="med" len="med"/>
-                      <a:tailEnd type="none" w="med" len="med"/>
-                    </a:lnR>
-                    <a:lnT w="2540" cap="flat" cmpd="sng" algn="ctr">
-                      <a:solidFill>
-                        <a:srgbClr val="EEEEEE"/>
-                      </a:solidFill>
-                      <a:prstDash val="solid"/>
-                      <a:round/>
-                      <a:headEnd type="none" w="med" len="med"/>
-                      <a:tailEnd type="none" w="med" len="med"/>
-                    </a:lnT>
-                    <a:lnB w="2540" cap="flat" cmpd="sng" algn="ctr">
-                      <a:solidFill>
-                        <a:srgbClr val="EEEEEE"/>
-                      </a:solidFill>
-                      <a:prstDash val="solid"/>
-                      <a:round/>
-                      <a:headEnd type="none" w="med" len="med"/>
-                      <a:tailEnd type="none" w="med" len="med"/>
-                    </a:lnB>
-                  </a:tcPr>
-                </a:tc>
-                <a:tc>
-                  <a:txBody>
-                    <a:bodyPr/>
-                    <a:lstStyle/>
-                    <a:p>
-                      <a:pPr algn="ctr" indent="0" marL="0">
-                        <a:buNone/>
-                      </a:pPr>
-                      <a:r>
-                        <a:rPr lang="en-US" sz="500" dirty="0">
-                          <a:solidFill>
-                            <a:srgbClr val="000000"/>
-                          </a:solidFill>
-                          <a:latin typeface="Calibri" pitchFamily="34" charset="0"/>
-                          <a:ea typeface="Calibri" pitchFamily="34" charset="-122"/>
-                          <a:cs typeface="Calibri" pitchFamily="34" charset="-120"/>
-                        </a:rPr>
-                        <a:t>1.98%</a:t>
-                      </a:r>
-                      <a:endParaRPr lang="en-US" sz="500" dirty="0">
-                        <a:latin typeface="Calibri" charset="0"/>
-                        <a:ea typeface="Calibri" charset="0"/>
-                        <a:cs typeface="Calibri" charset="0"/>
-                      </a:endParaRPr>
-                    </a:p>
-                  </a:txBody>
-                  <a:tcPr marL="91440" marR="91440" marT="45720" marB="45720">
-                    <a:lnL w="2540" cap="flat" cmpd="sng" algn="ctr">
-                      <a:solidFill>
-                        <a:srgbClr val="EEEEEE"/>
-                      </a:solidFill>
-                      <a:prstDash val="solid"/>
-                      <a:round/>
-                      <a:headEnd type="none" w="med" len="med"/>
-                      <a:tailEnd type="none" w="med" len="med"/>
-                    </a:lnL>
-                    <a:lnR w="2540" cap="flat" cmpd="sng" algn="ctr">
-                      <a:solidFill>
-                        <a:srgbClr val="EEEEEE"/>
-                      </a:solidFill>
-                      <a:prstDash val="solid"/>
-                      <a:round/>
-                      <a:headEnd type="none" w="med" len="med"/>
-                      <a:tailEnd type="none" w="med" len="med"/>
-                    </a:lnR>
-                    <a:lnT w="2540" cap="flat" cmpd="sng" algn="ctr">
-                      <a:solidFill>
-                        <a:srgbClr val="EEEEEE"/>
-                      </a:solidFill>
-                      <a:prstDash val="solid"/>
-                      <a:round/>
-                      <a:headEnd type="none" w="med" len="med"/>
-                      <a:tailEnd type="none" w="med" len="med"/>
-                    </a:lnT>
-                    <a:lnB w="2540" cap="flat" cmpd="sng" algn="ctr">
-                      <a:solidFill>
-                        <a:srgbClr val="EEEEEE"/>
-                      </a:solidFill>
-                      <a:prstDash val="solid"/>
-                      <a:round/>
-                      <a:headEnd type="none" w="med" len="med"/>
-                      <a:tailEnd type="none" w="med" len="med"/>
-                    </a:lnB>
-                  </a:tcPr>
-                </a:tc>
-                <a:tc>
-                  <a:txBody>
-                    <a:bodyPr/>
-                    <a:lstStyle/>
-                    <a:p>
-                      <a:pPr algn="ctr" indent="0" marL="0">
-                        <a:buNone/>
-                      </a:pPr>
-                      <a:r>
-                        <a:rPr lang="en-US" sz="500" dirty="0">
-                          <a:solidFill>
-                            <a:srgbClr val="000000"/>
-                          </a:solidFill>
-                          <a:latin typeface="Calibri" pitchFamily="34" charset="0"/>
-                          <a:ea typeface="Calibri" pitchFamily="34" charset="-122"/>
-                          <a:cs typeface="Calibri" pitchFamily="34" charset="-120"/>
-                        </a:rPr>
-                        <a:t>5.85%</a:t>
-                      </a:r>
-                      <a:endParaRPr lang="en-US" sz="500" dirty="0">
-                        <a:latin typeface="Calibri" charset="0"/>
-                        <a:ea typeface="Calibri" charset="0"/>
-                        <a:cs typeface="Calibri" charset="0"/>
-                      </a:endParaRPr>
-                    </a:p>
-                  </a:txBody>
-                  <a:tcPr marL="91440" marR="91440" marT="45720" marB="45720">
-                    <a:lnL w="2540" cap="flat" cmpd="sng" algn="ctr">
-                      <a:solidFill>
-                        <a:srgbClr val="EEEEEE"/>
-                      </a:solidFill>
-                      <a:prstDash val="solid"/>
-                      <a:round/>
-                      <a:headEnd type="none" w="med" len="med"/>
-                      <a:tailEnd type="none" w="med" len="med"/>
-                    </a:lnL>
-                    <a:lnR w="2540" cap="flat" cmpd="sng" algn="ctr">
-                      <a:solidFill>
-                        <a:srgbClr val="EEEEEE"/>
-                      </a:solidFill>
-                      <a:prstDash val="solid"/>
-                      <a:round/>
-                      <a:headEnd type="none" w="med" len="med"/>
-                      <a:tailEnd type="none" w="med" len="med"/>
-                    </a:lnR>
-                    <a:lnT w="2540" cap="flat" cmpd="sng" algn="ctr">
-                      <a:solidFill>
-                        <a:srgbClr val="EEEEEE"/>
-                      </a:solidFill>
-                      <a:prstDash val="solid"/>
-                      <a:round/>
-                      <a:headEnd type="none" w="med" len="med"/>
-                      <a:tailEnd type="none" w="med" len="med"/>
-                    </a:lnT>
-                    <a:lnB w="2540" cap="flat" cmpd="sng" algn="ctr">
-                      <a:solidFill>
-                        <a:srgbClr val="EEEEEE"/>
-                      </a:solidFill>
-                      <a:prstDash val="solid"/>
-                      <a:round/>
-                      <a:headEnd type="none" w="med" len="med"/>
-                      <a:tailEnd type="none" w="med" len="med"/>
-                    </a:lnB>
-                  </a:tcPr>
-                </a:tc>
-                <a:tc>
-                  <a:txBody>
-                    <a:bodyPr/>
-                    <a:lstStyle/>
-                    <a:p>
-                      <a:pPr algn="ctr" indent="0" marL="0">
-                        <a:buNone/>
-                      </a:pPr>
-                      <a:r>
-                        <a:rPr lang="en-US" sz="500" dirty="0">
-                          <a:solidFill>
-                            <a:srgbClr val="000000"/>
-                          </a:solidFill>
-                          <a:latin typeface="Calibri" pitchFamily="34" charset="0"/>
-                          <a:ea typeface="Calibri" pitchFamily="34" charset="-122"/>
-                          <a:cs typeface="Calibri" pitchFamily="34" charset="-120"/>
-                        </a:rPr>
-                        <a:t>5.48%</a:t>
-                      </a:r>
-                      <a:endParaRPr lang="en-US" sz="500" dirty="0">
-                        <a:latin typeface="Calibri" charset="0"/>
-                        <a:ea typeface="Calibri" charset="0"/>
-                        <a:cs typeface="Calibri" charset="0"/>
-                      </a:endParaRPr>
-                    </a:p>
-                  </a:txBody>
-                  <a:tcPr marL="91440" marR="91440" marT="45720" marB="45720">
-                    <a:lnL w="2540" cap="flat" cmpd="sng" algn="ctr">
-                      <a:solidFill>
-                        <a:srgbClr val="EEEEEE"/>
-                      </a:solidFill>
-                      <a:prstDash val="solid"/>
-                      <a:round/>
-                      <a:headEnd type="none" w="med" len="med"/>
-                      <a:tailEnd type="none" w="med" len="med"/>
-                    </a:lnL>
-                    <a:lnR w="2540" cap="flat" cmpd="sng" algn="ctr">
-                      <a:solidFill>
-                        <a:srgbClr val="EEEEEE"/>
-                      </a:solidFill>
-                      <a:prstDash val="solid"/>
-                      <a:round/>
-                      <a:headEnd type="none" w="med" len="med"/>
-                      <a:tailEnd type="none" w="med" len="med"/>
-                    </a:lnR>
-                    <a:lnT w="2540" cap="flat" cmpd="sng" algn="ctr">
-                      <a:solidFill>
-                        <a:srgbClr val="EEEEEE"/>
-                      </a:solidFill>
-                      <a:prstDash val="solid"/>
-                      <a:round/>
-                      <a:headEnd type="none" w="med" len="med"/>
-                      <a:tailEnd type="none" w="med" len="med"/>
-                    </a:lnT>
-                    <a:lnB w="2540" cap="flat" cmpd="sng" algn="ctr">
-                      <a:solidFill>
-                        <a:srgbClr val="EEEEEE"/>
-                      </a:solidFill>
-                      <a:prstDash val="solid"/>
-                      <a:round/>
-                      <a:headEnd type="none" w="med" len="med"/>
-                      <a:tailEnd type="none" w="med" len="med"/>
-                    </a:lnB>
-                  </a:tcPr>
-                </a:tc>
-                <a:tc>
-                  <a:txBody>
-                    <a:bodyPr/>
-                    <a:lstStyle/>
-                    <a:p>
-                      <a:pPr algn="ctr" indent="0" marL="0">
-                        <a:buNone/>
-                      </a:pPr>
-                      <a:r>
-                        <a:rPr lang="en-US" sz="500" dirty="0">
-                          <a:solidFill>
-                            <a:srgbClr val="000000"/>
-                          </a:solidFill>
-                          <a:latin typeface="Calibri" pitchFamily="34" charset="0"/>
-                          <a:ea typeface="Calibri" pitchFamily="34" charset="-122"/>
-                          <a:cs typeface="Calibri" pitchFamily="34" charset="-120"/>
-                        </a:rPr>
-                        <a:t>4.95%</a:t>
-                      </a:r>
-                      <a:endParaRPr lang="en-US" sz="500" dirty="0">
-                        <a:latin typeface="Calibri" charset="0"/>
-                        <a:ea typeface="Calibri" charset="0"/>
-                        <a:cs typeface="Calibri" charset="0"/>
-                      </a:endParaRPr>
-                    </a:p>
-                  </a:txBody>
-                  <a:tcPr marL="91440" marR="91440" marT="45720" marB="45720">
-                    <a:lnL w="2540" cap="flat" cmpd="sng" algn="ctr">
-                      <a:solidFill>
-                        <a:srgbClr val="EEEEEE"/>
-                      </a:solidFill>
-                      <a:prstDash val="solid"/>
-                      <a:round/>
-                      <a:headEnd type="none" w="med" len="med"/>
-                      <a:tailEnd type="none" w="med" len="med"/>
-                    </a:lnL>
-                    <a:lnR w="2540" cap="flat" cmpd="sng" algn="ctr">
-                      <a:solidFill>
-                        <a:srgbClr val="EEEEEE"/>
-                      </a:solidFill>
-                      <a:prstDash val="solid"/>
-                      <a:round/>
-                      <a:headEnd type="none" w="med" len="med"/>
-                      <a:tailEnd type="none" w="med" len="med"/>
-                    </a:lnR>
-                    <a:lnT w="2540" cap="flat" cmpd="sng" algn="ctr">
-                      <a:solidFill>
-                        <a:srgbClr val="EEEEEE"/>
-                      </a:solidFill>
-                      <a:prstDash val="solid"/>
-                      <a:round/>
-                      <a:headEnd type="none" w="med" len="med"/>
-                      <a:tailEnd type="none" w="med" len="med"/>
-                    </a:lnT>
-                    <a:lnB w="2540" cap="flat" cmpd="sng" algn="ctr">
-                      <a:solidFill>
-                        <a:srgbClr val="EEEEEE"/>
-                      </a:solidFill>
-                      <a:prstDash val="solid"/>
-                      <a:round/>
-                      <a:headEnd type="none" w="med" len="med"/>
-                      <a:tailEnd type="none" w="med" len="med"/>
-                    </a:lnB>
-                  </a:tcPr>
-                </a:tc>
-                <a:tc>
-                  <a:txBody>
-                    <a:bodyPr/>
-                    <a:lstStyle/>
-                    <a:p>
-                      <a:pPr algn="ctr" indent="0" marL="0">
-                        <a:buNone/>
-                      </a:pPr>
-                      <a:r>
-                        <a:rPr lang="en-US" sz="500" dirty="0">
-                          <a:solidFill>
-                            <a:srgbClr val="000000"/>
-                          </a:solidFill>
-                          <a:latin typeface="Calibri" pitchFamily="34" charset="0"/>
-                          <a:ea typeface="Calibri" pitchFamily="34" charset="-122"/>
-                          <a:cs typeface="Calibri" pitchFamily="34" charset="-120"/>
-                        </a:rPr>
-                        <a:t>5.55%</a:t>
-                      </a:r>
-                      <a:endParaRPr lang="en-US" sz="500" dirty="0">
-                        <a:latin typeface="Calibri" charset="0"/>
-                        <a:ea typeface="Calibri" charset="0"/>
-                        <a:cs typeface="Calibri" charset="0"/>
-                      </a:endParaRPr>
-                    </a:p>
-                  </a:txBody>
-                  <a:tcPr marL="91440" marR="91440" marT="45720" marB="45720">
-                    <a:lnL w="2540" cap="flat" cmpd="sng" algn="ctr">
-                      <a:solidFill>
-                        <a:srgbClr val="EEEEEE"/>
-                      </a:solidFill>
-                      <a:prstDash val="solid"/>
-                      <a:round/>
-                      <a:headEnd type="none" w="med" len="med"/>
-                      <a:tailEnd type="none" w="med" len="med"/>
-                    </a:lnL>
-                    <a:lnR w="2540" cap="flat" cmpd="sng" algn="ctr">
-                      <a:solidFill>
-                        <a:srgbClr val="EEEEEE"/>
-                      </a:solidFill>
-                      <a:prstDash val="solid"/>
-                      <a:round/>
-                      <a:headEnd type="none" w="med" len="med"/>
-                      <a:tailEnd type="none" w="med" len="med"/>
-                    </a:lnR>
-                    <a:lnT w="2540" cap="flat" cmpd="sng" algn="ctr">
-                      <a:solidFill>
-                        <a:srgbClr val="EEEEEE"/>
-                      </a:solidFill>
-                      <a:prstDash val="solid"/>
-                      <a:round/>
-                      <a:headEnd type="none" w="med" len="med"/>
-                      <a:tailEnd type="none" w="med" len="med"/>
-                    </a:lnT>
-                    <a:lnB w="2540" cap="flat" cmpd="sng" algn="ctr">
-                      <a:solidFill>
-                        <a:srgbClr val="EEEEEE"/>
-                      </a:solidFill>
-                      <a:prstDash val="solid"/>
-                      <a:round/>
-                      <a:headEnd type="none" w="med" len="med"/>
-                      <a:tailEnd type="none" w="med" len="med"/>
-                    </a:lnB>
-                  </a:tcPr>
-                </a:tc>
-                <a:tc>
-                  <a:txBody>
-                    <a:bodyPr/>
-                    <a:lstStyle/>
-                    <a:p>
-                      <a:pPr algn="ctr" indent="0" marL="0">
-                        <a:buNone/>
-                      </a:pPr>
-                      <a:r>
-                        <a:rPr lang="en-US" sz="500" dirty="0">
-                          <a:solidFill>
-                            <a:srgbClr val="000000"/>
-                          </a:solidFill>
-                          <a:latin typeface="Calibri" pitchFamily="34" charset="0"/>
-                          <a:ea typeface="Calibri" pitchFamily="34" charset="-122"/>
-                          <a:cs typeface="Calibri" pitchFamily="34" charset="-120"/>
-                        </a:rPr>
-                        <a:t>5.13%</a:t>
-                      </a:r>
-                      <a:endParaRPr lang="en-US" sz="500" dirty="0">
-                        <a:latin typeface="Calibri" charset="0"/>
-                        <a:ea typeface="Calibri" charset="0"/>
-                        <a:cs typeface="Calibri" charset="0"/>
-                      </a:endParaRPr>
-                    </a:p>
-                  </a:txBody>
-                  <a:tcPr marL="91440" marR="91440" marT="45720" marB="45720">
-                    <a:lnL w="2540" cap="flat" cmpd="sng" algn="ctr">
-                      <a:solidFill>
-                        <a:srgbClr val="EEEEEE"/>
-                      </a:solidFill>
-                      <a:prstDash val="solid"/>
-                      <a:round/>
-                      <a:headEnd type="none" w="med" len="med"/>
-                      <a:tailEnd type="none" w="med" len="med"/>
-                    </a:lnL>
-                    <a:lnR w="2540" cap="flat" cmpd="sng" algn="ctr">
-                      <a:solidFill>
-                        <a:srgbClr val="EEEEEE"/>
-                      </a:solidFill>
-                      <a:prstDash val="solid"/>
-                      <a:round/>
-                      <a:headEnd type="none" w="med" len="med"/>
-                      <a:tailEnd type="none" w="med" len="med"/>
-                    </a:lnR>
-                    <a:lnT w="2540" cap="flat" cmpd="sng" algn="ctr">
-                      <a:solidFill>
-                        <a:srgbClr val="EEEEEE"/>
-                      </a:solidFill>
-                      <a:prstDash val="solid"/>
-                      <a:round/>
-                      <a:headEnd type="none" w="med" len="med"/>
-                      <a:tailEnd type="none" w="med" len="med"/>
-                    </a:lnT>
-                    <a:lnB w="2540" cap="flat" cmpd="sng" algn="ctr">
-                      <a:solidFill>
-                        <a:srgbClr val="EEEEEE"/>
-                      </a:solidFill>
-                      <a:prstDash val="solid"/>
-                      <a:round/>
-                      <a:headEnd type="none" w="med" len="med"/>
-                      <a:tailEnd type="none" w="med" len="med"/>
-                    </a:lnB>
-                  </a:tcPr>
-                </a:tc>
-                <a:tc>
-                  <a:txBody>
-                    <a:bodyPr/>
-                    <a:lstStyle/>
-                    <a:p>
-                      <a:pPr algn="ctr" indent="0" marL="0">
-                        <a:buNone/>
-                      </a:pPr>
-                      <a:r>
-                        <a:rPr lang="en-US" sz="500" dirty="0">
-                          <a:solidFill>
-                            <a:srgbClr val="000000"/>
-                          </a:solidFill>
-                          <a:latin typeface="Calibri" pitchFamily="34" charset="0"/>
-                          <a:ea typeface="Calibri" pitchFamily="34" charset="-122"/>
-                          <a:cs typeface="Calibri" pitchFamily="34" charset="-120"/>
-                        </a:rPr>
-                        <a:t>5.72%</a:t>
-                      </a:r>
-                      <a:endParaRPr lang="en-US" sz="500" dirty="0">
-                        <a:latin typeface="Calibri" charset="0"/>
-                        <a:ea typeface="Calibri" charset="0"/>
-                        <a:cs typeface="Calibri" charset="0"/>
-                      </a:endParaRPr>
-                    </a:p>
-                  </a:txBody>
-                  <a:tcPr marL="91440" marR="91440" marT="45720" marB="45720">
-                    <a:lnL w="2540" cap="flat" cmpd="sng" algn="ctr">
-                      <a:solidFill>
-                        <a:srgbClr val="EEEEEE"/>
-                      </a:solidFill>
-                      <a:prstDash val="solid"/>
-                      <a:round/>
-                      <a:headEnd type="none" w="med" len="med"/>
-                      <a:tailEnd type="none" w="med" len="med"/>
-                    </a:lnL>
-                    <a:lnR w="2540" cap="flat" cmpd="sng" algn="ctr">
-                      <a:solidFill>
-                        <a:srgbClr val="EEEEEE"/>
-                      </a:solidFill>
-                      <a:prstDash val="solid"/>
-                      <a:round/>
-                      <a:headEnd type="none" w="med" len="med"/>
-                      <a:tailEnd type="none" w="med" len="med"/>
-                    </a:lnR>
-                    <a:lnT w="2540" cap="flat" cmpd="sng" algn="ctr">
-                      <a:solidFill>
-                        <a:srgbClr val="EEEEEE"/>
-                      </a:solidFill>
-                      <a:prstDash val="solid"/>
-                      <a:round/>
-                      <a:headEnd type="none" w="med" len="med"/>
-                      <a:tailEnd type="none" w="med" len="med"/>
-                    </a:lnT>
-                    <a:lnB w="2540" cap="flat" cmpd="sng" algn="ctr">
-                      <a:solidFill>
-                        <a:srgbClr val="EEEEEE"/>
-                      </a:solidFill>
-                      <a:prstDash val="solid"/>
-                      <a:round/>
-                      <a:headEnd type="none" w="med" len="med"/>
-                      <a:tailEnd type="none" w="med" len="med"/>
-                    </a:lnB>
-                  </a:tcPr>
-                </a:tc>
-                <a:tc>
-                  <a:txBody>
-                    <a:bodyPr/>
-                    <a:lstStyle/>
-                    <a:p>
-                      <a:pPr algn="ctr" indent="0" marL="0">
-                        <a:buNone/>
-                      </a:pPr>
-                      <a:r>
-                        <a:rPr lang="en-US" sz="500" b="1" dirty="0">
-                          <a:solidFill>
-                            <a:srgbClr val="000000"/>
-                          </a:solidFill>
-                          <a:latin typeface="Calibri" pitchFamily="34" charset="0"/>
-                          <a:ea typeface="Calibri" pitchFamily="34" charset="-122"/>
-                          <a:cs typeface="Calibri" pitchFamily="34" charset="-120"/>
-                        </a:rPr>
-                        <a:t>6.13%</a:t>
-                      </a:r>
-                      <a:endParaRPr lang="en-US" sz="500" dirty="0">
-                        <a:latin typeface="Calibri" charset="0"/>
-                        <a:ea typeface="Calibri" charset="0"/>
-                        <a:cs typeface="Calibri" charset="0"/>
-                      </a:endParaRPr>
-                    </a:p>
-                  </a:txBody>
-                  <a:tcPr marL="91440" marR="91440" marT="45720" marB="45720">
-                    <a:lnL w="2540" cap="flat" cmpd="sng" algn="ctr">
-                      <a:solidFill>
-                        <a:srgbClr val="EEEEEE"/>
-                      </a:solidFill>
-                      <a:prstDash val="solid"/>
-                      <a:round/>
-                      <a:headEnd type="none" w="med" len="med"/>
-                      <a:tailEnd type="none" w="med" len="med"/>
-                    </a:lnL>
-                    <a:lnR w="2540" cap="flat" cmpd="sng" algn="ctr">
-                      <a:solidFill>
-                        <a:srgbClr val="EEEEEE"/>
-                      </a:solidFill>
-                      <a:prstDash val="solid"/>
-                      <a:round/>
-                      <a:headEnd type="none" w="med" len="med"/>
-                      <a:tailEnd type="none" w="med" len="med"/>
-                    </a:lnR>
-                    <a:lnT w="2540" cap="flat" cmpd="sng" algn="ctr">
-                      <a:solidFill>
-                        <a:srgbClr val="EEEEEE"/>
-                      </a:solidFill>
-                      <a:prstDash val="solid"/>
-                      <a:round/>
-                      <a:headEnd type="none" w="med" len="med"/>
-                      <a:tailEnd type="none" w="med" len="med"/>
-                    </a:lnT>
-                    <a:lnB w="2540" cap="flat" cmpd="sng" algn="ctr">
-                      <a:solidFill>
-                        <a:srgbClr val="EEEEEE"/>
-                      </a:solidFill>
-                      <a:prstDash val="solid"/>
-                      <a:round/>
-                      <a:headEnd type="none" w="med" len="med"/>
-                      <a:tailEnd type="none" w="med" len="med"/>
-                    </a:lnB>
-                  </a:tcPr>
-                </a:tc>
-              </a:tr>
-              <a:tr h="123444">
-                <a:tc>
-                  <a:txBody>
-                    <a:bodyPr/>
-                    <a:lstStyle/>
-                    <a:p>
-                      <a:pPr algn="l" indent="0" marL="0">
-                        <a:buNone/>
-                      </a:pPr>
-                      <a:r>
-                        <a:rPr lang="en-US" sz="500" b="1" dirty="0">
-                          <a:solidFill>
-                            <a:srgbClr val="000000"/>
-                          </a:solidFill>
-                          <a:latin typeface="Calibri" pitchFamily="34" charset="0"/>
-                          <a:ea typeface="Calibri" pitchFamily="34" charset="-122"/>
-                          <a:cs typeface="Calibri" pitchFamily="34" charset="-120"/>
-                        </a:rPr>
-                        <a:t>2026</a:t>
-                      </a:r>
-                      <a:endParaRPr lang="en-US" sz="500" dirty="0">
-                        <a:latin typeface="Calibri" charset="0"/>
-                        <a:ea typeface="Calibri" charset="0"/>
-                        <a:cs typeface="Calibri" charset="0"/>
-                      </a:endParaRPr>
-                    </a:p>
-                  </a:txBody>
-                  <a:tcPr marL="91440" marR="91440" marT="45720" marB="45720">
-                    <a:lnL w="2540" cap="flat" cmpd="sng" algn="ctr">
-                      <a:solidFill>
-                        <a:srgbClr val="EEEEEE"/>
-                      </a:solidFill>
-                      <a:prstDash val="solid"/>
-                      <a:round/>
-                      <a:headEnd type="none" w="med" len="med"/>
-                      <a:tailEnd type="none" w="med" len="med"/>
-                    </a:lnL>
-                    <a:lnR w="2540" cap="flat" cmpd="sng" algn="ctr">
-                      <a:solidFill>
-                        <a:srgbClr val="EEEEEE"/>
-                      </a:solidFill>
-                      <a:prstDash val="solid"/>
-                      <a:round/>
-                      <a:headEnd type="none" w="med" len="med"/>
-                      <a:tailEnd type="none" w="med" len="med"/>
-                    </a:lnR>
-                    <a:lnT w="2540" cap="flat" cmpd="sng" algn="ctr">
-                      <a:solidFill>
-                        <a:srgbClr val="EEEEEE"/>
-                      </a:solidFill>
-                      <a:prstDash val="solid"/>
-                      <a:round/>
-                      <a:headEnd type="none" w="med" len="med"/>
-                      <a:tailEnd type="none" w="med" len="med"/>
-                    </a:lnT>
-                    <a:lnB w="2540" cap="flat" cmpd="sng" algn="ctr">
-                      <a:solidFill>
-                        <a:srgbClr val="EEEEEE"/>
-                      </a:solidFill>
-                      <a:prstDash val="solid"/>
-                      <a:round/>
-                      <a:headEnd type="none" w="med" len="med"/>
-                      <a:tailEnd type="none" w="med" len="med"/>
-                    </a:lnB>
-                  </a:tcPr>
-                </a:tc>
-                <a:tc>
-                  <a:txBody>
-                    <a:bodyPr/>
-                    <a:lstStyle/>
-                    <a:p>
-                      <a:pPr algn="l" indent="0" marL="0">
-                        <a:buNone/>
-                      </a:pPr>
-                      <a:r>
-                        <a:rPr lang="en-US" sz="500" dirty="0">
-                          <a:solidFill>
-                            <a:srgbClr val="999999"/>
-                          </a:solidFill>
-                          <a:latin typeface="Calibri" pitchFamily="34" charset="0"/>
-                          <a:ea typeface="Calibri" pitchFamily="34" charset="-122"/>
-                          <a:cs typeface="Calibri" pitchFamily="34" charset="-120"/>
-                        </a:rPr>
-                        <a:t>Competencia</a:t>
-                      </a:r>
-                      <a:endParaRPr lang="en-US" sz="500" dirty="0">
-                        <a:latin typeface="Calibri" charset="0"/>
-                        <a:ea typeface="Calibri" charset="0"/>
-                        <a:cs typeface="Calibri" charset="0"/>
-                      </a:endParaRPr>
-                    </a:p>
-                  </a:txBody>
-                  <a:tcPr marL="91440" marR="91440" marT="45720" marB="45720">
-                    <a:lnL w="2540" cap="flat" cmpd="sng" algn="ctr">
-                      <a:solidFill>
-                        <a:srgbClr val="EEEEEE"/>
-                      </a:solidFill>
-                      <a:prstDash val="solid"/>
-                      <a:round/>
-                      <a:headEnd type="none" w="med" len="med"/>
-                      <a:tailEnd type="none" w="med" len="med"/>
-                    </a:lnL>
-                    <a:lnR w="2540" cap="flat" cmpd="sng" algn="ctr">
-                      <a:solidFill>
-                        <a:srgbClr val="EEEEEE"/>
-                      </a:solidFill>
-                      <a:prstDash val="solid"/>
-                      <a:round/>
-                      <a:headEnd type="none" w="med" len="med"/>
-                      <a:tailEnd type="none" w="med" len="med"/>
-                    </a:lnR>
-                    <a:lnT w="2540" cap="flat" cmpd="sng" algn="ctr">
-                      <a:solidFill>
-                        <a:srgbClr val="EEEEEE"/>
-                      </a:solidFill>
-                      <a:prstDash val="solid"/>
-                      <a:round/>
-                      <a:headEnd type="none" w="med" len="med"/>
-                      <a:tailEnd type="none" w="med" len="med"/>
-                    </a:lnT>
-                    <a:lnB w="2540" cap="flat" cmpd="sng" algn="ctr">
-                      <a:solidFill>
-                        <a:srgbClr val="EEEEEE"/>
-                      </a:solidFill>
-                      <a:prstDash val="solid"/>
-                      <a:round/>
-                      <a:headEnd type="none" w="med" len="med"/>
-                      <a:tailEnd type="none" w="med" len="med"/>
-                    </a:lnB>
-                  </a:tcPr>
-                </a:tc>
-                <a:tc>
-                  <a:txBody>
-                    <a:bodyPr/>
-                    <a:lstStyle/>
-                    <a:p>
-                      <a:pPr algn="ctr" indent="0" marL="0">
-                        <a:buNone/>
-                      </a:pPr>
-                      <a:r>
-                        <a:rPr lang="en-US" sz="500" dirty="0">
-                          <a:solidFill>
-                            <a:srgbClr val="999999"/>
-                          </a:solidFill>
-                          <a:latin typeface="Calibri" pitchFamily="34" charset="0"/>
-                          <a:ea typeface="Calibri" pitchFamily="34" charset="-122"/>
-                          <a:cs typeface="Calibri" pitchFamily="34" charset="-120"/>
-                        </a:rPr>
-                        <a:t>3.35%</a:t>
-                      </a:r>
-                      <a:endParaRPr lang="en-US" sz="500" dirty="0">
-                        <a:latin typeface="Calibri" charset="0"/>
-                        <a:ea typeface="Calibri" charset="0"/>
-                        <a:cs typeface="Calibri" charset="0"/>
-                      </a:endParaRPr>
-                    </a:p>
-                  </a:txBody>
-                  <a:tcPr marL="91440" marR="91440" marT="45720" marB="45720">
-                    <a:lnL w="2540" cap="flat" cmpd="sng" algn="ctr">
-                      <a:solidFill>
-                        <a:srgbClr val="EEEEEE"/>
-                      </a:solidFill>
-                      <a:prstDash val="solid"/>
-                      <a:round/>
-                      <a:headEnd type="none" w="med" len="med"/>
-                      <a:tailEnd type="none" w="med" len="med"/>
-                    </a:lnL>
-                    <a:lnR w="2540" cap="flat" cmpd="sng" algn="ctr">
-                      <a:solidFill>
-                        <a:srgbClr val="EEEEEE"/>
-                      </a:solidFill>
-                      <a:prstDash val="solid"/>
-                      <a:round/>
-                      <a:headEnd type="none" w="med" len="med"/>
-                      <a:tailEnd type="none" w="med" len="med"/>
-                    </a:lnR>
-                    <a:lnT w="2540" cap="flat" cmpd="sng" algn="ctr">
-                      <a:solidFill>
-                        <a:srgbClr val="EEEEEE"/>
-                      </a:solidFill>
-                      <a:prstDash val="solid"/>
-                      <a:round/>
-                      <a:headEnd type="none" w="med" len="med"/>
-                      <a:tailEnd type="none" w="med" len="med"/>
-                    </a:lnT>
-                    <a:lnB w="2540" cap="flat" cmpd="sng" algn="ctr">
-                      <a:solidFill>
-                        <a:srgbClr val="EEEEEE"/>
-                      </a:solidFill>
-                      <a:prstDash val="solid"/>
-                      <a:round/>
-                      <a:headEnd type="none" w="med" len="med"/>
-                      <a:tailEnd type="none" w="med" len="med"/>
-                    </a:lnB>
-                  </a:tcPr>
-                </a:tc>
-                <a:tc>
-                  <a:txBody>
-                    <a:bodyPr/>
-                    <a:lstStyle/>
-                    <a:p>
-                      <a:pPr algn="ctr" indent="0" marL="0">
-                        <a:buNone/>
-                      </a:pPr>
-                      <a:r>
-                        <a:rPr lang="en-US" sz="500" dirty="0">
-                          <a:solidFill>
-                            <a:srgbClr val="999999"/>
-                          </a:solidFill>
-                          <a:latin typeface="Calibri" pitchFamily="34" charset="0"/>
-                          <a:ea typeface="Calibri" pitchFamily="34" charset="-122"/>
-                          <a:cs typeface="Calibri" pitchFamily="34" charset="-120"/>
-                        </a:rPr>
-                        <a:t>3.25%</a:t>
-                      </a:r>
-                      <a:endParaRPr lang="en-US" sz="500" dirty="0">
-                        <a:latin typeface="Calibri" charset="0"/>
-                        <a:ea typeface="Calibri" charset="0"/>
-                        <a:cs typeface="Calibri" charset="0"/>
-                      </a:endParaRPr>
-                    </a:p>
-                  </a:txBody>
-                  <a:tcPr marL="91440" marR="91440" marT="45720" marB="45720">
-                    <a:lnL w="2540" cap="flat" cmpd="sng" algn="ctr">
-                      <a:solidFill>
-                        <a:srgbClr val="EEEEEE"/>
-                      </a:solidFill>
-                      <a:prstDash val="solid"/>
-                      <a:round/>
-                      <a:headEnd type="none" w="med" len="med"/>
-                      <a:tailEnd type="none" w="med" len="med"/>
-                    </a:lnL>
-                    <a:lnR w="2540" cap="flat" cmpd="sng" algn="ctr">
-                      <a:solidFill>
-                        <a:srgbClr val="EEEEEE"/>
-                      </a:solidFill>
-                      <a:prstDash val="solid"/>
-                      <a:round/>
-                      <a:headEnd type="none" w="med" len="med"/>
-                      <a:tailEnd type="none" w="med" len="med"/>
-                    </a:lnR>
-                    <a:lnT w="2540" cap="flat" cmpd="sng" algn="ctr">
-                      <a:solidFill>
-                        <a:srgbClr val="EEEEEE"/>
-                      </a:solidFill>
-                      <a:prstDash val="solid"/>
-                      <a:round/>
-                      <a:headEnd type="none" w="med" len="med"/>
-                      <a:tailEnd type="none" w="med" len="med"/>
-                    </a:lnT>
-                    <a:lnB w="2540" cap="flat" cmpd="sng" algn="ctr">
-                      <a:solidFill>
-                        <a:srgbClr val="EEEEEE"/>
-                      </a:solidFill>
-                      <a:prstDash val="solid"/>
-                      <a:round/>
-                      <a:headEnd type="none" w="med" len="med"/>
-                      <a:tailEnd type="none" w="med" len="med"/>
-                    </a:lnB>
-                  </a:tcPr>
-                </a:tc>
-                <a:tc>
-                  <a:txBody>
-                    <a:bodyPr/>
-                    <a:lstStyle/>
-                    <a:p>
-                      <a:pPr algn="ctr" indent="0" marL="0">
-                        <a:buNone/>
-                      </a:pPr>
-                      <a:r>
-                        <a:rPr lang="en-US" sz="500" dirty="0">
-                          <a:solidFill>
-                            <a:srgbClr val="999999"/>
-                          </a:solidFill>
-                          <a:latin typeface="Calibri" pitchFamily="34" charset="0"/>
-                          <a:ea typeface="Calibri" pitchFamily="34" charset="-122"/>
-                          <a:cs typeface="Calibri" pitchFamily="34" charset="-120"/>
-                        </a:rPr>
-                        <a:t>3.17%</a:t>
-                      </a:r>
-                      <a:endParaRPr lang="en-US" sz="500" dirty="0">
-                        <a:latin typeface="Calibri" charset="0"/>
-                        <a:ea typeface="Calibri" charset="0"/>
-                        <a:cs typeface="Calibri" charset="0"/>
-                      </a:endParaRPr>
-                    </a:p>
-                  </a:txBody>
-                  <a:tcPr marL="91440" marR="91440" marT="45720" marB="45720">
-                    <a:lnL w="2540" cap="flat" cmpd="sng" algn="ctr">
-                      <a:solidFill>
-                        <a:srgbClr val="EEEEEE"/>
-                      </a:solidFill>
-                      <a:prstDash val="solid"/>
-                      <a:round/>
-                      <a:headEnd type="none" w="med" len="med"/>
-                      <a:tailEnd type="none" w="med" len="med"/>
-                    </a:lnL>
-                    <a:lnR w="2540" cap="flat" cmpd="sng" algn="ctr">
-                      <a:solidFill>
-                        <a:srgbClr val="EEEEEE"/>
-                      </a:solidFill>
-                      <a:prstDash val="solid"/>
-                      <a:round/>
-                      <a:headEnd type="none" w="med" len="med"/>
-                      <a:tailEnd type="none" w="med" len="med"/>
-                    </a:lnR>
-                    <a:lnT w="2540" cap="flat" cmpd="sng" algn="ctr">
-                      <a:solidFill>
-                        <a:srgbClr val="EEEEEE"/>
-                      </a:solidFill>
-                      <a:prstDash val="solid"/>
-                      <a:round/>
-                      <a:headEnd type="none" w="med" len="med"/>
-                      <a:tailEnd type="none" w="med" len="med"/>
-                    </a:lnT>
-                    <a:lnB w="2540" cap="flat" cmpd="sng" algn="ctr">
-                      <a:solidFill>
-                        <a:srgbClr val="EEEEEE"/>
-                      </a:solidFill>
-                      <a:prstDash val="solid"/>
-                      <a:round/>
-                      <a:headEnd type="none" w="med" len="med"/>
-                      <a:tailEnd type="none" w="med" len="med"/>
-                    </a:lnB>
-                  </a:tcPr>
-                </a:tc>
-                <a:tc>
-                  <a:txBody>
-                    <a:bodyPr/>
-                    <a:lstStyle/>
-                    <a:p>
-                      <a:pPr algn="ctr" indent="0" marL="0">
-                        <a:buNone/>
-                      </a:pPr>
-                      <a:r>
-                        <a:rPr lang="en-US" sz="500" dirty="0">
-                          <a:solidFill>
-                            <a:srgbClr val="999999"/>
-                          </a:solidFill>
-                          <a:latin typeface="Calibri" pitchFamily="34" charset="0"/>
-                          <a:ea typeface="Calibri" pitchFamily="34" charset="-122"/>
-                          <a:cs typeface="Calibri" pitchFamily="34" charset="-120"/>
-                        </a:rPr>
-                        <a:t>3.16%</a:t>
-                      </a:r>
-                      <a:endParaRPr lang="en-US" sz="500" dirty="0">
-                        <a:latin typeface="Calibri" charset="0"/>
-                        <a:ea typeface="Calibri" charset="0"/>
-                        <a:cs typeface="Calibri" charset="0"/>
-                      </a:endParaRPr>
-                    </a:p>
-                  </a:txBody>
-                  <a:tcPr marL="91440" marR="91440" marT="45720" marB="45720">
-                    <a:lnL w="2540" cap="flat" cmpd="sng" algn="ctr">
-                      <a:solidFill>
-                        <a:srgbClr val="EEEEEE"/>
-                      </a:solidFill>
-                      <a:prstDash val="solid"/>
-                      <a:round/>
-                      <a:headEnd type="none" w="med" len="med"/>
-                      <a:tailEnd type="none" w="med" len="med"/>
-                    </a:lnL>
-                    <a:lnR w="2540" cap="flat" cmpd="sng" algn="ctr">
-                      <a:solidFill>
-                        <a:srgbClr val="EEEEEE"/>
-                      </a:solidFill>
-                      <a:prstDash val="solid"/>
-                      <a:round/>
-                      <a:headEnd type="none" w="med" len="med"/>
-                      <a:tailEnd type="none" w="med" len="med"/>
-                    </a:lnR>
-                    <a:lnT w="2540" cap="flat" cmpd="sng" algn="ctr">
-                      <a:solidFill>
-                        <a:srgbClr val="EEEEEE"/>
-                      </a:solidFill>
-                      <a:prstDash val="solid"/>
-                      <a:round/>
-                      <a:headEnd type="none" w="med" len="med"/>
-                      <a:tailEnd type="none" w="med" len="med"/>
-                    </a:lnT>
-                    <a:lnB w="2540" cap="flat" cmpd="sng" algn="ctr">
-                      <a:solidFill>
-                        <a:srgbClr val="EEEEEE"/>
-                      </a:solidFill>
-                      <a:prstDash val="solid"/>
-                      <a:round/>
-                      <a:headEnd type="none" w="med" len="med"/>
-                      <a:tailEnd type="none" w="med" len="med"/>
-                    </a:lnB>
-                  </a:tcPr>
-                </a:tc>
-                <a:tc>
-                  <a:txBody>
-                    <a:bodyPr/>
-                    <a:lstStyle/>
-                    <a:p>
-                      <a:pPr algn="ctr" indent="0" marL="0">
-                        <a:buNone/>
-                      </a:pPr>
-                      <a:endParaRPr lang="en-US" sz="500" dirty="0">
-                        <a:latin typeface="Calibri" charset="0"/>
-                        <a:ea typeface="Calibri" charset="0"/>
-                        <a:cs typeface="Calibri" charset="0"/>
-                      </a:endParaRPr>
-                    </a:p>
-                  </a:txBody>
-                  <a:tcPr marL="91440" marR="91440" marT="45720" marB="45720">
-                    <a:lnL w="2540" cap="flat" cmpd="sng" algn="ctr">
-                      <a:solidFill>
-                        <a:srgbClr val="EEEEEE"/>
-                      </a:solidFill>
-                      <a:prstDash val="solid"/>
-                      <a:round/>
-                      <a:headEnd type="none" w="med" len="med"/>
-                      <a:tailEnd type="none" w="med" len="med"/>
-                    </a:lnL>
-                    <a:lnR w="2540" cap="flat" cmpd="sng" algn="ctr">
-                      <a:solidFill>
-                        <a:srgbClr val="EEEEEE"/>
-                      </a:solidFill>
-                      <a:prstDash val="solid"/>
-                      <a:round/>
-                      <a:headEnd type="none" w="med" len="med"/>
-                      <a:tailEnd type="none" w="med" len="med"/>
-                    </a:lnR>
-                    <a:lnT w="2540" cap="flat" cmpd="sng" algn="ctr">
-                      <a:solidFill>
-                        <a:srgbClr val="EEEEEE"/>
-                      </a:solidFill>
-                      <a:prstDash val="solid"/>
-                      <a:round/>
-                      <a:headEnd type="none" w="med" len="med"/>
-                      <a:tailEnd type="none" w="med" len="med"/>
-                    </a:lnT>
-                    <a:lnB w="2540" cap="flat" cmpd="sng" algn="ctr">
-                      <a:solidFill>
-                        <a:srgbClr val="EEEEEE"/>
-                      </a:solidFill>
-                      <a:prstDash val="solid"/>
-                      <a:round/>
-                      <a:headEnd type="none" w="med" len="med"/>
-                      <a:tailEnd type="none" w="med" len="med"/>
-                    </a:lnB>
-                  </a:tcPr>
-                </a:tc>
-                <a:tc>
-                  <a:txBody>
-                    <a:bodyPr/>
-                    <a:lstStyle/>
-                    <a:p>
-                      <a:pPr algn="ctr" indent="0" marL="0">
-                        <a:buNone/>
-                      </a:pPr>
-                      <a:endParaRPr lang="en-US" sz="500" dirty="0">
-                        <a:latin typeface="Calibri" charset="0"/>
-                        <a:ea typeface="Calibri" charset="0"/>
-                        <a:cs typeface="Calibri" charset="0"/>
-                      </a:endParaRPr>
-                    </a:p>
-                  </a:txBody>
-                  <a:tcPr marL="91440" marR="91440" marT="45720" marB="45720">
-                    <a:lnL w="2540" cap="flat" cmpd="sng" algn="ctr">
-                      <a:solidFill>
-                        <a:srgbClr val="EEEEEE"/>
-                      </a:solidFill>
-                      <a:prstDash val="solid"/>
-                      <a:round/>
-                      <a:headEnd type="none" w="med" len="med"/>
-                      <a:tailEnd type="none" w="med" len="med"/>
-                    </a:lnL>
-                    <a:lnR w="2540" cap="flat" cmpd="sng" algn="ctr">
-                      <a:solidFill>
-                        <a:srgbClr val="EEEEEE"/>
-                      </a:solidFill>
-                      <a:prstDash val="solid"/>
-                      <a:round/>
-                      <a:headEnd type="none" w="med" len="med"/>
-                      <a:tailEnd type="none" w="med" len="med"/>
-                    </a:lnR>
-                    <a:lnT w="2540" cap="flat" cmpd="sng" algn="ctr">
-                      <a:solidFill>
-                        <a:srgbClr val="EEEEEE"/>
-                      </a:solidFill>
-                      <a:prstDash val="solid"/>
-                      <a:round/>
-                      <a:headEnd type="none" w="med" len="med"/>
-                      <a:tailEnd type="none" w="med" len="med"/>
-                    </a:lnT>
-                    <a:lnB w="2540" cap="flat" cmpd="sng" algn="ctr">
-                      <a:solidFill>
-                        <a:srgbClr val="EEEEEE"/>
-                      </a:solidFill>
-                      <a:prstDash val="solid"/>
-                      <a:round/>
-                      <a:headEnd type="none" w="med" len="med"/>
-                      <a:tailEnd type="none" w="med" len="med"/>
-                    </a:lnB>
-                  </a:tcPr>
-                </a:tc>
-                <a:tc>
-                  <a:txBody>
-                    <a:bodyPr/>
-                    <a:lstStyle/>
-                    <a:p>
-                      <a:pPr algn="ctr" indent="0" marL="0">
-                        <a:buNone/>
-                      </a:pPr>
-                      <a:endParaRPr lang="en-US" sz="500" dirty="0">
-                        <a:latin typeface="Calibri" charset="0"/>
-                        <a:ea typeface="Calibri" charset="0"/>
-                        <a:cs typeface="Calibri" charset="0"/>
-                      </a:endParaRPr>
-                    </a:p>
-                  </a:txBody>
-                  <a:tcPr marL="91440" marR="91440" marT="45720" marB="45720">
-                    <a:lnL w="2540" cap="flat" cmpd="sng" algn="ctr">
-                      <a:solidFill>
-                        <a:srgbClr val="EEEEEE"/>
-                      </a:solidFill>
-                      <a:prstDash val="solid"/>
-                      <a:round/>
-                      <a:headEnd type="none" w="med" len="med"/>
-                      <a:tailEnd type="none" w="med" len="med"/>
-                    </a:lnL>
-                    <a:lnR w="2540" cap="flat" cmpd="sng" algn="ctr">
-                      <a:solidFill>
-                        <a:srgbClr val="EEEEEE"/>
-                      </a:solidFill>
-                      <a:prstDash val="solid"/>
-                      <a:round/>
-                      <a:headEnd type="none" w="med" len="med"/>
-                      <a:tailEnd type="none" w="med" len="med"/>
-                    </a:lnR>
-                    <a:lnT w="2540" cap="flat" cmpd="sng" algn="ctr">
-                      <a:solidFill>
-                        <a:srgbClr val="EEEEEE"/>
-                      </a:solidFill>
-                      <a:prstDash val="solid"/>
-                      <a:round/>
-                      <a:headEnd type="none" w="med" len="med"/>
-                      <a:tailEnd type="none" w="med" len="med"/>
-                    </a:lnT>
-                    <a:lnB w="2540" cap="flat" cmpd="sng" algn="ctr">
-                      <a:solidFill>
-                        <a:srgbClr val="EEEEEE"/>
-                      </a:solidFill>
-                      <a:prstDash val="solid"/>
-                      <a:round/>
-                      <a:headEnd type="none" w="med" len="med"/>
-                      <a:tailEnd type="none" w="med" len="med"/>
-                    </a:lnB>
-                  </a:tcPr>
-                </a:tc>
-                <a:tc>
-                  <a:txBody>
-                    <a:bodyPr/>
-                    <a:lstStyle/>
-                    <a:p>
-                      <a:pPr algn="ctr" indent="0" marL="0">
-                        <a:buNone/>
-                      </a:pPr>
-                      <a:endParaRPr lang="en-US" sz="500" dirty="0">
-                        <a:latin typeface="Calibri" charset="0"/>
-                        <a:ea typeface="Calibri" charset="0"/>
-                        <a:cs typeface="Calibri" charset="0"/>
-                      </a:endParaRPr>
-                    </a:p>
-                  </a:txBody>
-                  <a:tcPr marL="91440" marR="91440" marT="45720" marB="45720">
-                    <a:lnL w="2540" cap="flat" cmpd="sng" algn="ctr">
-                      <a:solidFill>
-                        <a:srgbClr val="EEEEEE"/>
-                      </a:solidFill>
-                      <a:prstDash val="solid"/>
-                      <a:round/>
-                      <a:headEnd type="none" w="med" len="med"/>
-                      <a:tailEnd type="none" w="med" len="med"/>
-                    </a:lnL>
-                    <a:lnR w="2540" cap="flat" cmpd="sng" algn="ctr">
-                      <a:solidFill>
-                        <a:srgbClr val="EEEEEE"/>
-                      </a:solidFill>
-                      <a:prstDash val="solid"/>
-                      <a:round/>
-                      <a:headEnd type="none" w="med" len="med"/>
-                      <a:tailEnd type="none" w="med" len="med"/>
-                    </a:lnR>
-                    <a:lnT w="2540" cap="flat" cmpd="sng" algn="ctr">
-                      <a:solidFill>
-                        <a:srgbClr val="EEEEEE"/>
-                      </a:solidFill>
-                      <a:prstDash val="solid"/>
-                      <a:round/>
-                      <a:headEnd type="none" w="med" len="med"/>
-                      <a:tailEnd type="none" w="med" len="med"/>
-                    </a:lnT>
-                    <a:lnB w="2540" cap="flat" cmpd="sng" algn="ctr">
-                      <a:solidFill>
-                        <a:srgbClr val="EEEEEE"/>
-                      </a:solidFill>
-                      <a:prstDash val="solid"/>
-                      <a:round/>
-                      <a:headEnd type="none" w="med" len="med"/>
-                      <a:tailEnd type="none" w="med" len="med"/>
-                    </a:lnB>
-                  </a:tcPr>
-                </a:tc>
-                <a:tc>
-                  <a:txBody>
-                    <a:bodyPr/>
-                    <a:lstStyle/>
-                    <a:p>
-                      <a:pPr algn="ctr" indent="0" marL="0">
-                        <a:buNone/>
-                      </a:pPr>
-                      <a:endParaRPr lang="en-US" sz="500" dirty="0">
-                        <a:latin typeface="Calibri" charset="0"/>
-                        <a:ea typeface="Calibri" charset="0"/>
-                        <a:cs typeface="Calibri" charset="0"/>
-                      </a:endParaRPr>
-                    </a:p>
-                  </a:txBody>
-                  <a:tcPr marL="91440" marR="91440" marT="45720" marB="45720">
-                    <a:lnL w="2540" cap="flat" cmpd="sng" algn="ctr">
-                      <a:solidFill>
-                        <a:srgbClr val="EEEEEE"/>
-                      </a:solidFill>
-                      <a:prstDash val="solid"/>
-                      <a:round/>
-                      <a:headEnd type="none" w="med" len="med"/>
-                      <a:tailEnd type="none" w="med" len="med"/>
-                    </a:lnL>
-                    <a:lnR w="2540" cap="flat" cmpd="sng" algn="ctr">
-                      <a:solidFill>
-                        <a:srgbClr val="EEEEEE"/>
-                      </a:solidFill>
-                      <a:prstDash val="solid"/>
-                      <a:round/>
-                      <a:headEnd type="none" w="med" len="med"/>
-                      <a:tailEnd type="none" w="med" len="med"/>
-                    </a:lnR>
-                    <a:lnT w="2540" cap="flat" cmpd="sng" algn="ctr">
-                      <a:solidFill>
-                        <a:srgbClr val="EEEEEE"/>
-                      </a:solidFill>
-                      <a:prstDash val="solid"/>
-                      <a:round/>
-                      <a:headEnd type="none" w="med" len="med"/>
-                      <a:tailEnd type="none" w="med" len="med"/>
-                    </a:lnT>
-                    <a:lnB w="2540" cap="flat" cmpd="sng" algn="ctr">
-                      <a:solidFill>
-                        <a:srgbClr val="EEEEEE"/>
-                      </a:solidFill>
-                      <a:prstDash val="solid"/>
-                      <a:round/>
-                      <a:headEnd type="none" w="med" len="med"/>
-                      <a:tailEnd type="none" w="med" len="med"/>
-                    </a:lnB>
-                  </a:tcPr>
-                </a:tc>
-                <a:tc>
-                  <a:txBody>
-                    <a:bodyPr/>
-                    <a:lstStyle/>
-                    <a:p>
-                      <a:pPr algn="ctr" indent="0" marL="0">
-                        <a:buNone/>
-                      </a:pPr>
-                      <a:endParaRPr lang="en-US" sz="500" dirty="0">
-                        <a:latin typeface="Calibri" charset="0"/>
-                        <a:ea typeface="Calibri" charset="0"/>
-                        <a:cs typeface="Calibri" charset="0"/>
-                      </a:endParaRPr>
-                    </a:p>
-                  </a:txBody>
-                  <a:tcPr marL="91440" marR="91440" marT="45720" marB="45720">
-                    <a:lnL w="2540" cap="flat" cmpd="sng" algn="ctr">
-                      <a:solidFill>
-                        <a:srgbClr val="EEEEEE"/>
-                      </a:solidFill>
-                      <a:prstDash val="solid"/>
-                      <a:round/>
-                      <a:headEnd type="none" w="med" len="med"/>
-                      <a:tailEnd type="none" w="med" len="med"/>
-                    </a:lnL>
-                    <a:lnR w="2540" cap="flat" cmpd="sng" algn="ctr">
-                      <a:solidFill>
-                        <a:srgbClr val="EEEEEE"/>
-                      </a:solidFill>
-                      <a:prstDash val="solid"/>
-                      <a:round/>
-                      <a:headEnd type="none" w="med" len="med"/>
-                      <a:tailEnd type="none" w="med" len="med"/>
-                    </a:lnR>
-                    <a:lnT w="2540" cap="flat" cmpd="sng" algn="ctr">
-                      <a:solidFill>
-                        <a:srgbClr val="EEEEEE"/>
-                      </a:solidFill>
-                      <a:prstDash val="solid"/>
-                      <a:round/>
-                      <a:headEnd type="none" w="med" len="med"/>
-                      <a:tailEnd type="none" w="med" len="med"/>
-                    </a:lnT>
-                    <a:lnB w="2540" cap="flat" cmpd="sng" algn="ctr">
-                      <a:solidFill>
-                        <a:srgbClr val="EEEEEE"/>
-                      </a:solidFill>
-                      <a:prstDash val="solid"/>
-                      <a:round/>
-                      <a:headEnd type="none" w="med" len="med"/>
-                      <a:tailEnd type="none" w="med" len="med"/>
-                    </a:lnB>
-                  </a:tcPr>
-                </a:tc>
-                <a:tc>
-                  <a:txBody>
-                    <a:bodyPr/>
-                    <a:lstStyle/>
-                    <a:p>
-                      <a:pPr algn="ctr" indent="0" marL="0">
-                        <a:buNone/>
-                      </a:pPr>
-                      <a:endParaRPr lang="en-US" sz="500" dirty="0">
-                        <a:latin typeface="Calibri" charset="0"/>
-                        <a:ea typeface="Calibri" charset="0"/>
-                        <a:cs typeface="Calibri" charset="0"/>
-                      </a:endParaRPr>
-                    </a:p>
-                  </a:txBody>
-                  <a:tcPr marL="91440" marR="91440" marT="45720" marB="45720">
-                    <a:lnL w="2540" cap="flat" cmpd="sng" algn="ctr">
-                      <a:solidFill>
-                        <a:srgbClr val="EEEEEE"/>
-                      </a:solidFill>
-                      <a:prstDash val="solid"/>
-                      <a:round/>
-                      <a:headEnd type="none" w="med" len="med"/>
-                      <a:tailEnd type="none" w="med" len="med"/>
-                    </a:lnL>
-                    <a:lnR w="2540" cap="flat" cmpd="sng" algn="ctr">
-                      <a:solidFill>
-                        <a:srgbClr val="EEEEEE"/>
-                      </a:solidFill>
-                      <a:prstDash val="solid"/>
-                      <a:round/>
-                      <a:headEnd type="none" w="med" len="med"/>
-                      <a:tailEnd type="none" w="med" len="med"/>
-                    </a:lnR>
-                    <a:lnT w="2540" cap="flat" cmpd="sng" algn="ctr">
-                      <a:solidFill>
-                        <a:srgbClr val="EEEEEE"/>
-                      </a:solidFill>
-                      <a:prstDash val="solid"/>
-                      <a:round/>
-                      <a:headEnd type="none" w="med" len="med"/>
-                      <a:tailEnd type="none" w="med" len="med"/>
-                    </a:lnT>
-                    <a:lnB w="2540" cap="flat" cmpd="sng" algn="ctr">
-                      <a:solidFill>
-                        <a:srgbClr val="EEEEEE"/>
-                      </a:solidFill>
-                      <a:prstDash val="solid"/>
-                      <a:round/>
-                      <a:headEnd type="none" w="med" len="med"/>
-                      <a:tailEnd type="none" w="med" len="med"/>
-                    </a:lnB>
-                  </a:tcPr>
-                </a:tc>
-                <a:tc>
-                  <a:txBody>
-                    <a:bodyPr/>
-                    <a:lstStyle/>
-                    <a:p>
-                      <a:pPr algn="ctr" indent="0" marL="0">
-                        <a:buNone/>
-                      </a:pPr>
-                      <a:endParaRPr lang="en-US" sz="500" dirty="0">
-                        <a:latin typeface="Calibri" charset="0"/>
-                        <a:ea typeface="Calibri" charset="0"/>
-                        <a:cs typeface="Calibri" charset="0"/>
-                      </a:endParaRPr>
-                    </a:p>
-                  </a:txBody>
-                  <a:tcPr marL="91440" marR="91440" marT="45720" marB="45720">
-                    <a:lnL w="2540" cap="flat" cmpd="sng" algn="ctr">
-                      <a:solidFill>
-                        <a:srgbClr val="EEEEEE"/>
-                      </a:solidFill>
-                      <a:prstDash val="solid"/>
-                      <a:round/>
-                      <a:headEnd type="none" w="med" len="med"/>
-                      <a:tailEnd type="none" w="med" len="med"/>
-                    </a:lnL>
-                    <a:lnR w="2540" cap="flat" cmpd="sng" algn="ctr">
-                      <a:solidFill>
-                        <a:srgbClr val="EEEEEE"/>
-                      </a:solidFill>
-                      <a:prstDash val="solid"/>
-                      <a:round/>
-                      <a:headEnd type="none" w="med" len="med"/>
-                      <a:tailEnd type="none" w="med" len="med"/>
-                    </a:lnR>
-                    <a:lnT w="2540" cap="flat" cmpd="sng" algn="ctr">
-                      <a:solidFill>
-                        <a:srgbClr val="EEEEEE"/>
-                      </a:solidFill>
-                      <a:prstDash val="solid"/>
-                      <a:round/>
-                      <a:headEnd type="none" w="med" len="med"/>
-                      <a:tailEnd type="none" w="med" len="med"/>
-                    </a:lnT>
-                    <a:lnB w="2540" cap="flat" cmpd="sng" algn="ctr">
-                      <a:solidFill>
-                        <a:srgbClr val="EEEEEE"/>
-                      </a:solidFill>
-                      <a:prstDash val="solid"/>
-                      <a:round/>
-                      <a:headEnd type="none" w="med" len="med"/>
-                      <a:tailEnd type="none" w="med" len="med"/>
-                    </a:lnB>
-                  </a:tcPr>
-                </a:tc>
-                <a:tc>
-                  <a:txBody>
-                    <a:bodyPr/>
-                    <a:lstStyle/>
-                    <a:p>
-                      <a:pPr algn="ctr" indent="0" marL="0">
-                        <a:buNone/>
-                      </a:pPr>
-                      <a:r>
-                        <a:rPr lang="en-US" sz="500" b="1" dirty="0">
-                          <a:solidFill>
-                            <a:srgbClr val="999999"/>
-                          </a:solidFill>
-                          <a:latin typeface="Calibri" pitchFamily="34" charset="0"/>
-                          <a:ea typeface="Calibri" pitchFamily="34" charset="-122"/>
-                          <a:cs typeface="Calibri" pitchFamily="34" charset="-120"/>
-                        </a:rPr>
-                        <a:t>2.37%</a:t>
-                      </a:r>
-                      <a:endParaRPr lang="en-US" sz="500" dirty="0">
-                        <a:latin typeface="Calibri" charset="0"/>
-                        <a:ea typeface="Calibri" charset="0"/>
-                        <a:cs typeface="Calibri" charset="0"/>
-                      </a:endParaRPr>
-                    </a:p>
-                  </a:txBody>
-                  <a:tcPr marL="91440" marR="91440" marT="45720" marB="45720">
-                    <a:lnL w="2540" cap="flat" cmpd="sng" algn="ctr">
-                      <a:solidFill>
-                        <a:srgbClr val="EEEEEE"/>
-                      </a:solidFill>
-                      <a:prstDash val="solid"/>
-                      <a:round/>
-                      <a:headEnd type="none" w="med" len="med"/>
-                      <a:tailEnd type="none" w="med" len="med"/>
-                    </a:lnL>
-                    <a:lnR w="2540" cap="flat" cmpd="sng" algn="ctr">
-                      <a:solidFill>
-                        <a:srgbClr val="EEEEEE"/>
-                      </a:solidFill>
-                      <a:prstDash val="solid"/>
-                      <a:round/>
-                      <a:headEnd type="none" w="med" len="med"/>
-                      <a:tailEnd type="none" w="med" len="med"/>
-                    </a:lnR>
-                    <a:lnT w="2540" cap="flat" cmpd="sng" algn="ctr">
-                      <a:solidFill>
-                        <a:srgbClr val="EEEEEE"/>
-                      </a:solidFill>
-                      <a:prstDash val="solid"/>
-                      <a:round/>
-                      <a:headEnd type="none" w="med" len="med"/>
-                      <a:tailEnd type="none" w="med" len="med"/>
-                    </a:lnT>
-                    <a:lnB w="2540" cap="flat" cmpd="sng" algn="ctr">
-                      <a:solidFill>
-                        <a:srgbClr val="EEEEEE"/>
-                      </a:solidFill>
-                      <a:prstDash val="solid"/>
-                      <a:round/>
-                      <a:headEnd type="none" w="med" len="med"/>
-                      <a:tailEnd type="none" w="med" len="med"/>
-                    </a:lnB>
-                  </a:tcPr>
-                </a:tc>
-              </a:tr>
-              <a:tr h="123444">
-                <a:tc>
-                  <a:txBody>
-                    <a:bodyPr/>
-                    <a:lstStyle/>
-                    <a:p>
-                      <a:pPr algn="l" indent="0" marL="0">
-                        <a:buNone/>
-                      </a:pPr>
-                      <a:endParaRPr lang="en-US" sz="500" dirty="0">
-                        <a:latin typeface="Calibri" charset="0"/>
-                        <a:ea typeface="Calibri" charset="0"/>
-                        <a:cs typeface="Calibri" charset="0"/>
-                      </a:endParaRPr>
-                    </a:p>
-                  </a:txBody>
-                  <a:tcPr marL="91440" marR="91440" marT="45720" marB="45720">
-                    <a:lnL w="2540" cap="flat" cmpd="sng" algn="ctr">
-                      <a:solidFill>
-                        <a:srgbClr val="EEEEEE"/>
-                      </a:solidFill>
-                      <a:prstDash val="solid"/>
-                      <a:round/>
-                      <a:headEnd type="none" w="med" len="med"/>
-                      <a:tailEnd type="none" w="med" len="med"/>
-                    </a:lnL>
-                    <a:lnR w="2540" cap="flat" cmpd="sng" algn="ctr">
-                      <a:solidFill>
-                        <a:srgbClr val="EEEEEE"/>
-                      </a:solidFill>
-                      <a:prstDash val="solid"/>
-                      <a:round/>
-                      <a:headEnd type="none" w="med" len="med"/>
-                      <a:tailEnd type="none" w="med" len="med"/>
-                    </a:lnR>
-                    <a:lnT w="2540" cap="flat" cmpd="sng" algn="ctr">
-                      <a:solidFill>
-                        <a:srgbClr val="EEEEEE"/>
-                      </a:solidFill>
-                      <a:prstDash val="solid"/>
-                      <a:round/>
-                      <a:headEnd type="none" w="med" len="med"/>
-                      <a:tailEnd type="none" w="med" len="med"/>
-                    </a:lnT>
-                    <a:lnB w="2540" cap="flat" cmpd="sng" algn="ctr">
-                      <a:solidFill>
-                        <a:srgbClr val="EEEEEE"/>
-                      </a:solidFill>
-                      <a:prstDash val="solid"/>
-                      <a:round/>
-                      <a:headEnd type="none" w="med" len="med"/>
-                      <a:tailEnd type="none" w="med" len="med"/>
-                    </a:lnB>
-                  </a:tcPr>
-                </a:tc>
-                <a:tc>
-                  <a:txBody>
-                    <a:bodyPr/>
-                    <a:lstStyle/>
-                    <a:p>
-                      <a:pPr algn="l" indent="0" marL="0">
-                        <a:buNone/>
-                      </a:pPr>
-                      <a:r>
-                        <a:rPr lang="en-US" sz="400" dirty="0">
-                          <a:solidFill>
-                            <a:srgbClr val="000000"/>
-                          </a:solidFill>
-                          <a:latin typeface="Calibri" pitchFamily="34" charset="0"/>
-                          <a:ea typeface="Calibri" pitchFamily="34" charset="-122"/>
-                          <a:cs typeface="Calibri" pitchFamily="34" charset="-120"/>
-                        </a:rPr>
-                        <a:t>LIQUIDEZ RESERVA DÓLAR</a:t>
-                      </a:r>
-                      <a:endParaRPr lang="en-US" sz="400" dirty="0">
-                        <a:latin typeface="Calibri" charset="0"/>
-                        <a:ea typeface="Calibri" charset="0"/>
-                        <a:cs typeface="Calibri" charset="0"/>
-                      </a:endParaRPr>
-                    </a:p>
-                  </a:txBody>
-                  <a:tcPr marL="91440" marR="91440" marT="45720" marB="45720">
-                    <a:lnL w="2540" cap="flat" cmpd="sng" algn="ctr">
-                      <a:solidFill>
-                        <a:srgbClr val="EEEEEE"/>
-                      </a:solidFill>
-                      <a:prstDash val="solid"/>
-                      <a:round/>
-                      <a:headEnd type="none" w="med" len="med"/>
-                      <a:tailEnd type="none" w="med" len="med"/>
-                    </a:lnL>
-                    <a:lnR w="2540" cap="flat" cmpd="sng" algn="ctr">
-                      <a:solidFill>
-                        <a:srgbClr val="EEEEEE"/>
-                      </a:solidFill>
-                      <a:prstDash val="solid"/>
-                      <a:round/>
-                      <a:headEnd type="none" w="med" len="med"/>
-                      <a:tailEnd type="none" w="med" len="med"/>
-                    </a:lnR>
-                    <a:lnT w="2540" cap="flat" cmpd="sng" algn="ctr">
-                      <a:solidFill>
-                        <a:srgbClr val="EEEEEE"/>
-                      </a:solidFill>
-                      <a:prstDash val="solid"/>
-                      <a:round/>
-                      <a:headEnd type="none" w="med" len="med"/>
-                      <a:tailEnd type="none" w="med" len="med"/>
-                    </a:lnT>
-                    <a:lnB w="2540" cap="flat" cmpd="sng" algn="ctr">
-                      <a:solidFill>
-                        <a:srgbClr val="EEEEEE"/>
-                      </a:solidFill>
-                      <a:prstDash val="solid"/>
-                      <a:round/>
-                      <a:headEnd type="none" w="med" len="med"/>
-                      <a:tailEnd type="none" w="med" len="med"/>
-                    </a:lnB>
-                  </a:tcPr>
-                </a:tc>
-                <a:tc>
-                  <a:txBody>
-                    <a:bodyPr/>
-                    <a:lstStyle/>
-                    <a:p>
-                      <a:pPr algn="ctr" indent="0" marL="0">
-                        <a:buNone/>
-                      </a:pPr>
-                      <a:r>
-                        <a:rPr lang="en-US" sz="500" dirty="0">
-                          <a:solidFill>
-                            <a:srgbClr val="000000"/>
-                          </a:solidFill>
-                          <a:latin typeface="Calibri" pitchFamily="34" charset="0"/>
-                          <a:ea typeface="Calibri" pitchFamily="34" charset="-122"/>
-                          <a:cs typeface="Calibri" pitchFamily="34" charset="-120"/>
-                        </a:rPr>
-                        <a:t>5.47%</a:t>
-                      </a:r>
-                      <a:endParaRPr lang="en-US" sz="500" dirty="0">
-                        <a:latin typeface="Calibri" charset="0"/>
-                        <a:ea typeface="Calibri" charset="0"/>
-                        <a:cs typeface="Calibri" charset="0"/>
-                      </a:endParaRPr>
-                    </a:p>
-                  </a:txBody>
-                  <a:tcPr marL="91440" marR="91440" marT="45720" marB="45720">
-                    <a:lnL w="2540" cap="flat" cmpd="sng" algn="ctr">
-                      <a:solidFill>
-                        <a:srgbClr val="EEEEEE"/>
-                      </a:solidFill>
-                      <a:prstDash val="solid"/>
-                      <a:round/>
-                      <a:headEnd type="none" w="med" len="med"/>
-                      <a:tailEnd type="none" w="med" len="med"/>
-                    </a:lnL>
-                    <a:lnR w="2540" cap="flat" cmpd="sng" algn="ctr">
-                      <a:solidFill>
-                        <a:srgbClr val="EEEEEE"/>
-                      </a:solidFill>
-                      <a:prstDash val="solid"/>
-                      <a:round/>
-                      <a:headEnd type="none" w="med" len="med"/>
-                      <a:tailEnd type="none" w="med" len="med"/>
-                    </a:lnR>
-                    <a:lnT w="2540" cap="flat" cmpd="sng" algn="ctr">
-                      <a:solidFill>
-                        <a:srgbClr val="EEEEEE"/>
-                      </a:solidFill>
-                      <a:prstDash val="solid"/>
-                      <a:round/>
-                      <a:headEnd type="none" w="med" len="med"/>
-                      <a:tailEnd type="none" w="med" len="med"/>
-                    </a:lnT>
-                    <a:lnB w="2540" cap="flat" cmpd="sng" algn="ctr">
-                      <a:solidFill>
-                        <a:srgbClr val="EEEEEE"/>
-                      </a:solidFill>
-                      <a:prstDash val="solid"/>
-                      <a:round/>
-                      <a:headEnd type="none" w="med" len="med"/>
-                      <a:tailEnd type="none" w="med" len="med"/>
-                    </a:lnB>
-                  </a:tcPr>
-                </a:tc>
-                <a:tc>
-                  <a:txBody>
-                    <a:bodyPr/>
-                    <a:lstStyle/>
-                    <a:p>
-                      <a:pPr algn="ctr" indent="0" marL="0">
-                        <a:buNone/>
-                      </a:pPr>
-                      <a:r>
-                        <a:rPr lang="en-US" sz="500" dirty="0">
-                          <a:solidFill>
-                            <a:srgbClr val="000000"/>
-                          </a:solidFill>
-                          <a:latin typeface="Calibri" pitchFamily="34" charset="0"/>
-                          <a:ea typeface="Calibri" pitchFamily="34" charset="-122"/>
-                          <a:cs typeface="Calibri" pitchFamily="34" charset="-120"/>
-                        </a:rPr>
-                        <a:t>4.34%</a:t>
-                      </a:r>
-                      <a:endParaRPr lang="en-US" sz="500" dirty="0">
-                        <a:latin typeface="Calibri" charset="0"/>
-                        <a:ea typeface="Calibri" charset="0"/>
-                        <a:cs typeface="Calibri" charset="0"/>
-                      </a:endParaRPr>
-                    </a:p>
-                  </a:txBody>
-                  <a:tcPr marL="91440" marR="91440" marT="45720" marB="45720">
-                    <a:lnL w="2540" cap="flat" cmpd="sng" algn="ctr">
-                      <a:solidFill>
-                        <a:srgbClr val="EEEEEE"/>
-                      </a:solidFill>
-                      <a:prstDash val="solid"/>
-                      <a:round/>
-                      <a:headEnd type="none" w="med" len="med"/>
-                      <a:tailEnd type="none" w="med" len="med"/>
-                    </a:lnL>
-                    <a:lnR w="2540" cap="flat" cmpd="sng" algn="ctr">
-                      <a:solidFill>
-                        <a:srgbClr val="EEEEEE"/>
-                      </a:solidFill>
-                      <a:prstDash val="solid"/>
-                      <a:round/>
-                      <a:headEnd type="none" w="med" len="med"/>
-                      <a:tailEnd type="none" w="med" len="med"/>
-                    </a:lnR>
-                    <a:lnT w="2540" cap="flat" cmpd="sng" algn="ctr">
-                      <a:solidFill>
-                        <a:srgbClr val="EEEEEE"/>
-                      </a:solidFill>
-                      <a:prstDash val="solid"/>
-                      <a:round/>
-                      <a:headEnd type="none" w="med" len="med"/>
-                      <a:tailEnd type="none" w="med" len="med"/>
-                    </a:lnT>
-                    <a:lnB w="2540" cap="flat" cmpd="sng" algn="ctr">
-                      <a:solidFill>
-                        <a:srgbClr val="EEEEEE"/>
-                      </a:solidFill>
-                      <a:prstDash val="solid"/>
-                      <a:round/>
-                      <a:headEnd type="none" w="med" len="med"/>
-                      <a:tailEnd type="none" w="med" len="med"/>
-                    </a:lnB>
-                  </a:tcPr>
-                </a:tc>
-                <a:tc>
-                  <a:txBody>
-                    <a:bodyPr/>
-                    <a:lstStyle/>
-                    <a:p>
-                      <a:pPr algn="ctr" indent="0" marL="0">
-                        <a:buNone/>
-                      </a:pPr>
-                      <a:r>
-                        <a:rPr lang="en-US" sz="500" dirty="0">
-                          <a:solidFill>
-                            <a:srgbClr val="000000"/>
-                          </a:solidFill>
-                          <a:latin typeface="Calibri" pitchFamily="34" charset="0"/>
-                          <a:ea typeface="Calibri" pitchFamily="34" charset="-122"/>
-                          <a:cs typeface="Calibri" pitchFamily="34" charset="-120"/>
-                        </a:rPr>
-                        <a:t>5.32%</a:t>
-                      </a:r>
-                      <a:endParaRPr lang="en-US" sz="500" dirty="0">
-                        <a:latin typeface="Calibri" charset="0"/>
-                        <a:ea typeface="Calibri" charset="0"/>
-                        <a:cs typeface="Calibri" charset="0"/>
-                      </a:endParaRPr>
-                    </a:p>
-                  </a:txBody>
-                  <a:tcPr marL="91440" marR="91440" marT="45720" marB="45720">
-                    <a:lnL w="2540" cap="flat" cmpd="sng" algn="ctr">
-                      <a:solidFill>
-                        <a:srgbClr val="EEEEEE"/>
-                      </a:solidFill>
-                      <a:prstDash val="solid"/>
-                      <a:round/>
-                      <a:headEnd type="none" w="med" len="med"/>
-                      <a:tailEnd type="none" w="med" len="med"/>
-                    </a:lnL>
-                    <a:lnR w="2540" cap="flat" cmpd="sng" algn="ctr">
-                      <a:solidFill>
-                        <a:srgbClr val="EEEEEE"/>
-                      </a:solidFill>
-                      <a:prstDash val="solid"/>
-                      <a:round/>
-                      <a:headEnd type="none" w="med" len="med"/>
-                      <a:tailEnd type="none" w="med" len="med"/>
-                    </a:lnR>
-                    <a:lnT w="2540" cap="flat" cmpd="sng" algn="ctr">
-                      <a:solidFill>
-                        <a:srgbClr val="EEEEEE"/>
-                      </a:solidFill>
-                      <a:prstDash val="solid"/>
-                      <a:round/>
-                      <a:headEnd type="none" w="med" len="med"/>
-                      <a:tailEnd type="none" w="med" len="med"/>
-                    </a:lnT>
-                    <a:lnB w="2540" cap="flat" cmpd="sng" algn="ctr">
-                      <a:solidFill>
-                        <a:srgbClr val="EEEEEE"/>
-                      </a:solidFill>
-                      <a:prstDash val="solid"/>
-                      <a:round/>
-                      <a:headEnd type="none" w="med" len="med"/>
-                      <a:tailEnd type="none" w="med" len="med"/>
-                    </a:lnB>
-                  </a:tcPr>
-                </a:tc>
-                <a:tc>
-                  <a:txBody>
-                    <a:bodyPr/>
-                    <a:lstStyle/>
-                    <a:p>
-                      <a:pPr algn="ctr" indent="0" marL="0">
-                        <a:buNone/>
-                      </a:pPr>
-                      <a:r>
-                        <a:rPr lang="en-US" sz="500" dirty="0">
-                          <a:solidFill>
-                            <a:srgbClr val="000000"/>
-                          </a:solidFill>
-                          <a:latin typeface="Calibri" pitchFamily="34" charset="0"/>
-                          <a:ea typeface="Calibri" pitchFamily="34" charset="-122"/>
-                          <a:cs typeface="Calibri" pitchFamily="34" charset="-120"/>
-                        </a:rPr>
-                        <a:t>5.02%</a:t>
-                      </a:r>
-                      <a:endParaRPr lang="en-US" sz="500" dirty="0">
-                        <a:latin typeface="Calibri" charset="0"/>
-                        <a:ea typeface="Calibri" charset="0"/>
-                        <a:cs typeface="Calibri" charset="0"/>
-                      </a:endParaRPr>
-                    </a:p>
-                  </a:txBody>
-                  <a:tcPr marL="91440" marR="91440" marT="45720" marB="45720">
-                    <a:lnL w="2540" cap="flat" cmpd="sng" algn="ctr">
-                      <a:solidFill>
-                        <a:srgbClr val="EEEEEE"/>
-                      </a:solidFill>
-                      <a:prstDash val="solid"/>
-                      <a:round/>
-                      <a:headEnd type="none" w="med" len="med"/>
-                      <a:tailEnd type="none" w="med" len="med"/>
-                    </a:lnL>
-                    <a:lnR w="2540" cap="flat" cmpd="sng" algn="ctr">
-                      <a:solidFill>
-                        <a:srgbClr val="EEEEEE"/>
-                      </a:solidFill>
-                      <a:prstDash val="solid"/>
-                      <a:round/>
-                      <a:headEnd type="none" w="med" len="med"/>
-                      <a:tailEnd type="none" w="med" len="med"/>
-                    </a:lnR>
-                    <a:lnT w="2540" cap="flat" cmpd="sng" algn="ctr">
-                      <a:solidFill>
-                        <a:srgbClr val="EEEEEE"/>
-                      </a:solidFill>
-                      <a:prstDash val="solid"/>
-                      <a:round/>
-                      <a:headEnd type="none" w="med" len="med"/>
-                      <a:tailEnd type="none" w="med" len="med"/>
-                    </a:lnT>
-                    <a:lnB w="2540" cap="flat" cmpd="sng" algn="ctr">
-                      <a:solidFill>
-                        <a:srgbClr val="EEEEEE"/>
-                      </a:solidFill>
-                      <a:prstDash val="solid"/>
-                      <a:round/>
-                      <a:headEnd type="none" w="med" len="med"/>
-                      <a:tailEnd type="none" w="med" len="med"/>
-                    </a:lnB>
-                  </a:tcPr>
-                </a:tc>
-                <a:tc>
-                  <a:txBody>
-                    <a:bodyPr/>
-                    <a:lstStyle/>
-                    <a:p>
-                      <a:pPr algn="ctr" indent="0" marL="0">
-                        <a:buNone/>
-                      </a:pPr>
-                      <a:endParaRPr lang="en-US" sz="500" dirty="0">
-                        <a:latin typeface="Calibri" charset="0"/>
-                        <a:ea typeface="Calibri" charset="0"/>
-                        <a:cs typeface="Calibri" charset="0"/>
-                      </a:endParaRPr>
-                    </a:p>
-                  </a:txBody>
-                  <a:tcPr marL="91440" marR="91440" marT="45720" marB="45720">
-                    <a:lnL w="2540" cap="flat" cmpd="sng" algn="ctr">
-                      <a:solidFill>
-                        <a:srgbClr val="EEEEEE"/>
-                      </a:solidFill>
-                      <a:prstDash val="solid"/>
-                      <a:round/>
-                      <a:headEnd type="none" w="med" len="med"/>
-                      <a:tailEnd type="none" w="med" len="med"/>
-                    </a:lnL>
-                    <a:lnR w="2540" cap="flat" cmpd="sng" algn="ctr">
-                      <a:solidFill>
-                        <a:srgbClr val="EEEEEE"/>
-                      </a:solidFill>
-                      <a:prstDash val="solid"/>
-                      <a:round/>
-                      <a:headEnd type="none" w="med" len="med"/>
-                      <a:tailEnd type="none" w="med" len="med"/>
-                    </a:lnR>
-                    <a:lnT w="2540" cap="flat" cmpd="sng" algn="ctr">
-                      <a:solidFill>
-                        <a:srgbClr val="EEEEEE"/>
-                      </a:solidFill>
-                      <a:prstDash val="solid"/>
-                      <a:round/>
-                      <a:headEnd type="none" w="med" len="med"/>
-                      <a:tailEnd type="none" w="med" len="med"/>
-                    </a:lnT>
-                    <a:lnB w="2540" cap="flat" cmpd="sng" algn="ctr">
-                      <a:solidFill>
-                        <a:srgbClr val="EEEEEE"/>
-                      </a:solidFill>
-                      <a:prstDash val="solid"/>
-                      <a:round/>
-                      <a:headEnd type="none" w="med" len="med"/>
-                      <a:tailEnd type="none" w="med" len="med"/>
-                    </a:lnB>
-                  </a:tcPr>
-                </a:tc>
-                <a:tc>
-                  <a:txBody>
-                    <a:bodyPr/>
-                    <a:lstStyle/>
-                    <a:p>
-                      <a:pPr algn="ctr" indent="0" marL="0">
-                        <a:buNone/>
-                      </a:pPr>
-                      <a:endParaRPr lang="en-US" sz="500" dirty="0">
-                        <a:latin typeface="Calibri" charset="0"/>
-                        <a:ea typeface="Calibri" charset="0"/>
-                        <a:cs typeface="Calibri" charset="0"/>
-                      </a:endParaRPr>
-                    </a:p>
-                  </a:txBody>
-                  <a:tcPr marL="91440" marR="91440" marT="45720" marB="45720">
-                    <a:lnL w="2540" cap="flat" cmpd="sng" algn="ctr">
-                      <a:solidFill>
-                        <a:srgbClr val="EEEEEE"/>
-                      </a:solidFill>
-                      <a:prstDash val="solid"/>
-                      <a:round/>
-                      <a:headEnd type="none" w="med" len="med"/>
-                      <a:tailEnd type="none" w="med" len="med"/>
-                    </a:lnL>
-                    <a:lnR w="2540" cap="flat" cmpd="sng" algn="ctr">
-                      <a:solidFill>
-                        <a:srgbClr val="EEEEEE"/>
-                      </a:solidFill>
-                      <a:prstDash val="solid"/>
-                      <a:round/>
-                      <a:headEnd type="none" w="med" len="med"/>
-                      <a:tailEnd type="none" w="med" len="med"/>
-                    </a:lnR>
-                    <a:lnT w="2540" cap="flat" cmpd="sng" algn="ctr">
-                      <a:solidFill>
-                        <a:srgbClr val="EEEEEE"/>
-                      </a:solidFill>
-                      <a:prstDash val="solid"/>
-                      <a:round/>
-                      <a:headEnd type="none" w="med" len="med"/>
-                      <a:tailEnd type="none" w="med" len="med"/>
-                    </a:lnT>
-                    <a:lnB w="2540" cap="flat" cmpd="sng" algn="ctr">
-                      <a:solidFill>
-                        <a:srgbClr val="EEEEEE"/>
-                      </a:solidFill>
-                      <a:prstDash val="solid"/>
-                      <a:round/>
-                      <a:headEnd type="none" w="med" len="med"/>
-                      <a:tailEnd type="none" w="med" len="med"/>
-                    </a:lnB>
-                  </a:tcPr>
-                </a:tc>
-                <a:tc>
-                  <a:txBody>
-                    <a:bodyPr/>
-                    <a:lstStyle/>
-                    <a:p>
-                      <a:pPr algn="ctr" indent="0" marL="0">
-                        <a:buNone/>
-                      </a:pPr>
-                      <a:endParaRPr lang="en-US" sz="500" dirty="0">
-                        <a:latin typeface="Calibri" charset="0"/>
-                        <a:ea typeface="Calibri" charset="0"/>
-                        <a:cs typeface="Calibri" charset="0"/>
-                      </a:endParaRPr>
-                    </a:p>
-                  </a:txBody>
-                  <a:tcPr marL="91440" marR="91440" marT="45720" marB="45720">
-                    <a:lnL w="2540" cap="flat" cmpd="sng" algn="ctr">
-                      <a:solidFill>
-                        <a:srgbClr val="EEEEEE"/>
-                      </a:solidFill>
-                      <a:prstDash val="solid"/>
-                      <a:round/>
-                      <a:headEnd type="none" w="med" len="med"/>
-                      <a:tailEnd type="none" w="med" len="med"/>
-                    </a:lnL>
-                    <a:lnR w="2540" cap="flat" cmpd="sng" algn="ctr">
-                      <a:solidFill>
-                        <a:srgbClr val="EEEEEE"/>
-                      </a:solidFill>
-                      <a:prstDash val="solid"/>
-                      <a:round/>
-                      <a:headEnd type="none" w="med" len="med"/>
-                      <a:tailEnd type="none" w="med" len="med"/>
-                    </a:lnR>
-                    <a:lnT w="2540" cap="flat" cmpd="sng" algn="ctr">
-                      <a:solidFill>
-                        <a:srgbClr val="EEEEEE"/>
-                      </a:solidFill>
-                      <a:prstDash val="solid"/>
-                      <a:round/>
-                      <a:headEnd type="none" w="med" len="med"/>
-                      <a:tailEnd type="none" w="med" len="med"/>
-                    </a:lnT>
-                    <a:lnB w="2540" cap="flat" cmpd="sng" algn="ctr">
-                      <a:solidFill>
-                        <a:srgbClr val="EEEEEE"/>
-                      </a:solidFill>
-                      <a:prstDash val="solid"/>
-                      <a:round/>
-                      <a:headEnd type="none" w="med" len="med"/>
-                      <a:tailEnd type="none" w="med" len="med"/>
-                    </a:lnB>
-                  </a:tcPr>
-                </a:tc>
-                <a:tc>
-                  <a:txBody>
-                    <a:bodyPr/>
-                    <a:lstStyle/>
-                    <a:p>
-                      <a:pPr algn="ctr" indent="0" marL="0">
-                        <a:buNone/>
-                      </a:pPr>
-                      <a:endParaRPr lang="en-US" sz="500" dirty="0">
-                        <a:latin typeface="Calibri" charset="0"/>
-                        <a:ea typeface="Calibri" charset="0"/>
-                        <a:cs typeface="Calibri" charset="0"/>
-                      </a:endParaRPr>
-                    </a:p>
-                  </a:txBody>
-                  <a:tcPr marL="91440" marR="91440" marT="45720" marB="45720">
-                    <a:lnL w="2540" cap="flat" cmpd="sng" algn="ctr">
-                      <a:solidFill>
-                        <a:srgbClr val="EEEEEE"/>
-                      </a:solidFill>
-                      <a:prstDash val="solid"/>
-                      <a:round/>
-                      <a:headEnd type="none" w="med" len="med"/>
-                      <a:tailEnd type="none" w="med" len="med"/>
-                    </a:lnL>
-                    <a:lnR w="2540" cap="flat" cmpd="sng" algn="ctr">
-                      <a:solidFill>
-                        <a:srgbClr val="EEEEEE"/>
-                      </a:solidFill>
-                      <a:prstDash val="solid"/>
-                      <a:round/>
-                      <a:headEnd type="none" w="med" len="med"/>
-                      <a:tailEnd type="none" w="med" len="med"/>
-                    </a:lnR>
-                    <a:lnT w="2540" cap="flat" cmpd="sng" algn="ctr">
-                      <a:solidFill>
-                        <a:srgbClr val="EEEEEE"/>
-                      </a:solidFill>
-                      <a:prstDash val="solid"/>
-                      <a:round/>
-                      <a:headEnd type="none" w="med" len="med"/>
-                      <a:tailEnd type="none" w="med" len="med"/>
-                    </a:lnT>
-                    <a:lnB w="2540" cap="flat" cmpd="sng" algn="ctr">
-                      <a:solidFill>
-                        <a:srgbClr val="EEEEEE"/>
-                      </a:solidFill>
-                      <a:prstDash val="solid"/>
-                      <a:round/>
-                      <a:headEnd type="none" w="med" len="med"/>
-                      <a:tailEnd type="none" w="med" len="med"/>
-                    </a:lnB>
-                  </a:tcPr>
-                </a:tc>
-                <a:tc>
-                  <a:txBody>
-                    <a:bodyPr/>
-                    <a:lstStyle/>
-                    <a:p>
-                      <a:pPr algn="ctr" indent="0" marL="0">
-                        <a:buNone/>
-                      </a:pPr>
-                      <a:endParaRPr lang="en-US" sz="500" dirty="0">
-                        <a:latin typeface="Calibri" charset="0"/>
-                        <a:ea typeface="Calibri" charset="0"/>
-                        <a:cs typeface="Calibri" charset="0"/>
-                      </a:endParaRPr>
-                    </a:p>
-                  </a:txBody>
-                  <a:tcPr marL="91440" marR="91440" marT="45720" marB="45720">
-                    <a:lnL w="2540" cap="flat" cmpd="sng" algn="ctr">
-                      <a:solidFill>
-                        <a:srgbClr val="EEEEEE"/>
-                      </a:solidFill>
-                      <a:prstDash val="solid"/>
-                      <a:round/>
-                      <a:headEnd type="none" w="med" len="med"/>
-                      <a:tailEnd type="none" w="med" len="med"/>
-                    </a:lnL>
-                    <a:lnR w="2540" cap="flat" cmpd="sng" algn="ctr">
-                      <a:solidFill>
-                        <a:srgbClr val="EEEEEE"/>
-                      </a:solidFill>
-                      <a:prstDash val="solid"/>
-                      <a:round/>
-                      <a:headEnd type="none" w="med" len="med"/>
-                      <a:tailEnd type="none" w="med" len="med"/>
-                    </a:lnR>
-                    <a:lnT w="2540" cap="flat" cmpd="sng" algn="ctr">
-                      <a:solidFill>
-                        <a:srgbClr val="EEEEEE"/>
-                      </a:solidFill>
-                      <a:prstDash val="solid"/>
-                      <a:round/>
-                      <a:headEnd type="none" w="med" len="med"/>
-                      <a:tailEnd type="none" w="med" len="med"/>
-                    </a:lnT>
-                    <a:lnB w="2540" cap="flat" cmpd="sng" algn="ctr">
-                      <a:solidFill>
-                        <a:srgbClr val="EEEEEE"/>
-                      </a:solidFill>
-                      <a:prstDash val="solid"/>
-                      <a:round/>
-                      <a:headEnd type="none" w="med" len="med"/>
-                      <a:tailEnd type="none" w="med" len="med"/>
-                    </a:lnB>
-                  </a:tcPr>
-                </a:tc>
-                <a:tc>
-                  <a:txBody>
-                    <a:bodyPr/>
-                    <a:lstStyle/>
-                    <a:p>
-                      <a:pPr algn="ctr" indent="0" marL="0">
-                        <a:buNone/>
-                      </a:pPr>
-                      <a:endParaRPr lang="en-US" sz="500" dirty="0">
-                        <a:latin typeface="Calibri" charset="0"/>
-                        <a:ea typeface="Calibri" charset="0"/>
-                        <a:cs typeface="Calibri" charset="0"/>
-                      </a:endParaRPr>
-                    </a:p>
-                  </a:txBody>
-                  <a:tcPr marL="91440" marR="91440" marT="45720" marB="45720">
-                    <a:lnL w="2540" cap="flat" cmpd="sng" algn="ctr">
-                      <a:solidFill>
-                        <a:srgbClr val="EEEEEE"/>
-                      </a:solidFill>
-                      <a:prstDash val="solid"/>
-                      <a:round/>
-                      <a:headEnd type="none" w="med" len="med"/>
-                      <a:tailEnd type="none" w="med" len="med"/>
-                    </a:lnL>
-                    <a:lnR w="2540" cap="flat" cmpd="sng" algn="ctr">
-                      <a:solidFill>
-                        <a:srgbClr val="EEEEEE"/>
-                      </a:solidFill>
-                      <a:prstDash val="solid"/>
-                      <a:round/>
-                      <a:headEnd type="none" w="med" len="med"/>
-                      <a:tailEnd type="none" w="med" len="med"/>
-                    </a:lnR>
-                    <a:lnT w="2540" cap="flat" cmpd="sng" algn="ctr">
-                      <a:solidFill>
-                        <a:srgbClr val="EEEEEE"/>
-                      </a:solidFill>
-                      <a:prstDash val="solid"/>
-                      <a:round/>
-                      <a:headEnd type="none" w="med" len="med"/>
-                      <a:tailEnd type="none" w="med" len="med"/>
-                    </a:lnT>
-                    <a:lnB w="2540" cap="flat" cmpd="sng" algn="ctr">
-                      <a:solidFill>
-                        <a:srgbClr val="EEEEEE"/>
-                      </a:solidFill>
-                      <a:prstDash val="solid"/>
-                      <a:round/>
-                      <a:headEnd type="none" w="med" len="med"/>
-                      <a:tailEnd type="none" w="med" len="med"/>
-                    </a:lnB>
-                  </a:tcPr>
-                </a:tc>
-                <a:tc>
-                  <a:txBody>
-                    <a:bodyPr/>
-                    <a:lstStyle/>
-                    <a:p>
-                      <a:pPr algn="ctr" indent="0" marL="0">
-                        <a:buNone/>
-                      </a:pPr>
-                      <a:endParaRPr lang="en-US" sz="500" dirty="0">
-                        <a:latin typeface="Calibri" charset="0"/>
-                        <a:ea typeface="Calibri" charset="0"/>
-                        <a:cs typeface="Calibri" charset="0"/>
-                      </a:endParaRPr>
-                    </a:p>
-                  </a:txBody>
-                  <a:tcPr marL="91440" marR="91440" marT="45720" marB="45720">
-                    <a:lnL w="2540" cap="flat" cmpd="sng" algn="ctr">
-                      <a:solidFill>
-                        <a:srgbClr val="EEEEEE"/>
-                      </a:solidFill>
-                      <a:prstDash val="solid"/>
-                      <a:round/>
-                      <a:headEnd type="none" w="med" len="med"/>
-                      <a:tailEnd type="none" w="med" len="med"/>
-                    </a:lnL>
-                    <a:lnR w="2540" cap="flat" cmpd="sng" algn="ctr">
-                      <a:solidFill>
-                        <a:srgbClr val="EEEEEE"/>
-                      </a:solidFill>
-                      <a:prstDash val="solid"/>
-                      <a:round/>
-                      <a:headEnd type="none" w="med" len="med"/>
-                      <a:tailEnd type="none" w="med" len="med"/>
-                    </a:lnR>
-                    <a:lnT w="2540" cap="flat" cmpd="sng" algn="ctr">
-                      <a:solidFill>
-                        <a:srgbClr val="EEEEEE"/>
-                      </a:solidFill>
-                      <a:prstDash val="solid"/>
-                      <a:round/>
-                      <a:headEnd type="none" w="med" len="med"/>
-                      <a:tailEnd type="none" w="med" len="med"/>
-                    </a:lnT>
-                    <a:lnB w="2540" cap="flat" cmpd="sng" algn="ctr">
-                      <a:solidFill>
-                        <a:srgbClr val="EEEEEE"/>
-                      </a:solidFill>
-                      <a:prstDash val="solid"/>
-                      <a:round/>
-                      <a:headEnd type="none" w="med" len="med"/>
-                      <a:tailEnd type="none" w="med" len="med"/>
-                    </a:lnB>
-                  </a:tcPr>
-                </a:tc>
-                <a:tc>
-                  <a:txBody>
-                    <a:bodyPr/>
-                    <a:lstStyle/>
-                    <a:p>
-                      <a:pPr algn="ctr" indent="0" marL="0">
-                        <a:buNone/>
-                      </a:pPr>
-                      <a:endParaRPr lang="en-US" sz="500" dirty="0">
-                        <a:latin typeface="Calibri" charset="0"/>
-                        <a:ea typeface="Calibri" charset="0"/>
-                        <a:cs typeface="Calibri" charset="0"/>
-                      </a:endParaRPr>
-                    </a:p>
-                  </a:txBody>
-                  <a:tcPr marL="91440" marR="91440" marT="45720" marB="45720">
-                    <a:lnL w="2540" cap="flat" cmpd="sng" algn="ctr">
-                      <a:solidFill>
-                        <a:srgbClr val="EEEEEE"/>
-                      </a:solidFill>
-                      <a:prstDash val="solid"/>
-                      <a:round/>
-                      <a:headEnd type="none" w="med" len="med"/>
-                      <a:tailEnd type="none" w="med" len="med"/>
-                    </a:lnL>
-                    <a:lnR w="2540" cap="flat" cmpd="sng" algn="ctr">
-                      <a:solidFill>
-                        <a:srgbClr val="EEEEEE"/>
-                      </a:solidFill>
-                      <a:prstDash val="solid"/>
-                      <a:round/>
-                      <a:headEnd type="none" w="med" len="med"/>
-                      <a:tailEnd type="none" w="med" len="med"/>
-                    </a:lnR>
-                    <a:lnT w="2540" cap="flat" cmpd="sng" algn="ctr">
-                      <a:solidFill>
-                        <a:srgbClr val="EEEEEE"/>
-                      </a:solidFill>
-                      <a:prstDash val="solid"/>
-                      <a:round/>
-                      <a:headEnd type="none" w="med" len="med"/>
-                      <a:tailEnd type="none" w="med" len="med"/>
-                    </a:lnT>
-                    <a:lnB w="2540" cap="flat" cmpd="sng" algn="ctr">
-                      <a:solidFill>
-                        <a:srgbClr val="EEEEEE"/>
-                      </a:solidFill>
-                      <a:prstDash val="solid"/>
-                      <a:round/>
-                      <a:headEnd type="none" w="med" len="med"/>
-                      <a:tailEnd type="none" w="med" len="med"/>
-                    </a:lnB>
-                  </a:tcPr>
-                </a:tc>
-                <a:tc>
-                  <a:txBody>
-                    <a:bodyPr/>
-                    <a:lstStyle/>
-                    <a:p>
-                      <a:pPr algn="ctr" indent="0" marL="0">
-                        <a:buNone/>
-                      </a:pPr>
-                      <a:r>
-                        <a:rPr lang="en-US" sz="500" b="1" dirty="0">
-                          <a:solidFill>
-                            <a:srgbClr val="000000"/>
-                          </a:solidFill>
-                          <a:latin typeface="Calibri" pitchFamily="34" charset="0"/>
-                          <a:ea typeface="Calibri" pitchFamily="34" charset="-122"/>
-                          <a:cs typeface="Calibri" pitchFamily="34" charset="-120"/>
-                        </a:rPr>
-                        <a:t>3.66%</a:t>
-                      </a:r>
-                      <a:endParaRPr lang="en-US" sz="500" dirty="0">
-                        <a:latin typeface="Calibri" charset="0"/>
-                        <a:ea typeface="Calibri" charset="0"/>
-                        <a:cs typeface="Calibri" charset="0"/>
-                      </a:endParaRPr>
-                    </a:p>
-                  </a:txBody>
-                  <a:tcPr marL="91440" marR="91440" marT="45720" marB="45720">
-                    <a:lnL w="2540" cap="flat" cmpd="sng" algn="ctr">
-                      <a:solidFill>
-                        <a:srgbClr val="EEEEEE"/>
-                      </a:solidFill>
-                      <a:prstDash val="solid"/>
-                      <a:round/>
-                      <a:headEnd type="none" w="med" len="med"/>
-                      <a:tailEnd type="none" w="med" len="med"/>
-                    </a:lnL>
-                    <a:lnR w="2540" cap="flat" cmpd="sng" algn="ctr">
-                      <a:solidFill>
-                        <a:srgbClr val="EEEEEE"/>
-                      </a:solidFill>
-                      <a:prstDash val="solid"/>
-                      <a:round/>
-                      <a:headEnd type="none" w="med" len="med"/>
-                      <a:tailEnd type="none" w="med" len="med"/>
-                    </a:lnR>
-                    <a:lnT w="2540" cap="flat" cmpd="sng" algn="ctr">
-                      <a:solidFill>
-                        <a:srgbClr val="EEEEEE"/>
-                      </a:solidFill>
-                      <a:prstDash val="solid"/>
-                      <a:round/>
-                      <a:headEnd type="none" w="med" len="med"/>
-                      <a:tailEnd type="none" w="med" len="med"/>
-                    </a:lnT>
-                    <a:lnB w="2540" cap="flat" cmpd="sng" algn="ctr">
-                      <a:solidFill>
-                        <a:srgbClr val="EEEEEE"/>
-                      </a:solidFill>
-                      <a:prstDash val="solid"/>
-                      <a:round/>
-                      <a:headEnd type="none" w="med" len="med"/>
-                      <a:tailEnd type="none" w="med" len="med"/>
-                    </a:lnB>
+                    <a:solidFill>
+                      <a:srgbClr val="FFFFFF"/>
+                    </a:solidFill>
                   </a:tcPr>
                 </a:tc>
               </a:tr>
@@ -9601,6 +5000,45 @@
           </a:graphicData>
         </a:graphic>
       </p:graphicFrame>
+      <p:sp>
+        <p:nvSpPr>
+          <p:cNvPr id="50" name="Text 46"/>
+          <p:cNvSpPr/>
+          <p:nvPr/>
+        </p:nvSpPr>
+        <p:spPr>
+          <a:xfrm>
+            <a:off x="2606040" y="5349240"/>
+            <a:ext cx="4818888" cy="128016"/>
+          </a:xfrm>
+          <a:prstGeom prst="rect">
+            <a:avLst/>
+          </a:prstGeom>
+          <a:noFill/>
+          <a:ln/>
+        </p:spPr>
+        <p:txBody>
+          <a:bodyPr wrap="square" lIns="0" tIns="0" rIns="0" bIns="0" rtlCol="0" anchor="ctr"/>
+          <a:lstStyle/>
+          <a:p>
+            <a:pPr indent="0" marL="0">
+              <a:buNone/>
+            </a:pPr>
+            <a:r>
+              <a:rPr lang="en-US" sz="600" i="1" dirty="0">
+                <a:solidFill>
+                  <a:srgbClr val="999999"/>
+                </a:solidFill>
+                <a:latin typeface="Calibri" pitchFamily="34" charset="0"/>
+                <a:ea typeface="Calibri" pitchFamily="34" charset="-122"/>
+                <a:cs typeface="Calibri" pitchFamily="34" charset="-120"/>
+              </a:rPr>
+              <a:t>*Valores correspondientes a la rentabilidad anualizada, no acumulada</a:t>
+            </a:r>
+            <a:endParaRPr lang="en-US" sz="600" dirty="0"/>
+          </a:p>
+        </p:txBody>
+      </p:sp>
     </p:spTree>
   </p:cSld>
   <p:clrMapOvr>

--- a/folletos/2026-04/pptx/FIP_VANTRUST_LIQUIDEZ_RESERVA_DOLAR.pptx
+++ b/folletos/2026-04/pptx/FIP_VANTRUST_LIQUIDEZ_RESERVA_DOLAR.pptx
@@ -3203,7 +3203,7 @@
                 <a:ea typeface="Calibri" pitchFamily="34" charset="-122"/>
                 <a:cs typeface="Calibri" pitchFamily="34" charset="-120"/>
               </a:rPr>
-              <a:t>prueba USD</a:t>
+              <a:t>Prueba 15 CLP</a:t>
             </a:r>
             <a:endParaRPr lang="en-US" sz="800" dirty="0"/>
           </a:p>
